--- a/1402-1403-second-term/FPGA/D16_HLS-1.pptx
+++ b/1402-1403-second-term/FPGA/D16_HLS-1.pptx
@@ -391,35 +391,35 @@
           <a:p>
             <a:pPr lvl="0"/>
             <a:r>
-              <a:rPr lang="en-US" noProof="0" smtClean="0"/>
+              <a:rPr lang="en-US" noProof="0"/>
               <a:t>Click to edit Master text styles</a:t>
             </a:r>
           </a:p>
           <a:p>
             <a:pPr lvl="1"/>
             <a:r>
-              <a:rPr lang="en-US" noProof="0" smtClean="0"/>
+              <a:rPr lang="en-US" noProof="0"/>
               <a:t>Second level</a:t>
             </a:r>
           </a:p>
           <a:p>
             <a:pPr lvl="2"/>
             <a:r>
-              <a:rPr lang="en-US" noProof="0" smtClean="0"/>
+              <a:rPr lang="en-US" noProof="0"/>
               <a:t>Third level</a:t>
             </a:r>
           </a:p>
           <a:p>
             <a:pPr lvl="3"/>
             <a:r>
-              <a:rPr lang="en-US" noProof="0" smtClean="0"/>
+              <a:rPr lang="en-US" noProof="0"/>
               <a:t>Fourth level</a:t>
             </a:r>
           </a:p>
           <a:p>
             <a:pPr lvl="4"/>
             <a:r>
-              <a:rPr lang="en-US" noProof="0" smtClean="0"/>
+              <a:rPr lang="en-US" noProof="0"/>
               <a:t>Fifth level</a:t>
             </a:r>
           </a:p>
@@ -678,21 +678,19 @@
       </p:grpSpPr>
       <p:sp>
         <p:nvSpPr>
-          <p:cNvPr id="25602" name="Slide Image Placeholder 1"/>
-          <p:cNvSpPr>
-            <a:spLocks noGrp="1" noRot="1" noChangeAspect="1" noTextEdit="1"/>
+          <p:cNvPr id="2" name="Slide Image Placeholder 1"/>
+          <p:cNvSpPr>
+            <a:spLocks noGrp="1" noRot="1" noChangeAspect="1"/>
           </p:cNvSpPr>
           <p:nvPr>
             <p:ph type="sldImg"/>
           </p:nvPr>
         </p:nvSpPr>
-        <p:spPr>
-          <a:ln/>
-        </p:spPr>
-      </p:sp>
-      <p:sp>
-        <p:nvSpPr>
-          <p:cNvPr id="25603" name="Notes Placeholder 2"/>
+        <p:spPr/>
+      </p:sp>
+      <p:sp>
+        <p:nvSpPr>
+          <p:cNvPr id="3" name="Notes Placeholder 2"/>
           <p:cNvSpPr>
             <a:spLocks noGrp="1"/>
           </p:cNvSpPr>
@@ -700,40 +698,18 @@
             <p:ph type="body" idx="1"/>
           </p:nvPr>
         </p:nvSpPr>
-        <p:spPr>
-          <a:noFill/>
-          <a:ln/>
-          <a:extLst>
-            <a:ext uri="{909E8E84-426E-40DD-AFC4-6F175D3DCCD1}">
-              <a14:hiddenFill xmlns:a14="http://schemas.microsoft.com/office/drawing/2010/main">
-                <a:solidFill>
-                  <a:srgbClr val="FFFFFF"/>
-                </a:solidFill>
-              </a14:hiddenFill>
-            </a:ext>
-            <a:ext uri="{91240B29-F687-4F45-9708-019B960494DF}">
-              <a14:hiddenLine xmlns:a14="http://schemas.microsoft.com/office/drawing/2010/main" w="9525">
-                <a:solidFill>
-                  <a:srgbClr val="000000"/>
-                </a:solidFill>
-                <a:miter lim="800000"/>
-                <a:headEnd/>
-                <a:tailEnd/>
-              </a14:hiddenLine>
-            </a:ext>
-          </a:extLst>
-        </p:spPr>
+        <p:spPr/>
         <p:txBody>
           <a:bodyPr/>
           <a:lstStyle/>
           <a:p>
-            <a:endParaRPr lang="en-US" altLang="en-US" smtClean="0"/>
-          </a:p>
-        </p:txBody>
-      </p:sp>
-      <p:sp>
-        <p:nvSpPr>
-          <p:cNvPr id="25604" name="Slide Number Placeholder 3"/>
+            <a:endParaRPr lang="en-US" dirty="0"/>
+          </a:p>
+        </p:txBody>
+      </p:sp>
+      <p:sp>
+        <p:nvSpPr>
+          <p:cNvPr id="4" name="Slide Number Placeholder 3"/>
           <p:cNvSpPr>
             <a:spLocks noGrp="1"/>
           </p:cNvSpPr>
@@ -741,152 +717,29 @@
             <p:ph type="sldNum" sz="quarter" idx="5"/>
           </p:nvPr>
         </p:nvSpPr>
-        <p:spPr>
-          <a:noFill/>
-          <a:ln/>
-          <a:extLst>
-            <a:ext uri="{909E8E84-426E-40DD-AFC4-6F175D3DCCD1}">
-              <a14:hiddenFill xmlns:a14="http://schemas.microsoft.com/office/drawing/2010/main">
-                <a:solidFill>
-                  <a:srgbClr val="FFFFFF"/>
-                </a:solidFill>
-              </a14:hiddenFill>
-            </a:ext>
-            <a:ext uri="{91240B29-F687-4F45-9708-019B960494DF}">
-              <a14:hiddenLine xmlns:a14="http://schemas.microsoft.com/office/drawing/2010/main" w="9525">
-                <a:solidFill>
-                  <a:srgbClr val="000000"/>
-                </a:solidFill>
-                <a:miter lim="800000"/>
-                <a:headEnd/>
-                <a:tailEnd/>
-              </a14:hiddenLine>
-            </a:ext>
-          </a:extLst>
-        </p:spPr>
+        <p:spPr/>
         <p:txBody>
           <a:bodyPr/>
-          <a:lstStyle>
-            <a:lvl1pPr>
-              <a:defRPr sz="2100">
-                <a:solidFill>
-                  <a:schemeClr val="tx1"/>
-                </a:solidFill>
-                <a:latin typeface="Times New Roman" panose="02020603050405020304" pitchFamily="18" charset="0"/>
-                <a:cs typeface="Arial" panose="020B0604020202020204" pitchFamily="34" charset="0"/>
-              </a:defRPr>
-            </a:lvl1pPr>
-            <a:lvl2pPr marL="742950" indent="-285750">
-              <a:defRPr sz="2100">
-                <a:solidFill>
-                  <a:schemeClr val="tx1"/>
-                </a:solidFill>
-                <a:latin typeface="Times New Roman" panose="02020603050405020304" pitchFamily="18" charset="0"/>
-                <a:cs typeface="Arial" panose="020B0604020202020204" pitchFamily="34" charset="0"/>
-              </a:defRPr>
-            </a:lvl2pPr>
-            <a:lvl3pPr marL="1143000" indent="-228600">
-              <a:defRPr sz="2100">
-                <a:solidFill>
-                  <a:schemeClr val="tx1"/>
-                </a:solidFill>
-                <a:latin typeface="Times New Roman" panose="02020603050405020304" pitchFamily="18" charset="0"/>
-                <a:cs typeface="Arial" panose="020B0604020202020204" pitchFamily="34" charset="0"/>
-              </a:defRPr>
-            </a:lvl3pPr>
-            <a:lvl4pPr marL="1600200" indent="-228600">
-              <a:defRPr sz="2100">
-                <a:solidFill>
-                  <a:schemeClr val="tx1"/>
-                </a:solidFill>
-                <a:latin typeface="Times New Roman" panose="02020603050405020304" pitchFamily="18" charset="0"/>
-                <a:cs typeface="Arial" panose="020B0604020202020204" pitchFamily="34" charset="0"/>
-              </a:defRPr>
-            </a:lvl4pPr>
-            <a:lvl5pPr marL="2057400" indent="-228600">
-              <a:defRPr sz="2100">
-                <a:solidFill>
-                  <a:schemeClr val="tx1"/>
-                </a:solidFill>
-                <a:latin typeface="Times New Roman" panose="02020603050405020304" pitchFamily="18" charset="0"/>
-                <a:cs typeface="Arial" panose="020B0604020202020204" pitchFamily="34" charset="0"/>
-              </a:defRPr>
-            </a:lvl5pPr>
-            <a:lvl6pPr marL="2514600" indent="-228600" eaLnBrk="0" fontAlgn="base" hangingPunct="0">
-              <a:spcBef>
-                <a:spcPct val="0"/>
-              </a:spcBef>
-              <a:spcAft>
-                <a:spcPct val="0"/>
-              </a:spcAft>
-              <a:defRPr sz="2100">
-                <a:solidFill>
-                  <a:schemeClr val="tx1"/>
-                </a:solidFill>
-                <a:latin typeface="Times New Roman" panose="02020603050405020304" pitchFamily="18" charset="0"/>
-                <a:cs typeface="Arial" panose="020B0604020202020204" pitchFamily="34" charset="0"/>
-              </a:defRPr>
-            </a:lvl6pPr>
-            <a:lvl7pPr marL="2971800" indent="-228600" eaLnBrk="0" fontAlgn="base" hangingPunct="0">
-              <a:spcBef>
-                <a:spcPct val="0"/>
-              </a:spcBef>
-              <a:spcAft>
-                <a:spcPct val="0"/>
-              </a:spcAft>
-              <a:defRPr sz="2100">
-                <a:solidFill>
-                  <a:schemeClr val="tx1"/>
-                </a:solidFill>
-                <a:latin typeface="Times New Roman" panose="02020603050405020304" pitchFamily="18" charset="0"/>
-                <a:cs typeface="Arial" panose="020B0604020202020204" pitchFamily="34" charset="0"/>
-              </a:defRPr>
-            </a:lvl7pPr>
-            <a:lvl8pPr marL="3429000" indent="-228600" eaLnBrk="0" fontAlgn="base" hangingPunct="0">
-              <a:spcBef>
-                <a:spcPct val="0"/>
-              </a:spcBef>
-              <a:spcAft>
-                <a:spcPct val="0"/>
-              </a:spcAft>
-              <a:defRPr sz="2100">
-                <a:solidFill>
-                  <a:schemeClr val="tx1"/>
-                </a:solidFill>
-                <a:latin typeface="Times New Roman" panose="02020603050405020304" pitchFamily="18" charset="0"/>
-                <a:cs typeface="Arial" panose="020B0604020202020204" pitchFamily="34" charset="0"/>
-              </a:defRPr>
-            </a:lvl8pPr>
-            <a:lvl9pPr marL="3886200" indent="-228600" eaLnBrk="0" fontAlgn="base" hangingPunct="0">
-              <a:spcBef>
-                <a:spcPct val="0"/>
-              </a:spcBef>
-              <a:spcAft>
-                <a:spcPct val="0"/>
-              </a:spcAft>
-              <a:defRPr sz="2100">
-                <a:solidFill>
-                  <a:schemeClr val="tx1"/>
-                </a:solidFill>
-                <a:latin typeface="Times New Roman" panose="02020603050405020304" pitchFamily="18" charset="0"/>
-                <a:cs typeface="Arial" panose="020B0604020202020204" pitchFamily="34" charset="0"/>
-              </a:defRPr>
-            </a:lvl9pPr>
-          </a:lstStyle>
-          <a:p>
-            <a:fld id="{7E4728CB-98FF-4654-A884-627C32064073}" type="slidenum">
-              <a:rPr lang="en-US" altLang="en-US" sz="1200" smtClean="0"/>
-              <a:pPr/>
-              <a:t>3</a:t>
+          <a:lstStyle/>
+          <a:p>
+            <a:pPr>
+              <a:defRPr/>
+            </a:pPr>
+            <a:fld id="{61D15426-1D08-4C5A-895B-59DBAD2FD43D}" type="slidenum">
+              <a:rPr lang="en-US" altLang="en-US" smtClean="0"/>
+              <a:pPr>
+                <a:defRPr/>
+              </a:pPr>
+              <a:t>1</a:t>
             </a:fld>
-            <a:endParaRPr lang="en-US" altLang="en-US" sz="1200" smtClean="0"/>
+            <a:endParaRPr lang="en-US" altLang="en-US"/>
           </a:p>
         </p:txBody>
       </p:sp>
     </p:spTree>
     <p:extLst>
       <p:ext uri="{BB962C8B-B14F-4D97-AF65-F5344CB8AC3E}">
-        <p14:creationId xmlns:p14="http://schemas.microsoft.com/office/powerpoint/2010/main" val="2456781784"/>
+        <p14:creationId xmlns:p14="http://schemas.microsoft.com/office/powerpoint/2010/main" val="888661036"/>
       </p:ext>
     </p:extLst>
   </p:cSld>
@@ -915,19 +768,21 @@
       </p:grpSpPr>
       <p:sp>
         <p:nvSpPr>
-          <p:cNvPr id="2" name="Slide Image Placeholder 1"/>
-          <p:cNvSpPr>
-            <a:spLocks noGrp="1" noRot="1" noChangeAspect="1"/>
+          <p:cNvPr id="25602" name="Slide Image Placeholder 1"/>
+          <p:cNvSpPr>
+            <a:spLocks noGrp="1" noRot="1" noChangeAspect="1" noTextEdit="1"/>
           </p:cNvSpPr>
           <p:nvPr>
             <p:ph type="sldImg"/>
           </p:nvPr>
         </p:nvSpPr>
-        <p:spPr/>
-      </p:sp>
-      <p:sp>
-        <p:nvSpPr>
-          <p:cNvPr id="3" name="Notes Placeholder 2"/>
+        <p:spPr>
+          <a:ln/>
+        </p:spPr>
+      </p:sp>
+      <p:sp>
+        <p:nvSpPr>
+          <p:cNvPr id="25603" name="Notes Placeholder 2"/>
           <p:cNvSpPr>
             <a:spLocks noGrp="1"/>
           </p:cNvSpPr>
@@ -935,13 +790,248 @@
             <p:ph type="body" idx="1"/>
           </p:nvPr>
         </p:nvSpPr>
-        <p:spPr/>
+        <p:spPr>
+          <a:noFill/>
+          <a:ln/>
+          <a:extLst>
+            <a:ext uri="{909E8E84-426E-40DD-AFC4-6F175D3DCCD1}">
+              <a14:hiddenFill xmlns:a14="http://schemas.microsoft.com/office/drawing/2010/main">
+                <a:solidFill>
+                  <a:srgbClr val="FFFFFF"/>
+                </a:solidFill>
+              </a14:hiddenFill>
+            </a:ext>
+            <a:ext uri="{91240B29-F687-4F45-9708-019B960494DF}">
+              <a14:hiddenLine xmlns:a14="http://schemas.microsoft.com/office/drawing/2010/main" w="9525">
+                <a:solidFill>
+                  <a:srgbClr val="000000"/>
+                </a:solidFill>
+                <a:miter lim="800000"/>
+                <a:headEnd/>
+                <a:tailEnd/>
+              </a14:hiddenLine>
+            </a:ext>
+          </a:extLst>
+        </p:spPr>
         <p:txBody>
           <a:bodyPr/>
           <a:lstStyle/>
           <a:p>
-            <a:r>
-              <a:rPr lang="en-US" sz="1200" b="0" i="0" u="none" strike="noStrike" kern="1200" baseline="0" dirty="0" smtClean="0">
+            <a:endParaRPr lang="en-US" altLang="en-US"/>
+          </a:p>
+        </p:txBody>
+      </p:sp>
+      <p:sp>
+        <p:nvSpPr>
+          <p:cNvPr id="25604" name="Slide Number Placeholder 3"/>
+          <p:cNvSpPr>
+            <a:spLocks noGrp="1"/>
+          </p:cNvSpPr>
+          <p:nvPr>
+            <p:ph type="sldNum" sz="quarter" idx="5"/>
+          </p:nvPr>
+        </p:nvSpPr>
+        <p:spPr>
+          <a:noFill/>
+          <a:ln/>
+          <a:extLst>
+            <a:ext uri="{909E8E84-426E-40DD-AFC4-6F175D3DCCD1}">
+              <a14:hiddenFill xmlns:a14="http://schemas.microsoft.com/office/drawing/2010/main">
+                <a:solidFill>
+                  <a:srgbClr val="FFFFFF"/>
+                </a:solidFill>
+              </a14:hiddenFill>
+            </a:ext>
+            <a:ext uri="{91240B29-F687-4F45-9708-019B960494DF}">
+              <a14:hiddenLine xmlns:a14="http://schemas.microsoft.com/office/drawing/2010/main" w="9525">
+                <a:solidFill>
+                  <a:srgbClr val="000000"/>
+                </a:solidFill>
+                <a:miter lim="800000"/>
+                <a:headEnd/>
+                <a:tailEnd/>
+              </a14:hiddenLine>
+            </a:ext>
+          </a:extLst>
+        </p:spPr>
+        <p:txBody>
+          <a:bodyPr/>
+          <a:lstStyle>
+            <a:lvl1pPr>
+              <a:defRPr sz="2100">
+                <a:solidFill>
+                  <a:schemeClr val="tx1"/>
+                </a:solidFill>
+                <a:latin typeface="Times New Roman" panose="02020603050405020304" pitchFamily="18" charset="0"/>
+                <a:cs typeface="Arial" panose="020B0604020202020204" pitchFamily="34" charset="0"/>
+              </a:defRPr>
+            </a:lvl1pPr>
+            <a:lvl2pPr marL="742950" indent="-285750">
+              <a:defRPr sz="2100">
+                <a:solidFill>
+                  <a:schemeClr val="tx1"/>
+                </a:solidFill>
+                <a:latin typeface="Times New Roman" panose="02020603050405020304" pitchFamily="18" charset="0"/>
+                <a:cs typeface="Arial" panose="020B0604020202020204" pitchFamily="34" charset="0"/>
+              </a:defRPr>
+            </a:lvl2pPr>
+            <a:lvl3pPr marL="1143000" indent="-228600">
+              <a:defRPr sz="2100">
+                <a:solidFill>
+                  <a:schemeClr val="tx1"/>
+                </a:solidFill>
+                <a:latin typeface="Times New Roman" panose="02020603050405020304" pitchFamily="18" charset="0"/>
+                <a:cs typeface="Arial" panose="020B0604020202020204" pitchFamily="34" charset="0"/>
+              </a:defRPr>
+            </a:lvl3pPr>
+            <a:lvl4pPr marL="1600200" indent="-228600">
+              <a:defRPr sz="2100">
+                <a:solidFill>
+                  <a:schemeClr val="tx1"/>
+                </a:solidFill>
+                <a:latin typeface="Times New Roman" panose="02020603050405020304" pitchFamily="18" charset="0"/>
+                <a:cs typeface="Arial" panose="020B0604020202020204" pitchFamily="34" charset="0"/>
+              </a:defRPr>
+            </a:lvl4pPr>
+            <a:lvl5pPr marL="2057400" indent="-228600">
+              <a:defRPr sz="2100">
+                <a:solidFill>
+                  <a:schemeClr val="tx1"/>
+                </a:solidFill>
+                <a:latin typeface="Times New Roman" panose="02020603050405020304" pitchFamily="18" charset="0"/>
+                <a:cs typeface="Arial" panose="020B0604020202020204" pitchFamily="34" charset="0"/>
+              </a:defRPr>
+            </a:lvl5pPr>
+            <a:lvl6pPr marL="2514600" indent="-228600" eaLnBrk="0" fontAlgn="base" hangingPunct="0">
+              <a:spcBef>
+                <a:spcPct val="0"/>
+              </a:spcBef>
+              <a:spcAft>
+                <a:spcPct val="0"/>
+              </a:spcAft>
+              <a:defRPr sz="2100">
+                <a:solidFill>
+                  <a:schemeClr val="tx1"/>
+                </a:solidFill>
+                <a:latin typeface="Times New Roman" panose="02020603050405020304" pitchFamily="18" charset="0"/>
+                <a:cs typeface="Arial" panose="020B0604020202020204" pitchFamily="34" charset="0"/>
+              </a:defRPr>
+            </a:lvl6pPr>
+            <a:lvl7pPr marL="2971800" indent="-228600" eaLnBrk="0" fontAlgn="base" hangingPunct="0">
+              <a:spcBef>
+                <a:spcPct val="0"/>
+              </a:spcBef>
+              <a:spcAft>
+                <a:spcPct val="0"/>
+              </a:spcAft>
+              <a:defRPr sz="2100">
+                <a:solidFill>
+                  <a:schemeClr val="tx1"/>
+                </a:solidFill>
+                <a:latin typeface="Times New Roman" panose="02020603050405020304" pitchFamily="18" charset="0"/>
+                <a:cs typeface="Arial" panose="020B0604020202020204" pitchFamily="34" charset="0"/>
+              </a:defRPr>
+            </a:lvl7pPr>
+            <a:lvl8pPr marL="3429000" indent="-228600" eaLnBrk="0" fontAlgn="base" hangingPunct="0">
+              <a:spcBef>
+                <a:spcPct val="0"/>
+              </a:spcBef>
+              <a:spcAft>
+                <a:spcPct val="0"/>
+              </a:spcAft>
+              <a:defRPr sz="2100">
+                <a:solidFill>
+                  <a:schemeClr val="tx1"/>
+                </a:solidFill>
+                <a:latin typeface="Times New Roman" panose="02020603050405020304" pitchFamily="18" charset="0"/>
+                <a:cs typeface="Arial" panose="020B0604020202020204" pitchFamily="34" charset="0"/>
+              </a:defRPr>
+            </a:lvl8pPr>
+            <a:lvl9pPr marL="3886200" indent="-228600" eaLnBrk="0" fontAlgn="base" hangingPunct="0">
+              <a:spcBef>
+                <a:spcPct val="0"/>
+              </a:spcBef>
+              <a:spcAft>
+                <a:spcPct val="0"/>
+              </a:spcAft>
+              <a:defRPr sz="2100">
+                <a:solidFill>
+                  <a:schemeClr val="tx1"/>
+                </a:solidFill>
+                <a:latin typeface="Times New Roman" panose="02020603050405020304" pitchFamily="18" charset="0"/>
+                <a:cs typeface="Arial" panose="020B0604020202020204" pitchFamily="34" charset="0"/>
+              </a:defRPr>
+            </a:lvl9pPr>
+          </a:lstStyle>
+          <a:p>
+            <a:fld id="{7E4728CB-98FF-4654-A884-627C32064073}" type="slidenum">
+              <a:rPr lang="en-US" altLang="en-US" sz="1200" smtClean="0"/>
+              <a:pPr/>
+              <a:t>11</a:t>
+            </a:fld>
+            <a:endParaRPr lang="en-US" altLang="en-US" sz="1200"/>
+          </a:p>
+        </p:txBody>
+      </p:sp>
+    </p:spTree>
+    <p:extLst>
+      <p:ext uri="{BB962C8B-B14F-4D97-AF65-F5344CB8AC3E}">
+        <p14:creationId xmlns:p14="http://schemas.microsoft.com/office/powerpoint/2010/main" val="2510199567"/>
+      </p:ext>
+    </p:extLst>
+  </p:cSld>
+  <p:clrMapOvr>
+    <a:masterClrMapping/>
+  </p:clrMapOvr>
+</p:notes>
+</file>
+
+<file path=ppt/notesSlides/notesSlide11.xml><?xml version="1.0" encoding="utf-8"?>
+<p:notes xmlns:a="http://schemas.openxmlformats.org/drawingml/2006/main" xmlns:r="http://schemas.openxmlformats.org/officeDocument/2006/relationships" xmlns:p="http://schemas.openxmlformats.org/presentationml/2006/main">
+  <p:cSld>
+    <p:spTree>
+      <p:nvGrpSpPr>
+        <p:cNvPr id="1" name=""/>
+        <p:cNvGrpSpPr/>
+        <p:nvPr/>
+      </p:nvGrpSpPr>
+      <p:grpSpPr>
+        <a:xfrm>
+          <a:off x="0" y="0"/>
+          <a:ext cx="0" cy="0"/>
+          <a:chOff x="0" y="0"/>
+          <a:chExt cx="0" cy="0"/>
+        </a:xfrm>
+      </p:grpSpPr>
+      <p:sp>
+        <p:nvSpPr>
+          <p:cNvPr id="2" name="Slide Image Placeholder 1"/>
+          <p:cNvSpPr>
+            <a:spLocks noGrp="1" noRot="1" noChangeAspect="1"/>
+          </p:cNvSpPr>
+          <p:nvPr>
+            <p:ph type="sldImg"/>
+          </p:nvPr>
+        </p:nvSpPr>
+        <p:spPr/>
+      </p:sp>
+      <p:sp>
+        <p:nvSpPr>
+          <p:cNvPr id="3" name="Notes Placeholder 2"/>
+          <p:cNvSpPr>
+            <a:spLocks noGrp="1"/>
+          </p:cNvSpPr>
+          <p:nvPr>
+            <p:ph type="body" idx="1"/>
+          </p:nvPr>
+        </p:nvSpPr>
+        <p:spPr/>
+        <p:txBody>
+          <a:bodyPr/>
+          <a:lstStyle/>
+          <a:p>
+            <a:r>
+              <a:rPr lang="en-US" sz="1200" b="0" i="0" u="none" strike="noStrike" kern="1200" baseline="0" dirty="0">
                 <a:solidFill>
                   <a:schemeClr val="tx1"/>
                 </a:solidFill>
@@ -952,7 +1042,7 @@
               <a:t>The design does not start operation until </a:t>
             </a:r>
             <a:r>
-              <a:rPr lang="en-US" sz="1200" b="0" i="0" u="none" strike="noStrike" kern="1200" baseline="0" dirty="0" err="1" smtClean="0">
+              <a:rPr lang="en-US" sz="1200" b="0" i="0" u="none" strike="noStrike" kern="1200" baseline="0" dirty="0" err="1">
                 <a:solidFill>
                   <a:schemeClr val="tx1"/>
                 </a:solidFill>
@@ -963,7 +1053,7 @@
               <a:t>ap_start</a:t>
             </a:r>
             <a:r>
-              <a:rPr lang="en-US" sz="1200" b="0" i="0" u="none" strike="noStrike" kern="1200" baseline="0" dirty="0" smtClean="0">
+              <a:rPr lang="en-US" sz="1200" b="0" i="0" u="none" strike="noStrike" kern="1200" baseline="0" dirty="0">
                 <a:solidFill>
                   <a:schemeClr val="tx1"/>
                 </a:solidFill>
@@ -973,7 +1063,7 @@
               </a:rPr>
               <a:t> is set to logic 1.</a:t>
             </a:r>
-            <a:endParaRPr lang="fa-IR" sz="1200" b="0" i="0" u="none" strike="noStrike" kern="1200" baseline="0" dirty="0" smtClean="0">
+            <a:endParaRPr lang="fa-IR" sz="1200" b="0" i="0" u="none" strike="noStrike" kern="1200" baseline="0" dirty="0">
               <a:solidFill>
                 <a:schemeClr val="tx1"/>
               </a:solidFill>
@@ -984,7 +1074,7 @@
           </a:p>
           <a:p>
             <a:r>
-              <a:rPr lang="en-US" sz="1200" b="0" i="0" u="none" strike="noStrike" kern="1200" baseline="0" smtClean="0">
+              <a:rPr lang="en-US" sz="1200" b="0" i="0" u="none" strike="noStrike" kern="1200" baseline="0">
                 <a:solidFill>
                   <a:schemeClr val="tx1"/>
                 </a:solidFill>
@@ -995,7 +1085,7 @@
               <a:t>The </a:t>
             </a:r>
             <a:r>
-              <a:rPr lang="en-US" sz="1200" b="0" i="0" u="none" strike="noStrike" kern="1200" baseline="0" dirty="0" smtClean="0">
+              <a:rPr lang="en-US" sz="1200" b="0" i="0" u="none" strike="noStrike" kern="1200" baseline="0" dirty="0">
                 <a:solidFill>
                   <a:schemeClr val="tx1"/>
                 </a:solidFill>
@@ -1006,7 +1096,7 @@
               <a:t>design indicates it is no longer idle by setting port </a:t>
             </a:r>
             <a:r>
-              <a:rPr lang="en-US" sz="1200" b="0" i="0" u="none" strike="noStrike" kern="1200" baseline="0" dirty="0" err="1" smtClean="0">
+              <a:rPr lang="en-US" sz="1200" b="0" i="0" u="none" strike="noStrike" kern="1200" baseline="0" dirty="0" err="1">
                 <a:solidFill>
                   <a:schemeClr val="tx1"/>
                 </a:solidFill>
@@ -1017,7 +1107,7 @@
               <a:t>ap_idle</a:t>
             </a:r>
             <a:r>
-              <a:rPr lang="en-US" sz="1200" b="0" i="0" u="none" strike="noStrike" kern="1200" baseline="0" dirty="0" smtClean="0">
+              <a:rPr lang="en-US" sz="1200" b="0" i="0" u="none" strike="noStrike" kern="1200" baseline="0" dirty="0">
                 <a:solidFill>
                   <a:schemeClr val="tx1"/>
                 </a:solidFill>
@@ -1027,7 +1117,7 @@
               </a:rPr>
               <a:t> low.</a:t>
             </a:r>
-            <a:endParaRPr lang="fa-IR" sz="1200" b="0" i="0" u="none" strike="noStrike" kern="1200" baseline="0" dirty="0" smtClean="0">
+            <a:endParaRPr lang="fa-IR" sz="1200" b="0" i="0" u="none" strike="noStrike" kern="1200" baseline="0" dirty="0">
               <a:solidFill>
                 <a:schemeClr val="tx1"/>
               </a:solidFill>
@@ -1038,7 +1128,7 @@
           </a:p>
           <a:p>
             <a:r>
-              <a:rPr lang="en-US" sz="1200" b="0" i="0" u="none" strike="noStrike" kern="1200" baseline="0" dirty="0" smtClean="0">
+              <a:rPr lang="en-US" sz="1200" b="0" i="0" u="none" strike="noStrike" kern="1200" baseline="0" dirty="0">
                 <a:solidFill>
                   <a:schemeClr val="tx1"/>
                 </a:solidFill>
@@ -1049,7 +1139,7 @@
               <a:t>Five transactions are </a:t>
             </a:r>
             <a:r>
-              <a:rPr lang="en-US" sz="1200" b="0" i="0" u="none" strike="noStrike" kern="1200" baseline="0" smtClean="0">
+              <a:rPr lang="en-US" sz="1200" b="0" i="0" u="none" strike="noStrike" kern="1200" baseline="0">
                 <a:solidFill>
                   <a:schemeClr val="tx1"/>
                 </a:solidFill>
@@ -1059,7 +1149,7 @@
               </a:rPr>
               <a:t>shown. (one transaction: one execution of the C function)</a:t>
             </a:r>
-            <a:endParaRPr lang="fa-IR" sz="1200" b="0" i="0" u="none" strike="noStrike" kern="1200" baseline="0" dirty="0" smtClean="0">
+            <a:endParaRPr lang="fa-IR" sz="1200" b="0" i="0" u="none" strike="noStrike" kern="1200" baseline="0" dirty="0">
               <a:solidFill>
                 <a:schemeClr val="tx1"/>
               </a:solidFill>
@@ -1070,7 +1160,7 @@
           </a:p>
           <a:p>
             <a:r>
-              <a:rPr lang="en-US" sz="1200" b="0" i="0" u="none" strike="noStrike" kern="1200" baseline="0" dirty="0" smtClean="0">
+              <a:rPr lang="en-US" sz="1200" b="0" i="0" u="none" strike="noStrike" kern="1200" baseline="0" dirty="0">
                 <a:solidFill>
                   <a:schemeClr val="tx1"/>
                 </a:solidFill>
@@ -1081,7 +1171,7 @@
               <a:t>Output signal </a:t>
             </a:r>
             <a:r>
-              <a:rPr lang="en-US" sz="1200" b="0" i="0" u="none" strike="noStrike" kern="1200" baseline="0" dirty="0" err="1" smtClean="0">
+              <a:rPr lang="en-US" sz="1200" b="0" i="0" u="none" strike="noStrike" kern="1200" baseline="0" dirty="0" err="1">
                 <a:solidFill>
                   <a:schemeClr val="tx1"/>
                 </a:solidFill>
@@ -1092,7 +1182,7 @@
               <a:t>ap_ready</a:t>
             </a:r>
             <a:r>
-              <a:rPr lang="en-US" sz="1200" b="0" i="0" u="none" strike="noStrike" kern="1200" baseline="0" dirty="0" smtClean="0">
+              <a:rPr lang="en-US" sz="1200" b="0" i="0" u="none" strike="noStrike" kern="1200" baseline="0" dirty="0">
                 <a:solidFill>
                   <a:schemeClr val="tx1"/>
                 </a:solidFill>
@@ -1105,7 +1195,7 @@
           </a:p>
           <a:p>
             <a:r>
-              <a:rPr lang="en-US" sz="1200" b="0" i="0" u="none" strike="noStrike" kern="1200" baseline="0" dirty="0" smtClean="0">
+              <a:rPr lang="en-US" sz="1200" b="0" i="0" u="none" strike="noStrike" kern="1200" baseline="0" dirty="0">
                 <a:solidFill>
                   <a:schemeClr val="tx1"/>
                 </a:solidFill>
@@ -1115,7 +1205,7 @@
               </a:rPr>
               <a:t>the next clock.</a:t>
             </a:r>
-            <a:endParaRPr lang="fa-IR" sz="1200" b="0" i="0" u="none" strike="noStrike" kern="1200" baseline="0" dirty="0" smtClean="0">
+            <a:endParaRPr lang="fa-IR" sz="1200" b="0" i="0" u="none" strike="noStrike" kern="1200" baseline="0" dirty="0">
               <a:solidFill>
                 <a:schemeClr val="tx1"/>
               </a:solidFill>
@@ -1126,7 +1216,7 @@
           </a:p>
           <a:p>
             <a:r>
-              <a:rPr lang="en-US" sz="1200" b="0" i="0" u="none" strike="noStrike" kern="1200" baseline="0" dirty="0" smtClean="0">
+              <a:rPr lang="en-US" sz="1200" b="0" i="0" u="none" strike="noStrike" kern="1200" baseline="0" dirty="0">
                 <a:solidFill>
                   <a:schemeClr val="tx1"/>
                 </a:solidFill>
@@ -1137,7 +1227,7 @@
               <a:t>Output signal </a:t>
             </a:r>
             <a:r>
-              <a:rPr lang="en-US" sz="1200" b="0" i="0" u="none" strike="noStrike" kern="1200" baseline="0" dirty="0" err="1" smtClean="0">
+              <a:rPr lang="en-US" sz="1200" b="0" i="0" u="none" strike="noStrike" kern="1200" baseline="0" dirty="0" err="1">
                 <a:solidFill>
                   <a:schemeClr val="tx1"/>
                 </a:solidFill>
@@ -1148,7 +1238,7 @@
               <a:t>ap_done</a:t>
             </a:r>
             <a:r>
-              <a:rPr lang="en-US" sz="1200" b="0" i="0" u="none" strike="noStrike" kern="1200" baseline="0" dirty="0" smtClean="0">
+              <a:rPr lang="en-US" sz="1200" b="0" i="0" u="none" strike="noStrike" kern="1200" baseline="0" dirty="0">
                 <a:solidFill>
                   <a:schemeClr val="tx1"/>
                 </a:solidFill>
@@ -1161,7 +1251,7 @@
           </a:p>
           <a:p>
             <a:r>
-              <a:rPr lang="en-US" sz="1200" b="0" i="0" u="none" strike="noStrike" kern="1200" baseline="0" dirty="0" smtClean="0">
+              <a:rPr lang="en-US" sz="1200" b="0" i="0" u="none" strike="noStrike" kern="1200" baseline="0" dirty="0">
                 <a:solidFill>
                   <a:schemeClr val="tx1"/>
                 </a:solidFill>
@@ -1172,7 +1262,7 @@
               <a:t>output port </a:t>
             </a:r>
             <a:r>
-              <a:rPr lang="en-US" sz="1200" b="0" i="0" u="none" strike="noStrike" kern="1200" baseline="0" dirty="0" err="1" smtClean="0">
+              <a:rPr lang="en-US" sz="1200" b="0" i="0" u="none" strike="noStrike" kern="1200" baseline="0" dirty="0" err="1">
                 <a:solidFill>
                   <a:schemeClr val="tx1"/>
                 </a:solidFill>
@@ -1183,7 +1273,7 @@
               <a:t>ap_return</a:t>
             </a:r>
             <a:r>
-              <a:rPr lang="en-US" sz="1200" b="0" i="0" u="none" strike="noStrike" kern="1200" baseline="0" dirty="0" smtClean="0">
+              <a:rPr lang="en-US" sz="1200" b="0" i="0" u="none" strike="noStrike" kern="1200" baseline="0" dirty="0">
                 <a:solidFill>
                   <a:schemeClr val="tx1"/>
                 </a:solidFill>
@@ -1196,7 +1286,7 @@
           </a:p>
           <a:p>
             <a:r>
-              <a:rPr lang="en-US" sz="1200" b="0" i="0" u="none" strike="noStrike" kern="1200" baseline="0" dirty="0" smtClean="0">
+              <a:rPr lang="en-US" sz="1200" b="0" i="0" u="none" strike="noStrike" kern="1200" baseline="0" dirty="0">
                 <a:solidFill>
                   <a:schemeClr val="tx1"/>
                 </a:solidFill>
@@ -1206,7 +1296,7 @@
               </a:rPr>
               <a:t>inputs).</a:t>
             </a:r>
-            <a:endParaRPr lang="fa-IR" sz="1200" b="0" i="0" u="none" strike="noStrike" kern="1200" baseline="0" dirty="0" smtClean="0">
+            <a:endParaRPr lang="fa-IR" sz="1200" b="0" i="0" u="none" strike="noStrike" kern="1200" baseline="0" dirty="0">
               <a:solidFill>
                 <a:schemeClr val="tx1"/>
               </a:solidFill>
@@ -1217,7 +1307,7 @@
           </a:p>
           <a:p>
             <a:r>
-              <a:rPr lang="en-US" sz="1200" b="0" i="0" u="none" strike="noStrike" kern="1200" baseline="0" dirty="0" smtClean="0">
+              <a:rPr lang="en-US" sz="1200" b="0" i="0" u="none" strike="noStrike" kern="1200" baseline="0" dirty="0">
                 <a:solidFill>
                   <a:schemeClr val="tx1"/>
                 </a:solidFill>
@@ -1228,7 +1318,7 @@
               <a:t>Because </a:t>
             </a:r>
             <a:r>
-              <a:rPr lang="en-US" sz="1200" b="0" i="0" u="none" strike="noStrike" kern="1200" baseline="0" dirty="0" err="1" smtClean="0">
+              <a:rPr lang="en-US" sz="1200" b="0" i="0" u="none" strike="noStrike" kern="1200" baseline="0" dirty="0" err="1">
                 <a:solidFill>
                   <a:schemeClr val="tx1"/>
                 </a:solidFill>
@@ -1239,7 +1329,7 @@
               <a:t>ap_start</a:t>
             </a:r>
             <a:r>
-              <a:rPr lang="en-US" sz="1200" b="0" i="0" u="none" strike="noStrike" kern="1200" baseline="0" dirty="0" smtClean="0">
+              <a:rPr lang="en-US" sz="1200" b="0" i="0" u="none" strike="noStrike" kern="1200" baseline="0" dirty="0">
                 <a:solidFill>
                   <a:schemeClr val="tx1"/>
                 </a:solidFill>
@@ -1249,7 +1339,7 @@
               </a:rPr>
               <a:t> is held high, the next transaction starts on the next clock cycle.</a:t>
             </a:r>
-            <a:endParaRPr lang="fa-IR" sz="1200" b="0" i="0" u="none" strike="noStrike" kern="1200" baseline="0" dirty="0" smtClean="0">
+            <a:endParaRPr lang="fa-IR" sz="1200" b="0" i="0" u="none" strike="noStrike" kern="1200" baseline="0" dirty="0">
               <a:solidFill>
                 <a:schemeClr val="tx1"/>
               </a:solidFill>
@@ -1260,7 +1350,7 @@
           </a:p>
           <a:p>
             <a:r>
-              <a:rPr lang="en-US" sz="1200" b="0" i="0" u="none" strike="noStrike" kern="1200" baseline="0" smtClean="0">
+              <a:rPr lang="en-US" sz="1200" b="0" i="0" u="none" strike="noStrike" kern="1200" baseline="0">
                 <a:solidFill>
                   <a:schemeClr val="tx1"/>
                 </a:solidFill>
@@ -1273,7 +1363,7 @@
           </a:p>
           <a:p>
             <a:r>
-              <a:rPr lang="en-US" sz="1200" b="0" i="0" u="none" strike="noStrike" kern="1200" baseline="0" smtClean="0">
+              <a:rPr lang="en-US" sz="1200" b="0" i="0" u="none" strike="noStrike" kern="1200" baseline="0">
                 <a:solidFill>
                   <a:schemeClr val="tx1"/>
                 </a:solidFill>
@@ -1286,7 +1376,7 @@
           </a:p>
           <a:p>
             <a:r>
-              <a:rPr lang="en-US" sz="1200" b="0" i="0" u="none" strike="noStrike" kern="1200" baseline="0" smtClean="0">
+              <a:rPr lang="en-US" sz="1200" b="0" i="0" u="none" strike="noStrike" kern="1200" baseline="0">
                 <a:solidFill>
                   <a:schemeClr val="tx1"/>
                 </a:solidFill>
@@ -1299,7 +1389,7 @@
           </a:p>
           <a:p>
             <a:r>
-              <a:rPr lang="en-US" sz="1200" b="0" i="0" u="none" strike="noStrike" kern="1200" baseline="0" smtClean="0">
+              <a:rPr lang="en-US" sz="1200" b="0" i="0" u="none" strike="noStrike" kern="1200" baseline="0">
                 <a:solidFill>
                   <a:schemeClr val="tx1"/>
                 </a:solidFill>
@@ -1312,7 +1402,7 @@
           </a:p>
           <a:p>
             <a:r>
-              <a:rPr lang="en-US" sz="1200" b="1" i="1" u="none" strike="noStrike" kern="1200" baseline="0" smtClean="0">
+              <a:rPr lang="en-US" sz="1200" b="1" i="1" u="none" strike="noStrike" kern="1200" baseline="0">
                 <a:solidFill>
                   <a:schemeClr val="tx1"/>
                 </a:solidFill>
@@ -1323,7 +1413,7 @@
               <a:t>Note: </a:t>
             </a:r>
             <a:r>
-              <a:rPr lang="en-US" sz="1200" b="0" i="0" u="none" strike="noStrike" kern="1200" baseline="0" smtClean="0">
+              <a:rPr lang="en-US" sz="1200" b="0" i="0" u="none" strike="noStrike" kern="1200" baseline="0">
                 <a:solidFill>
                   <a:schemeClr val="tx1"/>
                 </a:solidFill>
@@ -1336,7 +1426,7 @@
           </a:p>
           <a:p>
             <a:r>
-              <a:rPr lang="en-US" sz="1200" b="0" i="0" u="none" strike="noStrike" kern="1200" baseline="0" smtClean="0">
+              <a:rPr lang="en-US" sz="1200" b="0" i="0" u="none" strike="noStrike" kern="1200" baseline="0">
                 <a:solidFill>
                   <a:schemeClr val="tx1"/>
                 </a:solidFill>
@@ -1460,7 +1550,7 @@
           <a:bodyPr/>
           <a:lstStyle/>
           <a:p>
-            <a:endParaRPr lang="en-US" altLang="en-US" smtClean="0"/>
+            <a:endParaRPr lang="en-US" altLang="en-US"/>
           </a:p>
         </p:txBody>
       </p:sp>
@@ -1610,16 +1700,16 @@
             <a:fld id="{7E4728CB-98FF-4654-A884-627C32064073}" type="slidenum">
               <a:rPr lang="en-US" altLang="en-US" sz="1200" smtClean="0"/>
               <a:pPr/>
-              <a:t>4</a:t>
+              <a:t>3</a:t>
             </a:fld>
-            <a:endParaRPr lang="en-US" altLang="en-US" sz="1200" smtClean="0"/>
+            <a:endParaRPr lang="en-US" altLang="en-US" sz="1200"/>
           </a:p>
         </p:txBody>
       </p:sp>
     </p:spTree>
     <p:extLst>
       <p:ext uri="{BB962C8B-B14F-4D97-AF65-F5344CB8AC3E}">
-        <p14:creationId xmlns:p14="http://schemas.microsoft.com/office/powerpoint/2010/main" val="3755991868"/>
+        <p14:creationId xmlns:p14="http://schemas.microsoft.com/office/powerpoint/2010/main" val="2456781784"/>
       </p:ext>
     </p:extLst>
   </p:cSld>
@@ -1697,7 +1787,7 @@
           <a:bodyPr/>
           <a:lstStyle/>
           <a:p>
-            <a:endParaRPr lang="en-US" altLang="en-US" smtClean="0"/>
+            <a:endParaRPr lang="en-US" altLang="en-US"/>
           </a:p>
         </p:txBody>
       </p:sp>
@@ -1847,16 +1937,16 @@
             <a:fld id="{7E4728CB-98FF-4654-A884-627C32064073}" type="slidenum">
               <a:rPr lang="en-US" altLang="en-US" sz="1200" smtClean="0"/>
               <a:pPr/>
-              <a:t>5</a:t>
+              <a:t>4</a:t>
             </a:fld>
-            <a:endParaRPr lang="en-US" altLang="en-US" sz="1200" smtClean="0"/>
+            <a:endParaRPr lang="en-US" altLang="en-US" sz="1200"/>
           </a:p>
         </p:txBody>
       </p:sp>
     </p:spTree>
     <p:extLst>
       <p:ext uri="{BB962C8B-B14F-4D97-AF65-F5344CB8AC3E}">
-        <p14:creationId xmlns:p14="http://schemas.microsoft.com/office/powerpoint/2010/main" val="314707195"/>
+        <p14:creationId xmlns:p14="http://schemas.microsoft.com/office/powerpoint/2010/main" val="3755991868"/>
       </p:ext>
     </p:extLst>
   </p:cSld>
@@ -1934,7 +2024,7 @@
           <a:bodyPr/>
           <a:lstStyle/>
           <a:p>
-            <a:endParaRPr lang="en-US" altLang="en-US" smtClean="0"/>
+            <a:endParaRPr lang="en-US" altLang="en-US"/>
           </a:p>
         </p:txBody>
       </p:sp>
@@ -2084,16 +2174,16 @@
             <a:fld id="{7E4728CB-98FF-4654-A884-627C32064073}" type="slidenum">
               <a:rPr lang="en-US" altLang="en-US" sz="1200" smtClean="0"/>
               <a:pPr/>
-              <a:t>6</a:t>
+              <a:t>5</a:t>
             </a:fld>
-            <a:endParaRPr lang="en-US" altLang="en-US" sz="1200" smtClean="0"/>
+            <a:endParaRPr lang="en-US" altLang="en-US" sz="1200"/>
           </a:p>
         </p:txBody>
       </p:sp>
     </p:spTree>
     <p:extLst>
       <p:ext uri="{BB962C8B-B14F-4D97-AF65-F5344CB8AC3E}">
-        <p14:creationId xmlns:p14="http://schemas.microsoft.com/office/powerpoint/2010/main" val="2204061499"/>
+        <p14:creationId xmlns:p14="http://schemas.microsoft.com/office/powerpoint/2010/main" val="314707195"/>
       </p:ext>
     </p:extLst>
   </p:cSld>
@@ -2171,7 +2261,7 @@
           <a:bodyPr/>
           <a:lstStyle/>
           <a:p>
-            <a:endParaRPr lang="en-US" altLang="en-US" smtClean="0"/>
+            <a:endParaRPr lang="en-US" altLang="en-US"/>
           </a:p>
         </p:txBody>
       </p:sp>
@@ -2321,16 +2411,16 @@
             <a:fld id="{7E4728CB-98FF-4654-A884-627C32064073}" type="slidenum">
               <a:rPr lang="en-US" altLang="en-US" sz="1200" smtClean="0"/>
               <a:pPr/>
-              <a:t>7</a:t>
+              <a:t>6</a:t>
             </a:fld>
-            <a:endParaRPr lang="en-US" altLang="en-US" sz="1200" smtClean="0"/>
+            <a:endParaRPr lang="en-US" altLang="en-US" sz="1200"/>
           </a:p>
         </p:txBody>
       </p:sp>
     </p:spTree>
     <p:extLst>
       <p:ext uri="{BB962C8B-B14F-4D97-AF65-F5344CB8AC3E}">
-        <p14:creationId xmlns:p14="http://schemas.microsoft.com/office/powerpoint/2010/main" val="1772639384"/>
+        <p14:creationId xmlns:p14="http://schemas.microsoft.com/office/powerpoint/2010/main" val="2204061499"/>
       </p:ext>
     </p:extLst>
   </p:cSld>
@@ -2408,7 +2498,7 @@
           <a:bodyPr/>
           <a:lstStyle/>
           <a:p>
-            <a:endParaRPr lang="en-US" altLang="en-US" smtClean="0"/>
+            <a:endParaRPr lang="en-US" altLang="en-US"/>
           </a:p>
         </p:txBody>
       </p:sp>
@@ -2558,16 +2648,16 @@
             <a:fld id="{7E4728CB-98FF-4654-A884-627C32064073}" type="slidenum">
               <a:rPr lang="en-US" altLang="en-US" sz="1200" smtClean="0"/>
               <a:pPr/>
-              <a:t>8</a:t>
+              <a:t>7</a:t>
             </a:fld>
-            <a:endParaRPr lang="en-US" altLang="en-US" sz="1200" smtClean="0"/>
+            <a:endParaRPr lang="en-US" altLang="en-US" sz="1200"/>
           </a:p>
         </p:txBody>
       </p:sp>
     </p:spTree>
     <p:extLst>
       <p:ext uri="{BB962C8B-B14F-4D97-AF65-F5344CB8AC3E}">
-        <p14:creationId xmlns:p14="http://schemas.microsoft.com/office/powerpoint/2010/main" val="792612882"/>
+        <p14:creationId xmlns:p14="http://schemas.microsoft.com/office/powerpoint/2010/main" val="1772639384"/>
       </p:ext>
     </p:extLst>
   </p:cSld>
@@ -2645,7 +2735,7 @@
           <a:bodyPr/>
           <a:lstStyle/>
           <a:p>
-            <a:endParaRPr lang="en-US" altLang="en-US" smtClean="0"/>
+            <a:endParaRPr lang="en-US" altLang="en-US"/>
           </a:p>
         </p:txBody>
       </p:sp>
@@ -2795,16 +2885,16 @@
             <a:fld id="{7E4728CB-98FF-4654-A884-627C32064073}" type="slidenum">
               <a:rPr lang="en-US" altLang="en-US" sz="1200" smtClean="0"/>
               <a:pPr/>
-              <a:t>9</a:t>
+              <a:t>8</a:t>
             </a:fld>
-            <a:endParaRPr lang="en-US" altLang="en-US" sz="1200" smtClean="0"/>
+            <a:endParaRPr lang="en-US" altLang="en-US" sz="1200"/>
           </a:p>
         </p:txBody>
       </p:sp>
     </p:spTree>
     <p:extLst>
       <p:ext uri="{BB962C8B-B14F-4D97-AF65-F5344CB8AC3E}">
-        <p14:creationId xmlns:p14="http://schemas.microsoft.com/office/powerpoint/2010/main" val="4259200073"/>
+        <p14:creationId xmlns:p14="http://schemas.microsoft.com/office/powerpoint/2010/main" val="792612882"/>
       </p:ext>
     </p:extLst>
   </p:cSld>
@@ -2882,7 +2972,7 @@
           <a:bodyPr/>
           <a:lstStyle/>
           <a:p>
-            <a:endParaRPr lang="en-US" altLang="en-US" smtClean="0"/>
+            <a:endParaRPr lang="en-US" altLang="en-US"/>
           </a:p>
         </p:txBody>
       </p:sp>
@@ -3032,16 +3122,16 @@
             <a:fld id="{7E4728CB-98FF-4654-A884-627C32064073}" type="slidenum">
               <a:rPr lang="en-US" altLang="en-US" sz="1200" smtClean="0"/>
               <a:pPr/>
-              <a:t>10</a:t>
+              <a:t>9</a:t>
             </a:fld>
-            <a:endParaRPr lang="en-US" altLang="en-US" sz="1200" smtClean="0"/>
+            <a:endParaRPr lang="en-US" altLang="en-US" sz="1200"/>
           </a:p>
         </p:txBody>
       </p:sp>
     </p:spTree>
     <p:extLst>
       <p:ext uri="{BB962C8B-B14F-4D97-AF65-F5344CB8AC3E}">
-        <p14:creationId xmlns:p14="http://schemas.microsoft.com/office/powerpoint/2010/main" val="2022096708"/>
+        <p14:creationId xmlns:p14="http://schemas.microsoft.com/office/powerpoint/2010/main" val="4259200073"/>
       </p:ext>
     </p:extLst>
   </p:cSld>
@@ -3119,7 +3209,7 @@
           <a:bodyPr/>
           <a:lstStyle/>
           <a:p>
-            <a:endParaRPr lang="en-US" altLang="en-US" smtClean="0"/>
+            <a:endParaRPr lang="en-US" altLang="en-US"/>
           </a:p>
         </p:txBody>
       </p:sp>
@@ -3269,16 +3359,16 @@
             <a:fld id="{7E4728CB-98FF-4654-A884-627C32064073}" type="slidenum">
               <a:rPr lang="en-US" altLang="en-US" sz="1200" smtClean="0"/>
               <a:pPr/>
-              <a:t>11</a:t>
+              <a:t>10</a:t>
             </a:fld>
-            <a:endParaRPr lang="en-US" altLang="en-US" sz="1200" smtClean="0"/>
+            <a:endParaRPr lang="en-US" altLang="en-US" sz="1200"/>
           </a:p>
         </p:txBody>
       </p:sp>
     </p:spTree>
     <p:extLst>
       <p:ext uri="{BB962C8B-B14F-4D97-AF65-F5344CB8AC3E}">
-        <p14:creationId xmlns:p14="http://schemas.microsoft.com/office/powerpoint/2010/main" val="2510199567"/>
+        <p14:creationId xmlns:p14="http://schemas.microsoft.com/office/powerpoint/2010/main" val="2022096708"/>
       </p:ext>
     </p:extLst>
   </p:cSld>
@@ -3332,7 +3422,6 @@
             <a:headEnd/>
             <a:tailEnd/>
           </a:ln>
-          <a:extLst/>
         </p:spPr>
         <p:txBody>
           <a:bodyPr wrap="none" anchor="ctr"/>
@@ -3447,7 +3536,7 @@
             <a:pPr eaLnBrk="1" hangingPunct="1">
               <a:defRPr/>
             </a:pPr>
-            <a:endParaRPr lang="en-US" altLang="en-US" smtClean="0"/>
+            <a:endParaRPr lang="en-US" altLang="en-US"/>
           </a:p>
         </p:txBody>
       </p:sp>
@@ -3471,7 +3560,6 @@
           <a:ln>
             <a:noFill/>
           </a:ln>
-          <a:extLst/>
         </p:spPr>
         <p:txBody>
           <a:bodyPr lIns="101828" tIns="50914" rIns="101828" bIns="50914"/>
@@ -3586,7 +3674,7 @@
             <a:pPr>
               <a:defRPr/>
             </a:pPr>
-            <a:endParaRPr lang="en-US" altLang="en-US" sz="1300" smtClean="0">
+            <a:endParaRPr lang="en-US" altLang="en-US" sz="1300">
               <a:latin typeface="Arial" panose="020B0604020202020204" pitchFamily="34" charset="0"/>
             </a:endParaRPr>
           </a:p>
@@ -3612,7 +3700,6 @@
           <a:ln>
             <a:noFill/>
           </a:ln>
-          <a:extLst/>
         </p:spPr>
         <p:txBody>
           <a:bodyPr lIns="101828" tIns="50914" rIns="101828" bIns="50914"/>
@@ -3727,7 +3814,7 @@
             <a:pPr eaLnBrk="1" hangingPunct="1">
               <a:defRPr/>
             </a:pPr>
-            <a:endParaRPr lang="en-US" altLang="en-US" sz="2400" smtClean="0"/>
+            <a:endParaRPr lang="en-US" altLang="en-US" sz="2400"/>
           </a:p>
         </p:txBody>
       </p:sp>
@@ -3843,10 +3930,9 @@
           <a:lstStyle/>
           <a:p>
             <a:r>
-              <a:rPr lang="en-US" smtClean="0"/>
+              <a:rPr lang="en-US"/>
               <a:t>Click to edit Master title style</a:t>
             </a:r>
-            <a:endParaRPr lang="en-US"/>
           </a:p>
         </p:txBody>
       </p:sp>
@@ -3867,38 +3953,37 @@
           <a:p>
             <a:pPr lvl="0"/>
             <a:r>
-              <a:rPr lang="en-US" smtClean="0"/>
+              <a:rPr lang="en-US"/>
               <a:t>Click to edit Master text styles</a:t>
             </a:r>
           </a:p>
           <a:p>
             <a:pPr lvl="1"/>
             <a:r>
-              <a:rPr lang="en-US" smtClean="0"/>
+              <a:rPr lang="en-US"/>
               <a:t>Second level</a:t>
             </a:r>
           </a:p>
           <a:p>
             <a:pPr lvl="2"/>
             <a:r>
-              <a:rPr lang="en-US" smtClean="0"/>
+              <a:rPr lang="en-US"/>
               <a:t>Third level</a:t>
             </a:r>
           </a:p>
           <a:p>
             <a:pPr lvl="3"/>
             <a:r>
-              <a:rPr lang="en-US" smtClean="0"/>
+              <a:rPr lang="en-US"/>
               <a:t>Fourth level</a:t>
             </a:r>
           </a:p>
           <a:p>
             <a:pPr lvl="4"/>
             <a:r>
-              <a:rPr lang="en-US" smtClean="0"/>
+              <a:rPr lang="en-US"/>
               <a:t>Fifth level</a:t>
             </a:r>
-            <a:endParaRPr lang="en-US"/>
           </a:p>
         </p:txBody>
       </p:sp>
@@ -3988,10 +4073,9 @@
           <a:lstStyle/>
           <a:p>
             <a:r>
-              <a:rPr lang="en-US" smtClean="0"/>
+              <a:rPr lang="en-US"/>
               <a:t>Click to edit Master title style</a:t>
             </a:r>
-            <a:endParaRPr lang="en-US"/>
           </a:p>
         </p:txBody>
       </p:sp>
@@ -4017,38 +4101,37 @@
           <a:p>
             <a:pPr lvl="0"/>
             <a:r>
-              <a:rPr lang="en-US" smtClean="0"/>
+              <a:rPr lang="en-US"/>
               <a:t>Click to edit Master text styles</a:t>
             </a:r>
           </a:p>
           <a:p>
             <a:pPr lvl="1"/>
             <a:r>
-              <a:rPr lang="en-US" smtClean="0"/>
+              <a:rPr lang="en-US"/>
               <a:t>Second level</a:t>
             </a:r>
           </a:p>
           <a:p>
             <a:pPr lvl="2"/>
             <a:r>
-              <a:rPr lang="en-US" smtClean="0"/>
+              <a:rPr lang="en-US"/>
               <a:t>Third level</a:t>
             </a:r>
           </a:p>
           <a:p>
             <a:pPr lvl="3"/>
             <a:r>
-              <a:rPr lang="en-US" smtClean="0"/>
+              <a:rPr lang="en-US"/>
               <a:t>Fourth level</a:t>
             </a:r>
           </a:p>
           <a:p>
             <a:pPr lvl="4"/>
             <a:r>
-              <a:rPr lang="en-US" smtClean="0"/>
+              <a:rPr lang="en-US"/>
               <a:t>Fifth level</a:t>
             </a:r>
-            <a:endParaRPr lang="en-US"/>
           </a:p>
         </p:txBody>
       </p:sp>
@@ -4138,10 +4221,9 @@
           <a:lstStyle/>
           <a:p>
             <a:r>
-              <a:rPr lang="en-US" smtClean="0"/>
+              <a:rPr lang="en-US"/>
               <a:t>Click to edit Master title style</a:t>
             </a:r>
-            <a:endParaRPr lang="en-US"/>
           </a:p>
         </p:txBody>
       </p:sp>
@@ -4203,10 +4285,9 @@
           </a:lstStyle>
           <a:p>
             <a:r>
-              <a:rPr lang="en-US" smtClean="0"/>
+              <a:rPr lang="en-US"/>
               <a:t>Click to edit Master subtitle style</a:t>
             </a:r>
-            <a:endParaRPr lang="en-US"/>
           </a:p>
         </p:txBody>
       </p:sp>
@@ -4347,10 +4428,9 @@
           <a:lstStyle/>
           <a:p>
             <a:r>
-              <a:rPr lang="en-US" smtClean="0"/>
+              <a:rPr lang="en-US"/>
               <a:t>Click to edit Master title style</a:t>
             </a:r>
-            <a:endParaRPr lang="en-US"/>
           </a:p>
         </p:txBody>
       </p:sp>
@@ -4371,38 +4451,37 @@
           <a:p>
             <a:pPr lvl="0"/>
             <a:r>
-              <a:rPr lang="en-US" smtClean="0"/>
+              <a:rPr lang="en-US"/>
               <a:t>Click to edit Master text styles</a:t>
             </a:r>
           </a:p>
           <a:p>
             <a:pPr lvl="1"/>
             <a:r>
-              <a:rPr lang="en-US" smtClean="0"/>
+              <a:rPr lang="en-US"/>
               <a:t>Second level</a:t>
             </a:r>
           </a:p>
           <a:p>
             <a:pPr lvl="2"/>
             <a:r>
-              <a:rPr lang="en-US" smtClean="0"/>
+              <a:rPr lang="en-US"/>
               <a:t>Third level</a:t>
             </a:r>
           </a:p>
           <a:p>
             <a:pPr lvl="3"/>
             <a:r>
-              <a:rPr lang="en-US" smtClean="0"/>
+              <a:rPr lang="en-US"/>
               <a:t>Fourth level</a:t>
             </a:r>
           </a:p>
           <a:p>
             <a:pPr lvl="4"/>
             <a:r>
-              <a:rPr lang="en-US" smtClean="0"/>
+              <a:rPr lang="en-US"/>
               <a:t>Fifth level</a:t>
             </a:r>
-            <a:endParaRPr lang="en-US"/>
           </a:p>
         </p:txBody>
       </p:sp>
@@ -4552,10 +4631,9 @@
           </a:lstStyle>
           <a:p>
             <a:r>
-              <a:rPr lang="en-US" smtClean="0"/>
+              <a:rPr lang="en-US"/>
               <a:t>Click to edit Master title style</a:t>
             </a:r>
-            <a:endParaRPr lang="en-US"/>
           </a:p>
         </p:txBody>
       </p:sp>
@@ -4618,7 +4696,7 @@
           <a:p>
             <a:pPr lvl="0"/>
             <a:r>
-              <a:rPr lang="en-US" smtClean="0"/>
+              <a:rPr lang="en-US"/>
               <a:t>Click to edit Master text styles</a:t>
             </a:r>
           </a:p>
@@ -4761,10 +4839,9 @@
           <a:lstStyle/>
           <a:p>
             <a:r>
-              <a:rPr lang="en-US" smtClean="0"/>
+              <a:rPr lang="en-US"/>
               <a:t>Click to edit Master title style</a:t>
             </a:r>
-            <a:endParaRPr lang="en-US"/>
           </a:p>
         </p:txBody>
       </p:sp>
@@ -4818,38 +4895,37 @@
           <a:p>
             <a:pPr lvl="0"/>
             <a:r>
-              <a:rPr lang="en-US" smtClean="0"/>
+              <a:rPr lang="en-US"/>
               <a:t>Click to edit Master text styles</a:t>
             </a:r>
           </a:p>
           <a:p>
             <a:pPr lvl="1"/>
             <a:r>
-              <a:rPr lang="en-US" smtClean="0"/>
+              <a:rPr lang="en-US"/>
               <a:t>Second level</a:t>
             </a:r>
           </a:p>
           <a:p>
             <a:pPr lvl="2"/>
             <a:r>
-              <a:rPr lang="en-US" smtClean="0"/>
+              <a:rPr lang="en-US"/>
               <a:t>Third level</a:t>
             </a:r>
           </a:p>
           <a:p>
             <a:pPr lvl="3"/>
             <a:r>
-              <a:rPr lang="en-US" smtClean="0"/>
+              <a:rPr lang="en-US"/>
               <a:t>Fourth level</a:t>
             </a:r>
           </a:p>
           <a:p>
             <a:pPr lvl="4"/>
             <a:r>
-              <a:rPr lang="en-US" smtClean="0"/>
+              <a:rPr lang="en-US"/>
               <a:t>Fifth level</a:t>
             </a:r>
-            <a:endParaRPr lang="en-US"/>
           </a:p>
         </p:txBody>
       </p:sp>
@@ -4903,38 +4979,37 @@
           <a:p>
             <a:pPr lvl="0"/>
             <a:r>
-              <a:rPr lang="en-US" smtClean="0"/>
+              <a:rPr lang="en-US"/>
               <a:t>Click to edit Master text styles</a:t>
             </a:r>
           </a:p>
           <a:p>
             <a:pPr lvl="1"/>
             <a:r>
-              <a:rPr lang="en-US" smtClean="0"/>
+              <a:rPr lang="en-US"/>
               <a:t>Second level</a:t>
             </a:r>
           </a:p>
           <a:p>
             <a:pPr lvl="2"/>
             <a:r>
-              <a:rPr lang="en-US" smtClean="0"/>
+              <a:rPr lang="en-US"/>
               <a:t>Third level</a:t>
             </a:r>
           </a:p>
           <a:p>
             <a:pPr lvl="3"/>
             <a:r>
-              <a:rPr lang="en-US" smtClean="0"/>
+              <a:rPr lang="en-US"/>
               <a:t>Fourth level</a:t>
             </a:r>
           </a:p>
           <a:p>
             <a:pPr lvl="4"/>
             <a:r>
-              <a:rPr lang="en-US" smtClean="0"/>
+              <a:rPr lang="en-US"/>
               <a:t>Fifth level</a:t>
             </a:r>
-            <a:endParaRPr lang="en-US"/>
           </a:p>
         </p:txBody>
       </p:sp>
@@ -5079,10 +5154,9 @@
           </a:lstStyle>
           <a:p>
             <a:r>
-              <a:rPr lang="en-US" smtClean="0"/>
+              <a:rPr lang="en-US"/>
               <a:t>Click to edit Master title style</a:t>
             </a:r>
-            <a:endParaRPr lang="en-US"/>
           </a:p>
         </p:txBody>
       </p:sp>
@@ -5145,7 +5219,7 @@
           <a:p>
             <a:pPr lvl="0"/>
             <a:r>
-              <a:rPr lang="en-US" smtClean="0"/>
+              <a:rPr lang="en-US"/>
               <a:t>Click to edit Master text styles</a:t>
             </a:r>
           </a:p>
@@ -5201,38 +5275,37 @@
           <a:p>
             <a:pPr lvl="0"/>
             <a:r>
-              <a:rPr lang="en-US" smtClean="0"/>
+              <a:rPr lang="en-US"/>
               <a:t>Click to edit Master text styles</a:t>
             </a:r>
           </a:p>
           <a:p>
             <a:pPr lvl="1"/>
             <a:r>
-              <a:rPr lang="en-US" smtClean="0"/>
+              <a:rPr lang="en-US"/>
               <a:t>Second level</a:t>
             </a:r>
           </a:p>
           <a:p>
             <a:pPr lvl="2"/>
             <a:r>
-              <a:rPr lang="en-US" smtClean="0"/>
+              <a:rPr lang="en-US"/>
               <a:t>Third level</a:t>
             </a:r>
           </a:p>
           <a:p>
             <a:pPr lvl="3"/>
             <a:r>
-              <a:rPr lang="en-US" smtClean="0"/>
+              <a:rPr lang="en-US"/>
               <a:t>Fourth level</a:t>
             </a:r>
           </a:p>
           <a:p>
             <a:pPr lvl="4"/>
             <a:r>
-              <a:rPr lang="en-US" smtClean="0"/>
+              <a:rPr lang="en-US"/>
               <a:t>Fifth level</a:t>
             </a:r>
-            <a:endParaRPr lang="en-US"/>
           </a:p>
         </p:txBody>
       </p:sp>
@@ -5295,7 +5368,7 @@
           <a:p>
             <a:pPr lvl="0"/>
             <a:r>
-              <a:rPr lang="en-US" smtClean="0"/>
+              <a:rPr lang="en-US"/>
               <a:t>Click to edit Master text styles</a:t>
             </a:r>
           </a:p>
@@ -5351,38 +5424,37 @@
           <a:p>
             <a:pPr lvl="0"/>
             <a:r>
-              <a:rPr lang="en-US" smtClean="0"/>
+              <a:rPr lang="en-US"/>
               <a:t>Click to edit Master text styles</a:t>
             </a:r>
           </a:p>
           <a:p>
             <a:pPr lvl="1"/>
             <a:r>
-              <a:rPr lang="en-US" smtClean="0"/>
+              <a:rPr lang="en-US"/>
               <a:t>Second level</a:t>
             </a:r>
           </a:p>
           <a:p>
             <a:pPr lvl="2"/>
             <a:r>
-              <a:rPr lang="en-US" smtClean="0"/>
+              <a:rPr lang="en-US"/>
               <a:t>Third level</a:t>
             </a:r>
           </a:p>
           <a:p>
             <a:pPr lvl="3"/>
             <a:r>
-              <a:rPr lang="en-US" smtClean="0"/>
+              <a:rPr lang="en-US"/>
               <a:t>Fourth level</a:t>
             </a:r>
           </a:p>
           <a:p>
             <a:pPr lvl="4"/>
             <a:r>
-              <a:rPr lang="en-US" smtClean="0"/>
+              <a:rPr lang="en-US"/>
               <a:t>Fifth level</a:t>
             </a:r>
-            <a:endParaRPr lang="en-US"/>
           </a:p>
         </p:txBody>
       </p:sp>
@@ -5523,10 +5595,9 @@
           <a:lstStyle/>
           <a:p>
             <a:r>
-              <a:rPr lang="en-US" smtClean="0"/>
+              <a:rPr lang="en-US"/>
               <a:t>Click to edit Master title style</a:t>
             </a:r>
-            <a:endParaRPr lang="en-US"/>
           </a:p>
         </p:txBody>
       </p:sp>
@@ -5797,10 +5868,9 @@
           </a:lstStyle>
           <a:p>
             <a:r>
-              <a:rPr lang="en-US" smtClean="0"/>
+              <a:rPr lang="en-US"/>
               <a:t>Click to edit Master title style</a:t>
             </a:r>
-            <a:endParaRPr lang="en-US"/>
           </a:p>
         </p:txBody>
       </p:sp>
@@ -5854,38 +5924,37 @@
           <a:p>
             <a:pPr lvl="0"/>
             <a:r>
-              <a:rPr lang="en-US" smtClean="0"/>
+              <a:rPr lang="en-US"/>
               <a:t>Click to edit Master text styles</a:t>
             </a:r>
           </a:p>
           <a:p>
             <a:pPr lvl="1"/>
             <a:r>
-              <a:rPr lang="en-US" smtClean="0"/>
+              <a:rPr lang="en-US"/>
               <a:t>Second level</a:t>
             </a:r>
           </a:p>
           <a:p>
             <a:pPr lvl="2"/>
             <a:r>
-              <a:rPr lang="en-US" smtClean="0"/>
+              <a:rPr lang="en-US"/>
               <a:t>Third level</a:t>
             </a:r>
           </a:p>
           <a:p>
             <a:pPr lvl="3"/>
             <a:r>
-              <a:rPr lang="en-US" smtClean="0"/>
+              <a:rPr lang="en-US"/>
               <a:t>Fourth level</a:t>
             </a:r>
           </a:p>
           <a:p>
             <a:pPr lvl="4"/>
             <a:r>
-              <a:rPr lang="en-US" smtClean="0"/>
+              <a:rPr lang="en-US"/>
               <a:t>Fifth level</a:t>
             </a:r>
-            <a:endParaRPr lang="en-US"/>
           </a:p>
         </p:txBody>
       </p:sp>
@@ -5948,7 +6017,7 @@
           <a:p>
             <a:pPr lvl="0"/>
             <a:r>
-              <a:rPr lang="en-US" smtClean="0"/>
+              <a:rPr lang="en-US"/>
               <a:t>Click to edit Master text styles</a:t>
             </a:r>
           </a:p>
@@ -6091,10 +6160,9 @@
           <a:lstStyle/>
           <a:p>
             <a:r>
-              <a:rPr lang="en-US" dirty="0" smtClean="0"/>
+              <a:rPr lang="en-US" dirty="0"/>
               <a:t>Click to edit Master title style</a:t>
             </a:r>
-            <a:endParaRPr lang="en-US" dirty="0"/>
           </a:p>
         </p:txBody>
       </p:sp>
@@ -6133,38 +6201,37 @@
           <a:p>
             <a:pPr lvl="0"/>
             <a:r>
-              <a:rPr lang="en-US" dirty="0" smtClean="0"/>
+              <a:rPr lang="en-US" dirty="0"/>
               <a:t>Click to edit Master text styles</a:t>
             </a:r>
           </a:p>
           <a:p>
             <a:pPr lvl="1"/>
             <a:r>
-              <a:rPr lang="en-US" dirty="0" smtClean="0"/>
+              <a:rPr lang="en-US" dirty="0"/>
               <a:t>Second level</a:t>
             </a:r>
           </a:p>
           <a:p>
             <a:pPr lvl="2"/>
             <a:r>
-              <a:rPr lang="en-US" dirty="0" smtClean="0"/>
+              <a:rPr lang="en-US" dirty="0"/>
               <a:t>Third level</a:t>
             </a:r>
           </a:p>
           <a:p>
             <a:pPr lvl="3"/>
             <a:r>
-              <a:rPr lang="en-US" dirty="0" smtClean="0"/>
+              <a:rPr lang="en-US" dirty="0"/>
               <a:t>Fourth level</a:t>
             </a:r>
           </a:p>
           <a:p>
             <a:pPr lvl="4"/>
             <a:r>
-              <a:rPr lang="en-US" dirty="0" smtClean="0"/>
+              <a:rPr lang="en-US" dirty="0"/>
               <a:t>Fifth level</a:t>
             </a:r>
-            <a:endParaRPr lang="en-US" dirty="0"/>
           </a:p>
         </p:txBody>
       </p:sp>
@@ -6258,10 +6325,9 @@
           </a:lstStyle>
           <a:p>
             <a:r>
-              <a:rPr lang="en-US" smtClean="0"/>
+              <a:rPr lang="en-US"/>
               <a:t>Click to edit Master title style</a:t>
             </a:r>
-            <a:endParaRPr lang="en-US"/>
           </a:p>
         </p:txBody>
       </p:sp>
@@ -6323,7 +6389,7 @@
           </a:lstStyle>
           <a:p>
             <a:pPr lvl="0"/>
-            <a:endParaRPr lang="en-US" noProof="0" smtClean="0"/>
+            <a:endParaRPr lang="en-US" noProof="0"/>
           </a:p>
         </p:txBody>
       </p:sp>
@@ -6386,7 +6452,7 @@
           <a:p>
             <a:pPr lvl="0"/>
             <a:r>
-              <a:rPr lang="en-US" smtClean="0"/>
+              <a:rPr lang="en-US"/>
               <a:t>Click to edit Master text styles</a:t>
             </a:r>
           </a:p>
@@ -6529,10 +6595,9 @@
           <a:lstStyle/>
           <a:p>
             <a:r>
-              <a:rPr lang="en-US" smtClean="0"/>
+              <a:rPr lang="en-US"/>
               <a:t>Click to edit Master title style</a:t>
             </a:r>
-            <a:endParaRPr lang="en-US"/>
           </a:p>
         </p:txBody>
       </p:sp>
@@ -6553,38 +6618,37 @@
           <a:p>
             <a:pPr lvl="0"/>
             <a:r>
-              <a:rPr lang="en-US" smtClean="0"/>
+              <a:rPr lang="en-US"/>
               <a:t>Click to edit Master text styles</a:t>
             </a:r>
           </a:p>
           <a:p>
             <a:pPr lvl="1"/>
             <a:r>
-              <a:rPr lang="en-US" smtClean="0"/>
+              <a:rPr lang="en-US"/>
               <a:t>Second level</a:t>
             </a:r>
           </a:p>
           <a:p>
             <a:pPr lvl="2"/>
             <a:r>
-              <a:rPr lang="en-US" smtClean="0"/>
+              <a:rPr lang="en-US"/>
               <a:t>Third level</a:t>
             </a:r>
           </a:p>
           <a:p>
             <a:pPr lvl="3"/>
             <a:r>
-              <a:rPr lang="en-US" smtClean="0"/>
+              <a:rPr lang="en-US"/>
               <a:t>Fourth level</a:t>
             </a:r>
           </a:p>
           <a:p>
             <a:pPr lvl="4"/>
             <a:r>
-              <a:rPr lang="en-US" smtClean="0"/>
+              <a:rPr lang="en-US"/>
               <a:t>Fifth level</a:t>
             </a:r>
-            <a:endParaRPr lang="en-US"/>
           </a:p>
         </p:txBody>
       </p:sp>
@@ -6730,10 +6794,9 @@
           <a:lstStyle/>
           <a:p>
             <a:r>
-              <a:rPr lang="en-US" smtClean="0"/>
+              <a:rPr lang="en-US"/>
               <a:t>Click to edit Master title style</a:t>
             </a:r>
-            <a:endParaRPr lang="en-US"/>
           </a:p>
         </p:txBody>
       </p:sp>
@@ -6759,38 +6822,37 @@
           <a:p>
             <a:pPr lvl="0"/>
             <a:r>
-              <a:rPr lang="en-US" smtClean="0"/>
+              <a:rPr lang="en-US"/>
               <a:t>Click to edit Master text styles</a:t>
             </a:r>
           </a:p>
           <a:p>
             <a:pPr lvl="1"/>
             <a:r>
-              <a:rPr lang="en-US" smtClean="0"/>
+              <a:rPr lang="en-US"/>
               <a:t>Second level</a:t>
             </a:r>
           </a:p>
           <a:p>
             <a:pPr lvl="2"/>
             <a:r>
-              <a:rPr lang="en-US" smtClean="0"/>
+              <a:rPr lang="en-US"/>
               <a:t>Third level</a:t>
             </a:r>
           </a:p>
           <a:p>
             <a:pPr lvl="3"/>
             <a:r>
-              <a:rPr lang="en-US" smtClean="0"/>
+              <a:rPr lang="en-US"/>
               <a:t>Fourth level</a:t>
             </a:r>
           </a:p>
           <a:p>
             <a:pPr lvl="4"/>
             <a:r>
-              <a:rPr lang="en-US" smtClean="0"/>
+              <a:rPr lang="en-US"/>
               <a:t>Fifth level</a:t>
             </a:r>
-            <a:endParaRPr lang="en-US"/>
           </a:p>
         </p:txBody>
       </p:sp>
@@ -6940,10 +7002,9 @@
           </a:lstStyle>
           <a:p>
             <a:r>
-              <a:rPr lang="en-US" smtClean="0"/>
+              <a:rPr lang="en-US"/>
               <a:t>Click to edit Master title style</a:t>
             </a:r>
-            <a:endParaRPr lang="en-US"/>
           </a:p>
         </p:txBody>
       </p:sp>
@@ -7006,7 +7067,7 @@
           <a:p>
             <a:pPr lvl="0"/>
             <a:r>
-              <a:rPr lang="en-US" smtClean="0"/>
+              <a:rPr lang="en-US"/>
               <a:t>Click to edit Master text styles</a:t>
             </a:r>
           </a:p>
@@ -7093,10 +7154,9 @@
           <a:lstStyle/>
           <a:p>
             <a:r>
-              <a:rPr lang="en-US" smtClean="0"/>
+              <a:rPr lang="en-US"/>
               <a:t>Click to edit Master title style</a:t>
             </a:r>
-            <a:endParaRPr lang="en-US"/>
           </a:p>
         </p:txBody>
       </p:sp>
@@ -7150,38 +7210,37 @@
           <a:p>
             <a:pPr lvl="0"/>
             <a:r>
-              <a:rPr lang="en-US" smtClean="0"/>
+              <a:rPr lang="en-US"/>
               <a:t>Click to edit Master text styles</a:t>
             </a:r>
           </a:p>
           <a:p>
             <a:pPr lvl="1"/>
             <a:r>
-              <a:rPr lang="en-US" smtClean="0"/>
+              <a:rPr lang="en-US"/>
               <a:t>Second level</a:t>
             </a:r>
           </a:p>
           <a:p>
             <a:pPr lvl="2"/>
             <a:r>
-              <a:rPr lang="en-US" smtClean="0"/>
+              <a:rPr lang="en-US"/>
               <a:t>Third level</a:t>
             </a:r>
           </a:p>
           <a:p>
             <a:pPr lvl="3"/>
             <a:r>
-              <a:rPr lang="en-US" smtClean="0"/>
+              <a:rPr lang="en-US"/>
               <a:t>Fourth level</a:t>
             </a:r>
           </a:p>
           <a:p>
             <a:pPr lvl="4"/>
             <a:r>
-              <a:rPr lang="en-US" smtClean="0"/>
+              <a:rPr lang="en-US"/>
               <a:t>Fifth level</a:t>
             </a:r>
-            <a:endParaRPr lang="en-US"/>
           </a:p>
         </p:txBody>
       </p:sp>
@@ -7235,38 +7294,37 @@
           <a:p>
             <a:pPr lvl="0"/>
             <a:r>
-              <a:rPr lang="en-US" smtClean="0"/>
+              <a:rPr lang="en-US"/>
               <a:t>Click to edit Master text styles</a:t>
             </a:r>
           </a:p>
           <a:p>
             <a:pPr lvl="1"/>
             <a:r>
-              <a:rPr lang="en-US" smtClean="0"/>
+              <a:rPr lang="en-US"/>
               <a:t>Second level</a:t>
             </a:r>
           </a:p>
           <a:p>
             <a:pPr lvl="2"/>
             <a:r>
-              <a:rPr lang="en-US" smtClean="0"/>
+              <a:rPr lang="en-US"/>
               <a:t>Third level</a:t>
             </a:r>
           </a:p>
           <a:p>
             <a:pPr lvl="3"/>
             <a:r>
-              <a:rPr lang="en-US" smtClean="0"/>
+              <a:rPr lang="en-US"/>
               <a:t>Fourth level</a:t>
             </a:r>
           </a:p>
           <a:p>
             <a:pPr lvl="4"/>
             <a:r>
-              <a:rPr lang="en-US" smtClean="0"/>
+              <a:rPr lang="en-US"/>
               <a:t>Fifth level</a:t>
             </a:r>
-            <a:endParaRPr lang="en-US"/>
           </a:p>
         </p:txBody>
       </p:sp>
@@ -7360,10 +7418,9 @@
           </a:lstStyle>
           <a:p>
             <a:r>
-              <a:rPr lang="en-US" smtClean="0"/>
+              <a:rPr lang="en-US"/>
               <a:t>Click to edit Master title style</a:t>
             </a:r>
-            <a:endParaRPr lang="en-US"/>
           </a:p>
         </p:txBody>
       </p:sp>
@@ -7426,7 +7483,7 @@
           <a:p>
             <a:pPr lvl="0"/>
             <a:r>
-              <a:rPr lang="en-US" smtClean="0"/>
+              <a:rPr lang="en-US"/>
               <a:t>Click to edit Master text styles</a:t>
             </a:r>
           </a:p>
@@ -7482,38 +7539,37 @@
           <a:p>
             <a:pPr lvl="0"/>
             <a:r>
-              <a:rPr lang="en-US" smtClean="0"/>
+              <a:rPr lang="en-US"/>
               <a:t>Click to edit Master text styles</a:t>
             </a:r>
           </a:p>
           <a:p>
             <a:pPr lvl="1"/>
             <a:r>
-              <a:rPr lang="en-US" smtClean="0"/>
+              <a:rPr lang="en-US"/>
               <a:t>Second level</a:t>
             </a:r>
           </a:p>
           <a:p>
             <a:pPr lvl="2"/>
             <a:r>
-              <a:rPr lang="en-US" smtClean="0"/>
+              <a:rPr lang="en-US"/>
               <a:t>Third level</a:t>
             </a:r>
           </a:p>
           <a:p>
             <a:pPr lvl="3"/>
             <a:r>
-              <a:rPr lang="en-US" smtClean="0"/>
+              <a:rPr lang="en-US"/>
               <a:t>Fourth level</a:t>
             </a:r>
           </a:p>
           <a:p>
             <a:pPr lvl="4"/>
             <a:r>
-              <a:rPr lang="en-US" smtClean="0"/>
+              <a:rPr lang="en-US"/>
               <a:t>Fifth level</a:t>
             </a:r>
-            <a:endParaRPr lang="en-US"/>
           </a:p>
         </p:txBody>
       </p:sp>
@@ -7576,7 +7632,7 @@
           <a:p>
             <a:pPr lvl="0"/>
             <a:r>
-              <a:rPr lang="en-US" smtClean="0"/>
+              <a:rPr lang="en-US"/>
               <a:t>Click to edit Master text styles</a:t>
             </a:r>
           </a:p>
@@ -7632,38 +7688,37 @@
           <a:p>
             <a:pPr lvl="0"/>
             <a:r>
-              <a:rPr lang="en-US" smtClean="0"/>
+              <a:rPr lang="en-US"/>
               <a:t>Click to edit Master text styles</a:t>
             </a:r>
           </a:p>
           <a:p>
             <a:pPr lvl="1"/>
             <a:r>
-              <a:rPr lang="en-US" smtClean="0"/>
+              <a:rPr lang="en-US"/>
               <a:t>Second level</a:t>
             </a:r>
           </a:p>
           <a:p>
             <a:pPr lvl="2"/>
             <a:r>
-              <a:rPr lang="en-US" smtClean="0"/>
+              <a:rPr lang="en-US"/>
               <a:t>Third level</a:t>
             </a:r>
           </a:p>
           <a:p>
             <a:pPr lvl="3"/>
             <a:r>
-              <a:rPr lang="en-US" smtClean="0"/>
+              <a:rPr lang="en-US"/>
               <a:t>Fourth level</a:t>
             </a:r>
           </a:p>
           <a:p>
             <a:pPr lvl="4"/>
             <a:r>
-              <a:rPr lang="en-US" smtClean="0"/>
+              <a:rPr lang="en-US"/>
               <a:t>Fifth level</a:t>
             </a:r>
-            <a:endParaRPr lang="en-US"/>
           </a:p>
         </p:txBody>
       </p:sp>
@@ -7748,10 +7803,9 @@
           <a:lstStyle/>
           <a:p>
             <a:r>
-              <a:rPr lang="en-US" smtClean="0"/>
+              <a:rPr lang="en-US"/>
               <a:t>Click to edit Master title style</a:t>
             </a:r>
-            <a:endParaRPr lang="en-US"/>
           </a:p>
         </p:txBody>
       </p:sp>
@@ -7910,10 +7964,9 @@
           </a:lstStyle>
           <a:p>
             <a:r>
-              <a:rPr lang="en-US" smtClean="0"/>
+              <a:rPr lang="en-US"/>
               <a:t>Click to edit Master title style</a:t>
             </a:r>
-            <a:endParaRPr lang="en-US"/>
           </a:p>
         </p:txBody>
       </p:sp>
@@ -7967,38 +8020,37 @@
           <a:p>
             <a:pPr lvl="0"/>
             <a:r>
-              <a:rPr lang="en-US" smtClean="0"/>
+              <a:rPr lang="en-US"/>
               <a:t>Click to edit Master text styles</a:t>
             </a:r>
           </a:p>
           <a:p>
             <a:pPr lvl="1"/>
             <a:r>
-              <a:rPr lang="en-US" smtClean="0"/>
+              <a:rPr lang="en-US"/>
               <a:t>Second level</a:t>
             </a:r>
           </a:p>
           <a:p>
             <a:pPr lvl="2"/>
             <a:r>
-              <a:rPr lang="en-US" smtClean="0"/>
+              <a:rPr lang="en-US"/>
               <a:t>Third level</a:t>
             </a:r>
           </a:p>
           <a:p>
             <a:pPr lvl="3"/>
             <a:r>
-              <a:rPr lang="en-US" smtClean="0"/>
+              <a:rPr lang="en-US"/>
               <a:t>Fourth level</a:t>
             </a:r>
           </a:p>
           <a:p>
             <a:pPr lvl="4"/>
             <a:r>
-              <a:rPr lang="en-US" smtClean="0"/>
+              <a:rPr lang="en-US"/>
               <a:t>Fifth level</a:t>
             </a:r>
-            <a:endParaRPr lang="en-US"/>
           </a:p>
         </p:txBody>
       </p:sp>
@@ -8061,7 +8113,7 @@
           <a:p>
             <a:pPr lvl="0"/>
             <a:r>
-              <a:rPr lang="en-US" smtClean="0"/>
+              <a:rPr lang="en-US"/>
               <a:t>Click to edit Master text styles</a:t>
             </a:r>
           </a:p>
@@ -8157,10 +8209,9 @@
           </a:lstStyle>
           <a:p>
             <a:r>
-              <a:rPr lang="en-US" smtClean="0"/>
+              <a:rPr lang="en-US"/>
               <a:t>Click to edit Master title style</a:t>
             </a:r>
-            <a:endParaRPr lang="en-US"/>
           </a:p>
         </p:txBody>
       </p:sp>
@@ -8222,7 +8273,7 @@
           </a:lstStyle>
           <a:p>
             <a:pPr lvl="0"/>
-            <a:endParaRPr lang="en-US" noProof="0" smtClean="0"/>
+            <a:endParaRPr lang="en-US" noProof="0"/>
           </a:p>
         </p:txBody>
       </p:sp>
@@ -8285,7 +8336,7 @@
           <a:p>
             <a:pPr lvl="0"/>
             <a:r>
-              <a:rPr lang="en-US" smtClean="0"/>
+              <a:rPr lang="en-US"/>
               <a:t>Click to edit Master text styles</a:t>
             </a:r>
           </a:p>
@@ -8416,35 +8467,35 @@
           <a:p>
             <a:pPr lvl="0"/>
             <a:r>
-              <a:rPr lang="en-US" altLang="en-US" smtClean="0"/>
+              <a:rPr lang="en-US" altLang="en-US"/>
               <a:t>Click to edit Master text styles</a:t>
             </a:r>
           </a:p>
           <a:p>
             <a:pPr lvl="1"/>
             <a:r>
-              <a:rPr lang="en-US" altLang="en-US" smtClean="0"/>
+              <a:rPr lang="en-US" altLang="en-US"/>
               <a:t>Second level</a:t>
             </a:r>
           </a:p>
           <a:p>
             <a:pPr lvl="2"/>
             <a:r>
-              <a:rPr lang="en-US" altLang="en-US" smtClean="0"/>
+              <a:rPr lang="en-US" altLang="en-US"/>
               <a:t>  Third level</a:t>
             </a:r>
           </a:p>
           <a:p>
             <a:pPr lvl="3"/>
             <a:r>
-              <a:rPr lang="en-US" altLang="en-US" smtClean="0"/>
+              <a:rPr lang="en-US" altLang="en-US"/>
               <a:t>Fourth level</a:t>
             </a:r>
           </a:p>
           <a:p>
             <a:pPr lvl="4"/>
             <a:r>
-              <a:rPr lang="en-US" altLang="en-US" smtClean="0"/>
+              <a:rPr lang="en-US" altLang="en-US"/>
               <a:t>Fifth level</a:t>
             </a:r>
           </a:p>
@@ -8502,7 +8553,7 @@
           <a:p>
             <a:pPr lvl="0"/>
             <a:r>
-              <a:rPr lang="en-US" altLang="en-US" smtClean="0"/>
+              <a:rPr lang="en-US" altLang="en-US"/>
               <a:t>Click to edit Master title style</a:t>
             </a:r>
           </a:p>
@@ -8535,7 +8586,6 @@
             <a:headEnd/>
             <a:tailEnd/>
           </a:ln>
-          <a:extLst/>
         </p:spPr>
         <p:txBody>
           <a:bodyPr wrap="none" anchor="ctr"/>
@@ -8650,7 +8700,7 @@
             <a:pPr eaLnBrk="1" hangingPunct="1">
               <a:defRPr/>
             </a:pPr>
-            <a:endParaRPr lang="en-US" altLang="en-US" smtClean="0"/>
+            <a:endParaRPr lang="en-US" altLang="en-US"/>
           </a:p>
         </p:txBody>
       </p:sp>
@@ -8674,7 +8724,6 @@
           <a:ln>
             <a:noFill/>
           </a:ln>
-          <a:extLst/>
         </p:spPr>
         <p:txBody>
           <a:bodyPr lIns="101828" tIns="50914" rIns="101828" bIns="50914"/>
@@ -8789,7 +8838,7 @@
             <a:pPr>
               <a:defRPr/>
             </a:pPr>
-            <a:endParaRPr lang="en-US" altLang="en-US" sz="1300" smtClean="0">
+            <a:endParaRPr lang="en-US" altLang="en-US" sz="1300">
               <a:latin typeface="Arial" panose="020B0604020202020204" pitchFamily="34" charset="0"/>
             </a:endParaRPr>
           </a:p>
@@ -9337,7 +9386,7 @@
           <a:p>
             <a:pPr lvl="0"/>
             <a:r>
-              <a:rPr lang="en-US" altLang="en-US" smtClean="0"/>
+              <a:rPr lang="en-US" altLang="en-US"/>
               <a:t>Click to edit Master title style</a:t>
             </a:r>
           </a:p>
@@ -9395,35 +9444,35 @@
           <a:p>
             <a:pPr lvl="0"/>
             <a:r>
-              <a:rPr lang="en-US" altLang="en-US" smtClean="0"/>
+              <a:rPr lang="en-US" altLang="en-US"/>
               <a:t>Click to edit Master text styles</a:t>
             </a:r>
           </a:p>
           <a:p>
             <a:pPr lvl="1"/>
             <a:r>
-              <a:rPr lang="en-US" altLang="en-US" smtClean="0"/>
+              <a:rPr lang="en-US" altLang="en-US"/>
               <a:t>Second level</a:t>
             </a:r>
           </a:p>
           <a:p>
             <a:pPr lvl="2"/>
             <a:r>
-              <a:rPr lang="en-US" altLang="en-US" smtClean="0"/>
+              <a:rPr lang="en-US" altLang="en-US"/>
               <a:t>Third level</a:t>
             </a:r>
           </a:p>
           <a:p>
             <a:pPr lvl="3"/>
             <a:r>
-              <a:rPr lang="en-US" altLang="en-US" smtClean="0"/>
+              <a:rPr lang="en-US" altLang="en-US"/>
               <a:t>Fourth level</a:t>
             </a:r>
           </a:p>
           <a:p>
             <a:pPr lvl="4"/>
             <a:r>
-              <a:rPr lang="en-US" altLang="en-US" smtClean="0"/>
+              <a:rPr lang="en-US" altLang="en-US"/>
               <a:t>Fifth level</a:t>
             </a:r>
           </a:p>
@@ -10084,13 +10133,6 @@
   <p:clrMapOvr>
     <a:masterClrMapping/>
   </p:clrMapOvr>
-  <p:timing>
-    <p:tnLst>
-      <p:par>
-        <p:cTn id="1" dur="indefinite" restart="never" nodeType="tmRoot"/>
-      </p:par>
-    </p:tnLst>
-  </p:timing>
 </p:sld>
 </file>
 
@@ -10128,10 +10170,10 @@
           <a:p>
             <a:pPr rtl="1"/>
             <a:r>
-              <a:rPr lang="fa-IR" altLang="en-US" dirty="0" smtClean="0"/>
+              <a:rPr lang="fa-IR" altLang="en-US" dirty="0"/>
               <a:t>مدل برنامه‌نویسی/توصیف</a:t>
             </a:r>
-            <a:endParaRPr lang="en-US" altLang="en-US" dirty="0" smtClean="0"/>
+            <a:endParaRPr lang="en-US" altLang="en-US" dirty="0"/>
           </a:p>
         </p:txBody>
       </p:sp>
@@ -10333,7 +10375,7 @@
               </a:pPr>
               <a:t>10</a:t>
             </a:fld>
-            <a:endParaRPr lang="en-US" altLang="en-US" sz="1300" b="0" smtClean="0">
+            <a:endParaRPr lang="en-US" altLang="en-US" sz="1300" b="0">
               <a:solidFill>
                 <a:schemeClr val="tx1"/>
               </a:solidFill>
@@ -10363,7 +10405,7 @@
           <a:lstStyle/>
           <a:p>
             <a:r>
-              <a:rPr lang="fa-IR" dirty="0" smtClean="0"/>
+              <a:rPr lang="fa-IR" dirty="0"/>
               <a:t>سنتز سطح بالا:</a:t>
             </a:r>
           </a:p>
@@ -10509,13 +10551,6 @@
   <p:clrMapOvr>
     <a:masterClrMapping/>
   </p:clrMapOvr>
-  <p:timing>
-    <p:tnLst>
-      <p:par>
-        <p:cTn id="1" dur="indefinite" restart="never" nodeType="tmRoot"/>
-      </p:par>
-    </p:tnLst>
-  </p:timing>
 </p:sld>
 </file>
 
@@ -10553,10 +10588,10 @@
           <a:p>
             <a:pPr rtl="1"/>
             <a:r>
-              <a:rPr lang="fa-IR" altLang="en-US" dirty="0" smtClean="0"/>
+              <a:rPr lang="fa-IR" altLang="en-US" dirty="0"/>
               <a:t>تاریخچه</a:t>
             </a:r>
-            <a:endParaRPr lang="en-US" altLang="en-US" dirty="0" smtClean="0"/>
+            <a:endParaRPr lang="en-US" altLang="en-US" dirty="0"/>
           </a:p>
         </p:txBody>
       </p:sp>
@@ -10581,78 +10616,78 @@
           <a:lstStyle/>
           <a:p>
             <a:r>
-              <a:rPr lang="fa-IR" altLang="en-US" dirty="0" smtClean="0"/>
+              <a:rPr lang="fa-IR" altLang="en-US" dirty="0"/>
               <a:t>از دهة 1970:</a:t>
             </a:r>
-            <a:endParaRPr lang="en-US" altLang="en-US" dirty="0" smtClean="0"/>
+            <a:endParaRPr lang="en-US" altLang="en-US" dirty="0"/>
           </a:p>
           <a:p>
             <a:pPr lvl="1"/>
             <a:r>
-              <a:rPr lang="fa-IR" altLang="en-US" dirty="0" smtClean="0"/>
+              <a:rPr lang="fa-IR" altLang="en-US" dirty="0"/>
               <a:t>آغاز پژوهش</a:t>
             </a:r>
           </a:p>
           <a:p>
             <a:pPr lvl="1"/>
             <a:r>
-              <a:rPr lang="fa-IR" altLang="en-US" dirty="0" smtClean="0"/>
+              <a:rPr lang="fa-IR" altLang="en-US" dirty="0"/>
               <a:t>ناکارامد</a:t>
             </a:r>
           </a:p>
           <a:p>
             <a:pPr lvl="2"/>
             <a:r>
-              <a:rPr lang="fa-IR" altLang="en-US" dirty="0" smtClean="0">
+              <a:rPr lang="fa-IR" altLang="en-US" dirty="0">
                 <a:sym typeface="Wingdings" panose="05000000000000000000" pitchFamily="2" charset="2"/>
               </a:rPr>
               <a:t> عدم ورود به ابزارهای صنعتی</a:t>
             </a:r>
-            <a:endParaRPr lang="fa-IR" altLang="en-US" dirty="0" smtClean="0"/>
-          </a:p>
-          <a:p>
-            <a:r>
-              <a:rPr lang="fa-IR" altLang="en-US" dirty="0" smtClean="0"/>
+            <a:endParaRPr lang="fa-IR" altLang="en-US" dirty="0"/>
+          </a:p>
+          <a:p>
+            <a:r>
+              <a:rPr lang="fa-IR" altLang="en-US" dirty="0"/>
               <a:t>تحولات اخیر:</a:t>
             </a:r>
           </a:p>
           <a:p>
             <a:pPr lvl="1"/>
             <a:r>
-              <a:rPr lang="fa-IR" altLang="en-US" dirty="0" smtClean="0"/>
+              <a:rPr lang="fa-IR" altLang="en-US" dirty="0"/>
               <a:t>پیشرفت ابزارهای سنتز</a:t>
             </a:r>
           </a:p>
           <a:p>
             <a:pPr lvl="1"/>
             <a:r>
-              <a:rPr lang="fa-IR" altLang="en-US" dirty="0" smtClean="0"/>
+              <a:rPr lang="fa-IR" altLang="en-US" dirty="0"/>
               <a:t>نیاز </a:t>
             </a:r>
             <a:r>
-              <a:rPr lang="fa-IR" altLang="en-US" smtClean="0"/>
+              <a:rPr lang="fa-IR" altLang="en-US"/>
               <a:t>شدید توسعه‌دهندگان برنامه‌های </a:t>
             </a:r>
             <a:r>
-              <a:rPr lang="fa-IR" altLang="en-US" dirty="0" smtClean="0"/>
+              <a:rPr lang="fa-IR" altLang="en-US" dirty="0"/>
               <a:t>کاربردی </a:t>
             </a:r>
             <a:r>
-              <a:rPr lang="fa-IR" altLang="en-US" smtClean="0"/>
+              <a:rPr lang="fa-IR" altLang="en-US"/>
               <a:t>به پیاده‌سازی سخت‌افزاری (شتاب‌دهی)</a:t>
             </a:r>
           </a:p>
           <a:p>
             <a:pPr lvl="1"/>
             <a:r>
-              <a:rPr lang="fa-IR" altLang="en-US" smtClean="0"/>
+              <a:rPr lang="fa-IR" altLang="en-US"/>
               <a:t>پیچیدگی زیاد الگوریتم‌های نیازمند به شتاب‌دهی</a:t>
             </a:r>
-            <a:endParaRPr lang="fa-IR" altLang="en-US" dirty="0" smtClean="0"/>
+            <a:endParaRPr lang="fa-IR" altLang="en-US" dirty="0"/>
           </a:p>
           <a:p>
             <a:pPr lvl="1"/>
-            <a:endParaRPr lang="en-US" altLang="en-US" dirty="0" smtClean="0"/>
+            <a:endParaRPr lang="en-US" altLang="en-US" dirty="0"/>
           </a:p>
         </p:txBody>
       </p:sp>
@@ -10854,7 +10889,7 @@
               </a:pPr>
               <a:t>11</a:t>
             </a:fld>
-            <a:endParaRPr lang="en-US" altLang="en-US" sz="1300" b="0" smtClean="0">
+            <a:endParaRPr lang="en-US" altLang="en-US" sz="1300" b="0">
               <a:solidFill>
                 <a:schemeClr val="tx1"/>
               </a:solidFill>
@@ -10873,13 +10908,6 @@
   <p:clrMapOvr>
     <a:masterClrMapping/>
   </p:clrMapOvr>
-  <p:timing>
-    <p:tnLst>
-      <p:par>
-        <p:cTn id="1" dur="indefinite" restart="never" nodeType="tmRoot"/>
-      </p:par>
-    </p:tnLst>
-  </p:timing>
 </p:sld>
 </file>
 
@@ -10916,7 +10944,7 @@
           <a:lstStyle/>
           <a:p>
             <a:r>
-              <a:rPr lang="fa-IR" dirty="0" smtClean="0"/>
+              <a:rPr lang="fa-IR" dirty="0"/>
               <a:t>انواع توصیف سطح بالا</a:t>
             </a:r>
             <a:endParaRPr lang="en-US" dirty="0"/>
@@ -10944,106 +10972,106 @@
           <a:lstStyle/>
           <a:p>
             <a:r>
-              <a:rPr lang="fa-IR" dirty="0" smtClean="0"/>
+              <a:rPr lang="fa-IR" dirty="0"/>
               <a:t>توصیف های سطح بالا:</a:t>
             </a:r>
           </a:p>
           <a:p>
             <a:pPr lvl="1"/>
             <a:r>
-              <a:rPr lang="en-US" dirty="0" smtClean="0"/>
+              <a:rPr lang="en-US" dirty="0"/>
               <a:t>C/C++</a:t>
             </a:r>
           </a:p>
           <a:p>
             <a:pPr lvl="2"/>
             <a:r>
-              <a:rPr lang="fa-IR" dirty="0" smtClean="0"/>
+              <a:rPr lang="fa-IR" dirty="0"/>
               <a:t>محدودیت های توصیف سخت افزار (همروندی)</a:t>
             </a:r>
           </a:p>
           <a:p>
             <a:pPr lvl="2"/>
             <a:r>
-              <a:rPr lang="fa-IR" dirty="0" smtClean="0"/>
+              <a:rPr lang="fa-IR" dirty="0"/>
               <a:t>سنتزناپذیری برخی از ساختارها</a:t>
             </a:r>
-            <a:endParaRPr lang="en-US" dirty="0" smtClean="0"/>
+            <a:endParaRPr lang="en-US" dirty="0"/>
           </a:p>
           <a:p>
             <a:pPr lvl="1"/>
             <a:r>
-              <a:rPr lang="en-US" dirty="0" err="1" smtClean="0"/>
+              <a:rPr lang="en-US" dirty="0" err="1"/>
               <a:t>SystemC</a:t>
             </a:r>
-            <a:endParaRPr lang="fa-IR" dirty="0" smtClean="0"/>
+            <a:endParaRPr lang="fa-IR" dirty="0"/>
           </a:p>
           <a:p>
             <a:pPr lvl="2"/>
             <a:r>
-              <a:rPr lang="fa-IR" dirty="0" smtClean="0"/>
+              <a:rPr lang="fa-IR" dirty="0"/>
               <a:t>مبتنی بر </a:t>
             </a:r>
             <a:r>
-              <a:rPr lang="en-US" dirty="0" smtClean="0"/>
+              <a:rPr lang="en-US" dirty="0"/>
               <a:t>C</a:t>
             </a:r>
-            <a:endParaRPr lang="fa-IR" dirty="0" smtClean="0"/>
+            <a:endParaRPr lang="fa-IR" dirty="0"/>
           </a:p>
           <a:p>
             <a:pPr lvl="2"/>
             <a:r>
-              <a:rPr lang="fa-IR" dirty="0" smtClean="0"/>
+              <a:rPr lang="fa-IR" dirty="0"/>
               <a:t>امکان توصیف همروندی</a:t>
             </a:r>
-            <a:endParaRPr lang="en-US" dirty="0" smtClean="0"/>
+            <a:endParaRPr lang="en-US" dirty="0"/>
           </a:p>
           <a:p>
             <a:pPr lvl="1"/>
             <a:r>
-              <a:rPr lang="en-US" dirty="0" err="1" smtClean="0"/>
+              <a:rPr lang="en-US" dirty="0" err="1"/>
               <a:t>OpenCL</a:t>
             </a:r>
-            <a:endParaRPr lang="fa-IR" dirty="0" smtClean="0"/>
+            <a:endParaRPr lang="fa-IR" dirty="0"/>
           </a:p>
           <a:p>
             <a:pPr lvl="2"/>
             <a:r>
-              <a:rPr lang="fa-IR" dirty="0" smtClean="0"/>
+              <a:rPr lang="fa-IR" dirty="0"/>
               <a:t>ابتدا برای </a:t>
             </a:r>
             <a:r>
-              <a:rPr lang="en-US" dirty="0" smtClean="0"/>
+              <a:rPr lang="en-US" dirty="0"/>
               <a:t>GPU</a:t>
             </a:r>
             <a:r>
-              <a:rPr lang="fa-IR" dirty="0" smtClean="0"/>
+              <a:rPr lang="fa-IR" dirty="0"/>
               <a:t>، اخیرا در ابزارهای </a:t>
             </a:r>
             <a:r>
-              <a:rPr lang="en-US" dirty="0" smtClean="0"/>
+              <a:rPr lang="en-US" dirty="0"/>
               <a:t>FPGA</a:t>
             </a:r>
           </a:p>
           <a:p>
             <a:pPr lvl="1"/>
             <a:r>
-              <a:rPr lang="en-US" dirty="0" smtClean="0"/>
+              <a:rPr lang="en-US" dirty="0"/>
               <a:t>Simulink</a:t>
             </a:r>
             <a:r>
-              <a:rPr lang="fa-IR" dirty="0" smtClean="0"/>
+              <a:rPr lang="fa-IR" dirty="0"/>
               <a:t> و </a:t>
             </a:r>
             <a:r>
-              <a:rPr lang="en-US" dirty="0" smtClean="0"/>
+              <a:rPr lang="en-US" dirty="0"/>
               <a:t>MATLAB</a:t>
             </a:r>
           </a:p>
           <a:p>
             <a:pPr lvl="2"/>
             <a:r>
-              <a:rPr lang="fa-IR" dirty="0" smtClean="0"/>
+              <a:rPr lang="fa-IR" dirty="0"/>
               <a:t>برای پردازش سیگنال دیجیتال</a:t>
             </a:r>
             <a:endParaRPr lang="en-US" dirty="0"/>
@@ -11089,13 +11117,6 @@
   <p:clrMapOvr>
     <a:masterClrMapping/>
   </p:clrMapOvr>
-  <p:timing>
-    <p:tnLst>
-      <p:par>
-        <p:cTn id="1" dur="indefinite" restart="never" nodeType="tmRoot"/>
-      </p:par>
-    </p:tnLst>
-  </p:timing>
 </p:sld>
 </file>
 
@@ -11133,11 +11154,7 @@
           <a:p>
             <a:r>
               <a:rPr lang="fa-IR" dirty="0"/>
-              <a:t>مزایا و معایب طراحی و سنتز سطح </a:t>
-            </a:r>
-            <a:r>
-              <a:rPr lang="fa-IR" dirty="0" smtClean="0"/>
-              <a:t>بالا</a:t>
+              <a:t>مزایا و معایب طراحی و سنتز سطح بالا</a:t>
             </a:r>
             <a:endParaRPr lang="en-US" dirty="0"/>
           </a:p>
@@ -11164,56 +11181,56 @@
           <a:lstStyle/>
           <a:p>
             <a:r>
-              <a:rPr lang="fa-IR" dirty="0" smtClean="0"/>
+              <a:rPr lang="fa-IR" dirty="0"/>
               <a:t>مزایا:</a:t>
             </a:r>
           </a:p>
           <a:p>
             <a:pPr lvl="1"/>
             <a:r>
-              <a:rPr lang="fa-IR" dirty="0" smtClean="0"/>
+              <a:rPr lang="fa-IR" dirty="0"/>
               <a:t>سهولت </a:t>
             </a:r>
             <a:r>
-              <a:rPr lang="fa-IR" smtClean="0"/>
+              <a:rPr lang="fa-IR"/>
               <a:t>طراحی سیستم‌های </a:t>
             </a:r>
             <a:r>
-              <a:rPr lang="fa-IR" dirty="0" smtClean="0"/>
+              <a:rPr lang="fa-IR" dirty="0"/>
               <a:t>پیچیده</a:t>
             </a:r>
           </a:p>
           <a:p>
             <a:pPr lvl="2"/>
             <a:r>
-              <a:rPr lang="fa-IR" smtClean="0"/>
+              <a:rPr lang="fa-IR"/>
               <a:t> توصیف </a:t>
             </a:r>
             <a:r>
-              <a:rPr lang="fa-IR" dirty="0" smtClean="0"/>
+              <a:rPr lang="fa-IR" dirty="0"/>
               <a:t>عملیات در سطح بالا و تمرکز بیشتر بر نوآوری سطح بالا</a:t>
             </a:r>
           </a:p>
           <a:p>
             <a:pPr lvl="2"/>
-            <a:endParaRPr lang="fa-IR" dirty="0" smtClean="0"/>
+            <a:endParaRPr lang="fa-IR" dirty="0"/>
           </a:p>
           <a:p>
             <a:pPr lvl="1"/>
             <a:r>
-              <a:rPr lang="fa-IR" smtClean="0"/>
+              <a:rPr lang="fa-IR"/>
               <a:t>سهولت درستی‌سنجی و اشکال‌زدایی</a:t>
             </a:r>
-            <a:endParaRPr lang="fa-IR" dirty="0" smtClean="0"/>
+            <a:endParaRPr lang="fa-IR" dirty="0"/>
           </a:p>
           <a:p>
             <a:pPr lvl="2"/>
             <a:r>
-              <a:rPr lang="fa-IR" smtClean="0"/>
+              <a:rPr lang="fa-IR"/>
               <a:t> جزئیات </a:t>
             </a:r>
             <a:r>
-              <a:rPr lang="fa-IR" dirty="0" smtClean="0"/>
+              <a:rPr lang="fa-IR" dirty="0"/>
               <a:t>بسیار کمتر</a:t>
             </a:r>
           </a:p>
@@ -11262,13 +11279,6 @@
   <p:clrMapOvr>
     <a:masterClrMapping/>
   </p:clrMapOvr>
-  <p:timing>
-    <p:tnLst>
-      <p:par>
-        <p:cTn id="1" dur="indefinite" restart="never" nodeType="tmRoot"/>
-      </p:par>
-    </p:tnLst>
-  </p:timing>
 </p:sld>
 </file>
 
@@ -11306,11 +11316,7 @@
           <a:p>
             <a:r>
               <a:rPr lang="fa-IR" dirty="0"/>
-              <a:t>مزایا و معایب طراحی و سنتز سطح </a:t>
-            </a:r>
-            <a:r>
-              <a:rPr lang="fa-IR" dirty="0" smtClean="0"/>
-              <a:t>بالا</a:t>
+              <a:t>مزایا و معایب طراحی و سنتز سطح بالا</a:t>
             </a:r>
             <a:endParaRPr lang="en-US" dirty="0"/>
           </a:p>
@@ -11337,22 +11343,22 @@
           <a:lstStyle/>
           <a:p>
             <a:r>
-              <a:rPr lang="fa-IR" dirty="0" smtClean="0"/>
+              <a:rPr lang="fa-IR" dirty="0"/>
               <a:t>معایب:</a:t>
             </a:r>
           </a:p>
           <a:p>
             <a:pPr lvl="1"/>
             <a:r>
-              <a:rPr lang="fa-IR" dirty="0" smtClean="0"/>
+              <a:rPr lang="fa-IR" dirty="0"/>
               <a:t>کیفیت پایین نتایج سنتز (نسبت به طراحی </a:t>
             </a:r>
             <a:r>
-              <a:rPr lang="en-US" sz="2400" dirty="0" smtClean="0"/>
+              <a:rPr lang="en-US" sz="2400" dirty="0"/>
               <a:t>RTL</a:t>
             </a:r>
             <a:r>
-              <a:rPr lang="fa-IR" dirty="0" smtClean="0"/>
+              <a:rPr lang="fa-IR" dirty="0"/>
               <a:t>)</a:t>
             </a:r>
           </a:p>
@@ -11362,7 +11368,7 @@
           </a:p>
           <a:p>
             <a:r>
-              <a:rPr lang="fa-IR" dirty="0" smtClean="0"/>
+              <a:rPr lang="fa-IR" dirty="0"/>
               <a:t>ترکیب دو روش:</a:t>
             </a:r>
           </a:p>
@@ -11371,29 +11377,29 @@
               <a:buNone/>
             </a:pPr>
             <a:r>
-              <a:rPr lang="fa-IR" dirty="0" smtClean="0"/>
+              <a:rPr lang="fa-IR" dirty="0"/>
               <a:t>1) توصیف سطح بالا و کاوش فضای طراحی</a:t>
             </a:r>
           </a:p>
           <a:p>
             <a:pPr lvl="2"/>
             <a:r>
-              <a:rPr lang="fa-IR" dirty="0" smtClean="0"/>
+              <a:rPr lang="fa-IR" dirty="0"/>
               <a:t>برای کیفیت مطلوب </a:t>
             </a:r>
             <a:r>
-              <a:rPr lang="fa-IR" dirty="0" smtClean="0">
+              <a:rPr lang="fa-IR" dirty="0">
                 <a:sym typeface="Wingdings" panose="05000000000000000000" pitchFamily="2" charset="2"/>
               </a:rPr>
               <a:t> طراحی در سطح </a:t>
             </a:r>
             <a:r>
-              <a:rPr lang="en-US" dirty="0" smtClean="0">
+              <a:rPr lang="en-US" dirty="0">
                 <a:sym typeface="Wingdings" panose="05000000000000000000" pitchFamily="2" charset="2"/>
               </a:rPr>
               <a:t>RTL</a:t>
             </a:r>
-            <a:endParaRPr lang="fa-IR" dirty="0" smtClean="0">
+            <a:endParaRPr lang="fa-IR" dirty="0">
               <a:sym typeface="Wingdings" panose="05000000000000000000" pitchFamily="2" charset="2"/>
             </a:endParaRPr>
           </a:p>
@@ -11402,30 +11408,30 @@
               <a:buNone/>
             </a:pPr>
             <a:r>
-              <a:rPr lang="fa-IR" dirty="0" smtClean="0">
+              <a:rPr lang="fa-IR" dirty="0">
                 <a:sym typeface="Wingdings" panose="05000000000000000000" pitchFamily="2" charset="2"/>
               </a:rPr>
               <a:t>2</a:t>
             </a:r>
             <a:r>
-              <a:rPr lang="fa-IR" smtClean="0">
+              <a:rPr lang="fa-IR">
                 <a:sym typeface="Wingdings" panose="05000000000000000000" pitchFamily="2" charset="2"/>
               </a:rPr>
               <a:t>) بخش‌های </a:t>
             </a:r>
             <a:r>
-              <a:rPr lang="fa-IR" dirty="0" smtClean="0">
+              <a:rPr lang="fa-IR" dirty="0">
                 <a:sym typeface="Wingdings" panose="05000000000000000000" pitchFamily="2" charset="2"/>
               </a:rPr>
               <a:t>بحرانی (بسیار مؤثر در سرعت): </a:t>
             </a:r>
             <a:r>
-              <a:rPr lang="en-US" sz="2400" dirty="0" smtClean="0">
+              <a:rPr lang="en-US" sz="2400" dirty="0">
                 <a:sym typeface="Wingdings" panose="05000000000000000000" pitchFamily="2" charset="2"/>
               </a:rPr>
               <a:t>RTL</a:t>
             </a:r>
-            <a:endParaRPr lang="fa-IR" sz="2400" dirty="0" smtClean="0">
+            <a:endParaRPr lang="fa-IR" sz="2400" dirty="0">
               <a:sym typeface="Wingdings" panose="05000000000000000000" pitchFamily="2" charset="2"/>
             </a:endParaRPr>
           </a:p>
@@ -11437,33 +11443,27 @@
               <a:rPr lang="fa-IR" sz="2400" dirty="0">
                 <a:sym typeface="Wingdings" panose="05000000000000000000" pitchFamily="2" charset="2"/>
               </a:rPr>
-              <a:t> </a:t>
-            </a:r>
-            <a:r>
-              <a:rPr lang="fa-IR" sz="2400" dirty="0" smtClean="0">
-                <a:sym typeface="Wingdings" panose="05000000000000000000" pitchFamily="2" charset="2"/>
-              </a:rPr>
-              <a:t>   </a:t>
-            </a:r>
-            <a:r>
-              <a:rPr lang="fa-IR" smtClean="0">
+              <a:t>    </a:t>
+            </a:r>
+            <a:r>
+              <a:rPr lang="fa-IR">
                 <a:sym typeface="Wingdings" panose="05000000000000000000" pitchFamily="2" charset="2"/>
               </a:rPr>
               <a:t>سایر بخش‌ها</a:t>
             </a:r>
             <a:r>
-              <a:rPr lang="fa-IR" dirty="0" smtClean="0">
+              <a:rPr lang="fa-IR" dirty="0">
                 <a:sym typeface="Wingdings" panose="05000000000000000000" pitchFamily="2" charset="2"/>
               </a:rPr>
               <a:t>: </a:t>
             </a:r>
             <a:r>
-              <a:rPr lang="en-US" sz="2400" dirty="0" smtClean="0">
+              <a:rPr lang="en-US" sz="2400" dirty="0">
                 <a:sym typeface="Wingdings" panose="05000000000000000000" pitchFamily="2" charset="2"/>
               </a:rPr>
               <a:t>HLS</a:t>
             </a:r>
-            <a:endParaRPr lang="fa-IR" dirty="0" smtClean="0">
+            <a:endParaRPr lang="fa-IR" dirty="0">
               <a:sym typeface="Wingdings" panose="05000000000000000000" pitchFamily="2" charset="2"/>
             </a:endParaRPr>
           </a:p>
@@ -11817,16 +11817,8 @@
           <a:lstStyle/>
           <a:p>
             <a:r>
-              <a:rPr lang="fa-IR" dirty="0" smtClean="0"/>
-              <a:t>انواع عملیات </a:t>
-            </a:r>
-            <a:r>
               <a:rPr lang="fa-IR" dirty="0"/>
-              <a:t>سنتز سطح </a:t>
-            </a:r>
-            <a:r>
-              <a:rPr lang="fa-IR" dirty="0" smtClean="0"/>
-              <a:t>بالا</a:t>
+              <a:t>انواع عملیات سنتز سطح بالا</a:t>
             </a:r>
             <a:endParaRPr lang="en-US" dirty="0"/>
           </a:p>
@@ -11853,42 +11845,42 @@
           <a:lstStyle/>
           <a:p>
             <a:r>
-              <a:rPr lang="fa-IR" dirty="0" smtClean="0"/>
+              <a:rPr lang="fa-IR" dirty="0"/>
               <a:t>عملیات سنتز:</a:t>
             </a:r>
           </a:p>
           <a:p>
             <a:pPr lvl="1"/>
             <a:r>
-              <a:rPr lang="fa-IR" dirty="0" smtClean="0"/>
+              <a:rPr lang="fa-IR" dirty="0"/>
               <a:t>سنتز توابع </a:t>
             </a:r>
             <a:r>
-              <a:rPr lang="en-US" sz="2400" dirty="0" smtClean="0"/>
+              <a:rPr lang="en-US" sz="2400" dirty="0"/>
               <a:t>C/C++</a:t>
             </a:r>
             <a:r>
-              <a:rPr lang="fa-IR" sz="2400" dirty="0" smtClean="0"/>
+              <a:rPr lang="fa-IR" sz="2400" dirty="0"/>
               <a:t> </a:t>
             </a:r>
             <a:r>
-              <a:rPr lang="fa-IR" smtClean="0"/>
+              <a:rPr lang="fa-IR"/>
               <a:t>از تابع درون </a:t>
             </a:r>
             <a:r>
-              <a:rPr lang="en-US" sz="2400" smtClean="0"/>
+              <a:rPr lang="en-US" sz="2400"/>
               <a:t>main</a:t>
             </a:r>
             <a:r>
-              <a:rPr lang="en-US" sz="2400" dirty="0" smtClean="0"/>
+              <a:rPr lang="en-US" sz="2400" dirty="0"/>
               <a:t>()</a:t>
             </a:r>
             <a:r>
-              <a:rPr lang="fa-IR" sz="2400" dirty="0" smtClean="0"/>
+              <a:rPr lang="fa-IR" sz="2400" dirty="0"/>
               <a:t> </a:t>
             </a:r>
             <a:r>
-              <a:rPr lang="fa-IR" dirty="0" smtClean="0"/>
+              <a:rPr lang="fa-IR" dirty="0"/>
               <a:t>به پایین</a:t>
             </a:r>
           </a:p>
@@ -11898,22 +11890,18 @@
               <a:buAutoNum type="arabicPeriod"/>
             </a:pPr>
             <a:r>
-              <a:rPr lang="fa-IR" sz="2800" smtClean="0"/>
+              <a:rPr lang="fa-IR" sz="2800"/>
               <a:t> سنتز </a:t>
             </a:r>
             <a:r>
               <a:rPr lang="fa-IR" sz="2800" dirty="0"/>
-              <a:t>الگوریتم (بخش عمدة عملیات </a:t>
-            </a:r>
-            <a:r>
-              <a:rPr lang="fa-IR" sz="2800" dirty="0" smtClean="0"/>
-              <a:t>سنتز):</a:t>
+              <a:t>الگوریتم (بخش عمدة عملیات سنتز):</a:t>
             </a:r>
           </a:p>
           <a:p>
             <a:pPr lvl="3"/>
             <a:r>
-              <a:rPr lang="fa-IR" sz="2400" dirty="0" smtClean="0">
+              <a:rPr lang="fa-IR" sz="2400" dirty="0">
                 <a:sym typeface="Wingdings" panose="05000000000000000000" pitchFamily="2" charset="2"/>
               </a:rPr>
               <a:t>سنتز عملیات درون تابع</a:t>
@@ -11923,36 +11911,20 @@
             <a:pPr lvl="3"/>
             <a:r>
               <a:rPr lang="fa-IR" sz="2400" dirty="0"/>
-              <a:t>شناسایی </a:t>
-            </a:r>
-            <a:r>
-              <a:rPr lang="fa-IR" sz="2400" dirty="0" smtClean="0"/>
-              <a:t>ساختارهای </a:t>
-            </a:r>
+              <a:t>شناسایی ساختارهای زبان سطح بالا</a:t>
+            </a:r>
+          </a:p>
+          <a:p>
+            <a:pPr lvl="3"/>
             <a:r>
               <a:rPr lang="fa-IR" sz="2400" dirty="0"/>
-              <a:t>زبان سطح </a:t>
-            </a:r>
-            <a:r>
-              <a:rPr lang="fa-IR" sz="2400" dirty="0" smtClean="0"/>
-              <a:t>بالا</a:t>
-            </a:r>
-          </a:p>
-          <a:p>
-            <a:pPr lvl="3"/>
-            <a:r>
-              <a:rPr lang="fa-IR" sz="2400" dirty="0" smtClean="0"/>
-              <a:t>تولید اجزای </a:t>
-            </a:r>
-            <a:r>
-              <a:rPr lang="fa-IR" sz="2400" dirty="0"/>
-              <a:t>سخت­افزاری لازم برای توصیف </a:t>
-            </a:r>
-            <a:r>
-              <a:rPr lang="en-US" sz="1800" dirty="0" smtClean="0"/>
+              <a:t>تولید اجزای سخت­افزاری لازم برای توصیف </a:t>
+            </a:r>
+            <a:r>
+              <a:rPr lang="en-US" sz="1800" dirty="0"/>
               <a:t>RTL</a:t>
             </a:r>
-            <a:endParaRPr lang="fa-IR" sz="2400" dirty="0" smtClean="0"/>
+            <a:endParaRPr lang="fa-IR" sz="2400" dirty="0"/>
           </a:p>
           <a:p>
             <a:pPr lvl="2">
@@ -11960,13 +11932,13 @@
               <a:buAutoNum type="arabicPeriod"/>
             </a:pPr>
             <a:r>
-              <a:rPr lang="fa-IR" sz="2800" smtClean="0">
+              <a:rPr lang="fa-IR" sz="2800">
                 <a:sym typeface="Wingdings" panose="05000000000000000000" pitchFamily="2" charset="2"/>
               </a:rPr>
               <a:t> سنتز </a:t>
             </a:r>
             <a:r>
-              <a:rPr lang="fa-IR" sz="2800" dirty="0" smtClean="0">
+              <a:rPr lang="fa-IR" sz="2800" dirty="0">
                 <a:sym typeface="Wingdings" panose="05000000000000000000" pitchFamily="2" charset="2"/>
               </a:rPr>
               <a:t>مدار واسط</a:t>
@@ -12552,13 +12524,6 @@
   <p:clrMapOvr>
     <a:masterClrMapping/>
   </p:clrMapOvr>
-  <p:timing>
-    <p:tnLst>
-      <p:par>
-        <p:cTn id="1" dur="indefinite" restart="never" nodeType="tmRoot"/>
-      </p:par>
-    </p:tnLst>
-  </p:timing>
 </p:sld>
 </file>
 
@@ -12595,16 +12560,8 @@
           <a:lstStyle/>
           <a:p>
             <a:r>
-              <a:rPr lang="fa-IR" dirty="0" smtClean="0"/>
-              <a:t>مراحل سنتز </a:t>
-            </a:r>
-            <a:r>
               <a:rPr lang="fa-IR" dirty="0"/>
-              <a:t>سطح </a:t>
-            </a:r>
-            <a:r>
-              <a:rPr lang="fa-IR" dirty="0" smtClean="0"/>
-              <a:t>بالا</a:t>
+              <a:t>مراحل سنتز سطح بالا</a:t>
             </a:r>
             <a:endParaRPr lang="en-US" dirty="0"/>
           </a:p>
@@ -12631,34 +12588,34 @@
           <a:lstStyle/>
           <a:p>
             <a:r>
-              <a:rPr lang="fa-IR" dirty="0" smtClean="0"/>
+              <a:rPr lang="fa-IR" dirty="0"/>
               <a:t>مراحل سنتز:</a:t>
             </a:r>
           </a:p>
           <a:p>
             <a:r>
-              <a:rPr lang="fa-IR" dirty="0" smtClean="0"/>
+              <a:rPr lang="fa-IR" dirty="0"/>
               <a:t>هدف:</a:t>
             </a:r>
           </a:p>
           <a:p>
             <a:pPr lvl="1"/>
             <a:r>
-              <a:rPr lang="fa-IR" dirty="0" smtClean="0"/>
+              <a:rPr lang="fa-IR" dirty="0"/>
               <a:t>دید عمیق به طراحان سطح بالا</a:t>
             </a:r>
           </a:p>
           <a:p>
             <a:pPr lvl="1"/>
             <a:r>
-              <a:rPr lang="fa-IR" dirty="0" smtClean="0"/>
+              <a:rPr lang="fa-IR" dirty="0"/>
               <a:t>روش سیستماتیک برای طراحان </a:t>
             </a:r>
             <a:r>
-              <a:rPr lang="en-US" dirty="0" smtClean="0"/>
+              <a:rPr lang="en-US" dirty="0"/>
               <a:t>RTL</a:t>
             </a:r>
-            <a:endParaRPr lang="fa-IR" dirty="0" smtClean="0"/>
+            <a:endParaRPr lang="fa-IR" dirty="0"/>
           </a:p>
           <a:p>
             <a:pPr lvl="1"/>
@@ -12765,13 +12722,6 @@
   <p:clrMapOvr>
     <a:masterClrMapping/>
   </p:clrMapOvr>
-  <p:timing>
-    <p:tnLst>
-      <p:par>
-        <p:cTn id="1" dur="indefinite" restart="never" nodeType="tmRoot"/>
-      </p:par>
-    </p:tnLst>
-  </p:timing>
 </p:sld>
 </file>
 
@@ -12808,16 +12758,8 @@
           <a:lstStyle/>
           <a:p>
             <a:r>
-              <a:rPr lang="fa-IR" dirty="0" smtClean="0"/>
-              <a:t>مراحل سنتز </a:t>
-            </a:r>
-            <a:r>
               <a:rPr lang="fa-IR" dirty="0"/>
-              <a:t>سطح </a:t>
-            </a:r>
-            <a:r>
-              <a:rPr lang="fa-IR" dirty="0" smtClean="0"/>
-              <a:t>بالا</a:t>
+              <a:t>مراحل سنتز سطح بالا</a:t>
             </a:r>
             <a:endParaRPr lang="en-US" dirty="0"/>
           </a:p>
@@ -12848,73 +12790,73 @@
               <a:buAutoNum type="arabicPeriod"/>
             </a:pPr>
             <a:r>
-              <a:rPr lang="fa-IR" dirty="0" smtClean="0"/>
+              <a:rPr lang="fa-IR" dirty="0"/>
               <a:t>زمانبندی (</a:t>
             </a:r>
             <a:r>
-              <a:rPr lang="en-US" sz="2800" dirty="0" smtClean="0"/>
+              <a:rPr lang="en-US" sz="2800" dirty="0"/>
               <a:t>Scheduling</a:t>
             </a:r>
             <a:r>
-              <a:rPr lang="fa-IR" dirty="0" smtClean="0"/>
+              <a:rPr lang="fa-IR" dirty="0"/>
               <a:t>):</a:t>
             </a:r>
           </a:p>
           <a:p>
             <a:pPr lvl="1"/>
             <a:r>
-              <a:rPr lang="fa-IR" smtClean="0"/>
+              <a:rPr lang="fa-IR"/>
               <a:t>مشخص می‌کند در هر کلاک چه عملیاتی انجام شود.</a:t>
             </a:r>
-            <a:endParaRPr lang="fa-IR" dirty="0" smtClean="0"/>
+            <a:endParaRPr lang="fa-IR" dirty="0"/>
           </a:p>
           <a:p>
             <a:pPr lvl="2"/>
             <a:r>
-              <a:rPr lang="fa-IR" smtClean="0"/>
+              <a:rPr lang="fa-IR"/>
               <a:t> تولید </a:t>
             </a:r>
             <a:r>
-              <a:rPr lang="fa-IR" dirty="0" smtClean="0"/>
+              <a:rPr lang="fa-IR" dirty="0"/>
               <a:t>گراف زمانبندی</a:t>
             </a:r>
           </a:p>
           <a:p>
             <a:pPr lvl="2"/>
-            <a:endParaRPr lang="fa-IR" dirty="0" smtClean="0"/>
+            <a:endParaRPr lang="fa-IR" dirty="0"/>
           </a:p>
           <a:p>
             <a:pPr lvl="1"/>
             <a:r>
-              <a:rPr lang="fa-IR" dirty="0" smtClean="0"/>
+              <a:rPr lang="fa-IR" dirty="0"/>
               <a:t>اگر عملی در یک پریود کلاک قابل انجام نباشد</a:t>
             </a:r>
           </a:p>
           <a:p>
             <a:pPr lvl="2"/>
             <a:r>
-              <a:rPr lang="fa-IR" dirty="0" smtClean="0"/>
+              <a:rPr lang="fa-IR" dirty="0"/>
               <a:t>افزایش پریود کلاک یا </a:t>
             </a:r>
           </a:p>
           <a:p>
             <a:pPr lvl="2"/>
             <a:r>
-              <a:rPr lang="fa-IR" dirty="0" smtClean="0"/>
+              <a:rPr lang="fa-IR" dirty="0"/>
               <a:t>زمانبندی عمل در چند کلاک</a:t>
             </a:r>
           </a:p>
           <a:p>
             <a:pPr lvl="1"/>
             <a:r>
-              <a:rPr lang="fa-IR" dirty="0" smtClean="0"/>
+              <a:rPr lang="fa-IR" dirty="0"/>
               <a:t>اگر چند عمل مستقلند</a:t>
             </a:r>
           </a:p>
           <a:p>
             <a:pPr lvl="2"/>
             <a:r>
-              <a:rPr lang="fa-IR" dirty="0" smtClean="0"/>
+              <a:rPr lang="fa-IR" dirty="0"/>
               <a:t>زمانبندی در یک کلاک</a:t>
             </a:r>
           </a:p>
@@ -12924,7 +12866,7 @@
           </a:p>
           <a:p>
             <a:pPr lvl="1"/>
-            <a:endParaRPr lang="fa-IR" dirty="0" smtClean="0"/>
+            <a:endParaRPr lang="fa-IR" dirty="0"/>
           </a:p>
           <a:p>
             <a:pPr lvl="1"/>
@@ -13031,13 +12973,6 @@
   <p:clrMapOvr>
     <a:masterClrMapping/>
   </p:clrMapOvr>
-  <p:timing>
-    <p:tnLst>
-      <p:par>
-        <p:cTn id="1" dur="indefinite" restart="never" nodeType="tmRoot"/>
-      </p:par>
-    </p:tnLst>
-  </p:timing>
 </p:sld>
 </file>
 
@@ -13074,16 +13009,8 @@
           <a:lstStyle/>
           <a:p>
             <a:r>
-              <a:rPr lang="fa-IR" dirty="0" smtClean="0"/>
-              <a:t>مراحل سنتز </a:t>
-            </a:r>
-            <a:r>
               <a:rPr lang="fa-IR" dirty="0"/>
-              <a:t>سطح </a:t>
-            </a:r>
-            <a:r>
-              <a:rPr lang="fa-IR" dirty="0" smtClean="0"/>
-              <a:t>بالا</a:t>
+              <a:t>مراحل سنتز سطح بالا</a:t>
             </a:r>
             <a:endParaRPr lang="en-US" dirty="0"/>
           </a:p>
@@ -13114,60 +13041,43 @@
               <a:buAutoNum type="arabicPeriod" startAt="2"/>
             </a:pPr>
             <a:r>
-              <a:rPr lang="fa-IR" dirty="0" smtClean="0"/>
+              <a:rPr lang="fa-IR" dirty="0"/>
               <a:t>تخصیص (</a:t>
             </a:r>
             <a:r>
-              <a:rPr lang="en-US" sz="2800" dirty="0" smtClean="0"/>
+              <a:rPr lang="en-US" sz="2800" dirty="0"/>
               <a:t>Allocation</a:t>
             </a:r>
             <a:r>
-              <a:rPr lang="fa-IR" dirty="0" smtClean="0"/>
+              <a:rPr lang="fa-IR" dirty="0"/>
               <a:t>):</a:t>
             </a:r>
           </a:p>
           <a:p>
             <a:pPr lvl="1"/>
             <a:r>
-              <a:rPr lang="fa-IR" dirty="0" smtClean="0"/>
-              <a:t>تعیین </a:t>
-            </a:r>
-            <a:r>
               <a:rPr lang="fa-IR" dirty="0"/>
-              <a:t>مجموعة منابع سخت­افزاری </a:t>
-            </a:r>
-            <a:r>
-              <a:rPr lang="fa-IR" dirty="0" smtClean="0"/>
-              <a:t>لازم</a:t>
+              <a:t>تعیین مجموعة منابع سخت­افزاری لازم</a:t>
             </a:r>
           </a:p>
           <a:p>
             <a:pPr lvl="1"/>
             <a:r>
               <a:rPr lang="fa-IR" dirty="0"/>
-              <a:t>تعیین </a:t>
-            </a:r>
-            <a:r>
-              <a:rPr lang="fa-IR" dirty="0" smtClean="0"/>
-              <a:t>ثبات­های </a:t>
-            </a:r>
+              <a:t>تعیین ثبات­های لازم برای نگهداری عملوندها </a:t>
+            </a:r>
+          </a:p>
+          <a:p>
             <a:r>
               <a:rPr lang="fa-IR" dirty="0"/>
-              <a:t>لازم برای نگهداری عملوندها </a:t>
-            </a:r>
-            <a:endParaRPr lang="fa-IR" dirty="0" smtClean="0"/>
-          </a:p>
-          <a:p>
-            <a:r>
-              <a:rPr lang="fa-IR" dirty="0" smtClean="0"/>
               <a:t>مقیدسازی (</a:t>
             </a:r>
             <a:r>
-              <a:rPr lang="en-US" sz="2800" dirty="0" smtClean="0"/>
+              <a:rPr lang="en-US" sz="2800" dirty="0"/>
               <a:t>Binding</a:t>
             </a:r>
             <a:r>
-              <a:rPr lang="fa-IR" dirty="0" smtClean="0"/>
+              <a:rPr lang="fa-IR" dirty="0"/>
               <a:t>):</a:t>
             </a:r>
           </a:p>
@@ -13175,90 +13085,41 @@
             <a:pPr lvl="1"/>
             <a:r>
               <a:rPr lang="fa-IR" dirty="0"/>
-              <a:t>کدام عمل در توصیف سطح بالا توسط کدام </a:t>
-            </a:r>
-            <a:r>
-              <a:rPr lang="fa-IR" dirty="0" smtClean="0"/>
-              <a:t>سخت­افزار اجرا شود؟</a:t>
+              <a:t>کدام عمل در توصیف سطح بالا توسط کدام سخت­افزار اجرا شود؟</a:t>
             </a:r>
           </a:p>
           <a:p>
             <a:pPr lvl="2"/>
             <a:r>
-              <a:rPr lang="fa-IR" dirty="0" smtClean="0"/>
-              <a:t>مثال: اگر </a:t>
-            </a:r>
-            <a:r>
               <a:rPr lang="fa-IR" dirty="0"/>
-              <a:t>چند </a:t>
-            </a:r>
-            <a:r>
-              <a:rPr lang="fa-IR" dirty="0" smtClean="0"/>
-              <a:t>جمع </a:t>
-            </a:r>
+              <a:t>مثال: اگر چند جمع در توصیف باشد، بنا بر نتیجة زمانبندی</a:t>
+            </a:r>
+          </a:p>
+          <a:p>
+            <a:pPr lvl="3"/>
             <a:r>
               <a:rPr lang="fa-IR" dirty="0"/>
-              <a:t>در </a:t>
-            </a:r>
-            <a:r>
-              <a:rPr lang="fa-IR" dirty="0" smtClean="0"/>
-              <a:t>توصیف باشد، </a:t>
-            </a:r>
+              <a:t>ممکن است برای هر جمع، یک جمع­کننده تخصیص یابد و یا </a:t>
+            </a:r>
+          </a:p>
+          <a:p>
+            <a:pPr lvl="3"/>
             <a:r>
               <a:rPr lang="fa-IR" dirty="0"/>
-              <a:t>بنا بر نتیجة </a:t>
-            </a:r>
-            <a:r>
-              <a:rPr lang="fa-IR" dirty="0" smtClean="0"/>
-              <a:t>زمانبندی</a:t>
-            </a:r>
-          </a:p>
-          <a:p>
-            <a:pPr lvl="3"/>
-            <a:r>
-              <a:rPr lang="fa-IR" dirty="0" smtClean="0"/>
-              <a:t>ممکن </a:t>
-            </a:r>
-            <a:r>
-              <a:rPr lang="fa-IR" dirty="0"/>
-              <a:t>است برای هر </a:t>
-            </a:r>
-            <a:r>
-              <a:rPr lang="fa-IR" dirty="0" smtClean="0"/>
-              <a:t>جمع</a:t>
-            </a:r>
-            <a:r>
-              <a:rPr lang="fa-IR" dirty="0"/>
-              <a:t>، یک جمع­کننده تخصیص یابد و یا </a:t>
-            </a:r>
-            <a:endParaRPr lang="fa-IR" dirty="0" smtClean="0"/>
-          </a:p>
-          <a:p>
-            <a:pPr lvl="3"/>
-            <a:r>
-              <a:rPr lang="fa-IR" dirty="0" smtClean="0"/>
-              <a:t>تنها </a:t>
-            </a:r>
-            <a:r>
-              <a:rPr lang="fa-IR" dirty="0"/>
-              <a:t>یک جمع­کننده برای انجام همة اعمال </a:t>
-            </a:r>
-            <a:r>
-              <a:rPr lang="fa-IR" dirty="0" smtClean="0"/>
-              <a:t>جمع</a:t>
+              <a:t>تنها یک جمع­کننده برای انجام همة اعمال جمع</a:t>
             </a:r>
           </a:p>
           <a:p>
             <a:pPr lvl="1"/>
-            <a:endParaRPr lang="fa-IR" dirty="0" smtClean="0"/>
+            <a:endParaRPr lang="fa-IR" dirty="0"/>
           </a:p>
           <a:p>
             <a:pPr lvl="2"/>
-            <a:endParaRPr lang="fa-IR" dirty="0" smtClean="0"/>
+            <a:endParaRPr lang="fa-IR" dirty="0"/>
           </a:p>
           <a:p>
             <a:pPr lvl="1"/>
-            <a:endParaRPr lang="fa-IR" dirty="0" smtClean="0"/>
+            <a:endParaRPr lang="fa-IR" dirty="0"/>
           </a:p>
           <a:p>
             <a:pPr lvl="1"/>
@@ -13365,13 +13226,6 @@
   <p:clrMapOvr>
     <a:masterClrMapping/>
   </p:clrMapOvr>
-  <p:timing>
-    <p:tnLst>
-      <p:par>
-        <p:cTn id="1" dur="indefinite" restart="never" nodeType="tmRoot"/>
-      </p:par>
-    </p:tnLst>
-  </p:timing>
 </p:sld>
 </file>
 
@@ -13427,17 +13281,16 @@
           <a:lstStyle/>
           <a:p>
             <a:r>
-              <a:rPr lang="fa-IR" sz="4000" smtClean="0"/>
+              <a:rPr lang="fa-IR" sz="4000"/>
               <a:t>بازدید از صمیم رایانه</a:t>
             </a:r>
           </a:p>
           <a:p>
             <a:pPr lvl="1"/>
             <a:r>
-              <a:rPr lang="fa-IR" sz="3600" smtClean="0"/>
+              <a:rPr lang="fa-IR" sz="3600"/>
               <a:t>احتمالا چهارشنبه هفته آینده صبح</a:t>
             </a:r>
-            <a:endParaRPr lang="fa-IR" sz="3600"/>
           </a:p>
         </p:txBody>
       </p:sp>
@@ -13516,16 +13369,8 @@
           <a:lstStyle/>
           <a:p>
             <a:r>
-              <a:rPr lang="fa-IR" dirty="0" smtClean="0"/>
-              <a:t>مراحل سنتز </a:t>
-            </a:r>
-            <a:r>
               <a:rPr lang="fa-IR" dirty="0"/>
-              <a:t>سطح </a:t>
-            </a:r>
-            <a:r>
-              <a:rPr lang="fa-IR" dirty="0" smtClean="0"/>
-              <a:t>بالا</a:t>
+              <a:t>مراحل سنتز سطح بالا</a:t>
             </a:r>
             <a:endParaRPr lang="en-US" dirty="0"/>
           </a:p>
@@ -13556,90 +13401,73 @@
               <a:buAutoNum type="arabicPeriod" startAt="2"/>
             </a:pPr>
             <a:r>
-              <a:rPr lang="fa-IR" dirty="0" smtClean="0"/>
-              <a:t>تخصیص و</a:t>
-            </a:r>
-            <a:r>
               <a:rPr lang="fa-IR" dirty="0"/>
-              <a:t> </a:t>
-            </a:r>
-            <a:r>
-              <a:rPr lang="fa-IR" dirty="0" smtClean="0"/>
-              <a:t>مقیدسازی:</a:t>
+              <a:t>تخصیص و مقیدسازی:</a:t>
             </a:r>
           </a:p>
           <a:p>
             <a:pPr lvl="1"/>
             <a:r>
-              <a:rPr lang="fa-IR" dirty="0" smtClean="0"/>
+              <a:rPr lang="fa-IR" dirty="0"/>
               <a:t>اگر عمل در </a:t>
             </a:r>
             <a:r>
-              <a:rPr lang="en-US" sz="2400" dirty="0" smtClean="0"/>
+              <a:rPr lang="en-US" sz="2400" dirty="0"/>
               <a:t>RTL</a:t>
             </a:r>
             <a:r>
-              <a:rPr lang="fa-IR" dirty="0" smtClean="0"/>
+              <a:rPr lang="fa-IR" dirty="0"/>
               <a:t> قابل سنتز نیست (مثل جذر):</a:t>
             </a:r>
           </a:p>
           <a:p>
             <a:pPr lvl="2"/>
             <a:r>
-              <a:rPr lang="fa-IR" dirty="0" smtClean="0">
+              <a:rPr lang="fa-IR" dirty="0">
                 <a:sym typeface="Wingdings" panose="05000000000000000000" pitchFamily="2" charset="2"/>
               </a:rPr>
               <a:t> </a:t>
             </a:r>
             <a:r>
-              <a:rPr lang="fa-IR" dirty="0" smtClean="0"/>
-              <a:t>استفاده از </a:t>
-            </a:r>
-            <a:r>
               <a:rPr lang="fa-IR" dirty="0"/>
-              <a:t>کتابخانه­های هسته­های </a:t>
-            </a:r>
-            <a:r>
-              <a:rPr lang="fa-IR" dirty="0" smtClean="0"/>
-              <a:t>آماده و ابزارهای </a:t>
-            </a:r>
-            <a:r>
-              <a:rPr lang="en-US" dirty="0" smtClean="0"/>
+              <a:t>استفاده از کتابخانه­های هسته­های آماده و ابزارهای </a:t>
+            </a:r>
+            <a:r>
+              <a:rPr lang="en-US" dirty="0"/>
               <a:t>core generator</a:t>
             </a:r>
             <a:r>
-              <a:rPr lang="fa-IR" dirty="0" smtClean="0"/>
+              <a:rPr lang="fa-IR" dirty="0"/>
               <a:t> توسط ابزار </a:t>
             </a:r>
             <a:r>
-              <a:rPr lang="en-US" dirty="0" smtClean="0"/>
+              <a:rPr lang="en-US" dirty="0"/>
               <a:t>HLS</a:t>
             </a:r>
-            <a:endParaRPr lang="fa-IR" dirty="0" smtClean="0"/>
+            <a:endParaRPr lang="fa-IR" dirty="0"/>
           </a:p>
           <a:p>
             <a:pPr lvl="3"/>
             <a:r>
-              <a:rPr lang="en-US" dirty="0" smtClean="0"/>
+              <a:rPr lang="en-US" dirty="0"/>
               <a:t>CORDIC</a:t>
             </a:r>
             <a:r>
               <a:rPr lang="fa-IR" dirty="0"/>
               <a:t> </a:t>
             </a:r>
-            <a:endParaRPr lang="fa-IR" dirty="0" smtClean="0"/>
           </a:p>
           <a:p>
             <a:pPr lvl="1"/>
-            <a:endParaRPr lang="fa-IR" dirty="0" smtClean="0"/>
+            <a:endParaRPr lang="fa-IR" dirty="0"/>
           </a:p>
           <a:p>
             <a:pPr lvl="2"/>
-            <a:endParaRPr lang="fa-IR" dirty="0" smtClean="0"/>
+            <a:endParaRPr lang="fa-IR" dirty="0"/>
           </a:p>
           <a:p>
             <a:pPr lvl="1"/>
-            <a:endParaRPr lang="fa-IR" dirty="0" smtClean="0"/>
+            <a:endParaRPr lang="fa-IR" dirty="0"/>
           </a:p>
           <a:p>
             <a:pPr lvl="1"/>
@@ -13746,13 +13574,6 @@
   <p:clrMapOvr>
     <a:masterClrMapping/>
   </p:clrMapOvr>
-  <p:timing>
-    <p:tnLst>
-      <p:par>
-        <p:cTn id="1" dur="indefinite" restart="never" nodeType="tmRoot"/>
-      </p:par>
-    </p:tnLst>
-  </p:timing>
 </p:sld>
 </file>
 
@@ -13789,16 +13610,8 @@
           <a:lstStyle/>
           <a:p>
             <a:r>
-              <a:rPr lang="fa-IR" dirty="0" smtClean="0"/>
-              <a:t>مراحل سنتز </a:t>
-            </a:r>
-            <a:r>
               <a:rPr lang="fa-IR" dirty="0"/>
-              <a:t>سطح </a:t>
-            </a:r>
-            <a:r>
-              <a:rPr lang="fa-IR" dirty="0" smtClean="0"/>
-              <a:t>بالا</a:t>
+              <a:t>مراحل سنتز سطح بالا</a:t>
             </a:r>
             <a:endParaRPr lang="en-US" dirty="0"/>
           </a:p>
@@ -13829,51 +13642,51 @@
               <a:buAutoNum type="arabicPeriod" startAt="3"/>
             </a:pPr>
             <a:r>
-              <a:rPr lang="fa-IR" dirty="0" smtClean="0"/>
+              <a:rPr lang="fa-IR" dirty="0"/>
               <a:t>سنتز کنترل کننده:</a:t>
             </a:r>
           </a:p>
           <a:p>
             <a:pPr lvl="1"/>
             <a:r>
-              <a:rPr lang="fa-IR" dirty="0" smtClean="0"/>
+              <a:rPr lang="fa-IR" dirty="0"/>
               <a:t>تولید </a:t>
             </a:r>
             <a:r>
-              <a:rPr lang="en-US" sz="2400" dirty="0" smtClean="0"/>
+              <a:rPr lang="en-US" sz="2400" dirty="0"/>
               <a:t>FSM</a:t>
             </a:r>
             <a:r>
-              <a:rPr lang="fa-IR" dirty="0" smtClean="0"/>
+              <a:rPr lang="fa-IR" dirty="0"/>
               <a:t> برای </a:t>
             </a:r>
             <a:r>
-              <a:rPr lang="fa-IR" smtClean="0"/>
+              <a:rPr lang="fa-IR"/>
               <a:t>ایجاد سیگنال‌های </a:t>
             </a:r>
             <a:r>
-              <a:rPr lang="fa-IR" dirty="0" smtClean="0"/>
+              <a:rPr lang="fa-IR" dirty="0"/>
               <a:t>کنترلی</a:t>
             </a:r>
           </a:p>
           <a:p>
             <a:pPr lvl="2"/>
             <a:r>
-              <a:rPr lang="fa-IR" dirty="0" smtClean="0"/>
+              <a:rPr lang="fa-IR" dirty="0"/>
               <a:t>برای فراهم کردن زمانبندی </a:t>
             </a:r>
           </a:p>
           <a:p>
             <a:pPr lvl="1"/>
-            <a:endParaRPr lang="fa-IR" dirty="0" smtClean="0"/>
+            <a:endParaRPr lang="fa-IR" dirty="0"/>
           </a:p>
           <a:p>
             <a:pPr lvl="2"/>
-            <a:endParaRPr lang="fa-IR" dirty="0" smtClean="0"/>
+            <a:endParaRPr lang="fa-IR" dirty="0"/>
           </a:p>
           <a:p>
             <a:pPr lvl="1"/>
-            <a:endParaRPr lang="fa-IR" dirty="0" smtClean="0"/>
+            <a:endParaRPr lang="fa-IR" dirty="0"/>
           </a:p>
           <a:p>
             <a:pPr lvl="1"/>
@@ -13980,13 +13793,6 @@
   <p:clrMapOvr>
     <a:masterClrMapping/>
   </p:clrMapOvr>
-  <p:timing>
-    <p:tnLst>
-      <p:par>
-        <p:cTn id="1" dur="indefinite" restart="never" nodeType="tmRoot"/>
-      </p:par>
-    </p:tnLst>
-  </p:timing>
 </p:sld>
 </file>
 
@@ -14023,16 +13829,8 @@
           <a:lstStyle/>
           <a:p>
             <a:r>
-              <a:rPr lang="fa-IR" dirty="0" smtClean="0"/>
-              <a:t>مراحل سنتز </a:t>
-            </a:r>
-            <a:r>
               <a:rPr lang="fa-IR" dirty="0"/>
-              <a:t>سطح </a:t>
-            </a:r>
-            <a:r>
-              <a:rPr lang="fa-IR" dirty="0" smtClean="0"/>
-              <a:t>بالا: مثال</a:t>
+              <a:t>مراحل سنتز سطح بالا: مثال</a:t>
             </a:r>
             <a:endParaRPr lang="en-US" dirty="0"/>
           </a:p>
@@ -14059,40 +13857,40 @@
           <a:lstStyle/>
           <a:p>
             <a:r>
-              <a:rPr lang="fa-IR" dirty="0" smtClean="0"/>
+              <a:rPr lang="fa-IR" dirty="0"/>
               <a:t>سنتز ب.م.م:</a:t>
             </a:r>
           </a:p>
           <a:p>
             <a:pPr lvl="1"/>
             <a:r>
-              <a:rPr lang="fa-IR" dirty="0" smtClean="0"/>
+              <a:rPr lang="fa-IR" dirty="0"/>
               <a:t>تولید گراف </a:t>
             </a:r>
             <a:r>
-              <a:rPr lang="en-US" dirty="0" err="1" smtClean="0"/>
+              <a:rPr lang="en-US" dirty="0" err="1"/>
               <a:t>FSMD</a:t>
             </a:r>
-            <a:endParaRPr lang="fa-IR" dirty="0" smtClean="0"/>
+            <a:endParaRPr lang="fa-IR" dirty="0"/>
           </a:p>
           <a:p>
             <a:pPr lvl="2"/>
             <a:r>
-              <a:rPr lang="fa-IR" dirty="0" smtClean="0"/>
+              <a:rPr lang="fa-IR" dirty="0"/>
               <a:t>با ساختارهای از پیش تعریف شده</a:t>
             </a:r>
           </a:p>
           <a:p>
             <a:pPr lvl="1"/>
-            <a:endParaRPr lang="fa-IR" dirty="0" smtClean="0"/>
+            <a:endParaRPr lang="fa-IR" dirty="0"/>
           </a:p>
           <a:p>
             <a:pPr lvl="2"/>
-            <a:endParaRPr lang="fa-IR" dirty="0" smtClean="0"/>
+            <a:endParaRPr lang="fa-IR" dirty="0"/>
           </a:p>
           <a:p>
             <a:pPr lvl="1"/>
-            <a:endParaRPr lang="fa-IR" dirty="0" smtClean="0"/>
+            <a:endParaRPr lang="fa-IR" dirty="0"/>
           </a:p>
           <a:p>
             <a:pPr lvl="1"/>
@@ -14542,13 +14340,6 @@
   <p:clrMapOvr>
     <a:masterClrMapping/>
   </p:clrMapOvr>
-  <p:timing>
-    <p:tnLst>
-      <p:par>
-        <p:cTn id="1" dur="indefinite" restart="never" nodeType="tmRoot"/>
-      </p:par>
-    </p:tnLst>
-  </p:timing>
 </p:sld>
 </file>
 
@@ -14585,16 +14376,8 @@
           <a:lstStyle/>
           <a:p>
             <a:r>
-              <a:rPr lang="fa-IR" dirty="0" smtClean="0"/>
-              <a:t>مراحل سنتز </a:t>
-            </a:r>
-            <a:r>
               <a:rPr lang="fa-IR" dirty="0"/>
-              <a:t>سطح </a:t>
-            </a:r>
-            <a:r>
-              <a:rPr lang="fa-IR" dirty="0" smtClean="0"/>
-              <a:t>بالا: مثال</a:t>
+              <a:t>مراحل سنتز سطح بالا: مثال</a:t>
             </a:r>
             <a:endParaRPr lang="en-US" dirty="0"/>
           </a:p>
@@ -14625,29 +14408,29 @@
               <a:buAutoNum type="arabicPeriod" startAt="3"/>
             </a:pPr>
             <a:r>
-              <a:rPr lang="fa-IR" dirty="0" smtClean="0"/>
+              <a:rPr lang="fa-IR" dirty="0"/>
               <a:t>الگوهای حلقه و </a:t>
             </a:r>
             <a:r>
-              <a:rPr lang="en-US" dirty="0" smtClean="0"/>
+              <a:rPr lang="en-US" dirty="0"/>
               <a:t>if</a:t>
             </a:r>
             <a:r>
-              <a:rPr lang="fa-IR" dirty="0" smtClean="0"/>
+              <a:rPr lang="fa-IR" dirty="0"/>
               <a:t>:</a:t>
             </a:r>
           </a:p>
           <a:p>
             <a:pPr lvl="1"/>
-            <a:endParaRPr lang="fa-IR" dirty="0" smtClean="0"/>
+            <a:endParaRPr lang="fa-IR" dirty="0"/>
           </a:p>
           <a:p>
             <a:pPr lvl="2"/>
-            <a:endParaRPr lang="fa-IR" dirty="0" smtClean="0"/>
+            <a:endParaRPr lang="fa-IR" dirty="0"/>
           </a:p>
           <a:p>
             <a:pPr lvl="1"/>
-            <a:endParaRPr lang="fa-IR" dirty="0" smtClean="0"/>
+            <a:endParaRPr lang="fa-IR" dirty="0"/>
           </a:p>
           <a:p>
             <a:pPr lvl="1"/>
@@ -14748,13 +14531,6 @@
   <p:clrMapOvr>
     <a:masterClrMapping/>
   </p:clrMapOvr>
-  <p:timing>
-    <p:tnLst>
-      <p:par>
-        <p:cTn id="1" dur="indefinite" restart="never" nodeType="tmRoot"/>
-      </p:par>
-    </p:tnLst>
-  </p:timing>
 </p:sld>
 </file>
 
@@ -14791,16 +14567,8 @@
           <a:lstStyle/>
           <a:p>
             <a:r>
-              <a:rPr lang="fa-IR" dirty="0" smtClean="0"/>
-              <a:t>مراحل سنتز </a:t>
-            </a:r>
-            <a:r>
               <a:rPr lang="fa-IR" dirty="0"/>
-              <a:t>سطح </a:t>
-            </a:r>
-            <a:r>
-              <a:rPr lang="fa-IR" dirty="0" smtClean="0"/>
-              <a:t>بالا</a:t>
+              <a:t>مراحل سنتز سطح بالا</a:t>
             </a:r>
             <a:endParaRPr lang="en-US" dirty="0"/>
           </a:p>
@@ -14826,40 +14594,40 @@
           <a:bodyPr/>
           <a:lstStyle/>
           <a:p>
-            <a:endParaRPr lang="fa-IR" dirty="0" smtClean="0"/>
+            <a:endParaRPr lang="fa-IR" dirty="0"/>
           </a:p>
           <a:p>
             <a:pPr lvl="1"/>
             <a:r>
-              <a:rPr lang="fa-IR" dirty="0" smtClean="0"/>
+              <a:rPr lang="fa-IR" dirty="0"/>
               <a:t>تخصیص و مقیدسازی</a:t>
             </a:r>
           </a:p>
           <a:p>
             <a:pPr lvl="2"/>
             <a:r>
-              <a:rPr lang="fa-IR" dirty="0" smtClean="0"/>
+              <a:rPr lang="fa-IR" dirty="0"/>
               <a:t>عملگرها</a:t>
             </a:r>
           </a:p>
           <a:p>
             <a:pPr lvl="2"/>
             <a:r>
-              <a:rPr lang="fa-IR" dirty="0" smtClean="0"/>
+              <a:rPr lang="fa-IR" dirty="0"/>
               <a:t>ثبات ها</a:t>
             </a:r>
           </a:p>
           <a:p>
             <a:pPr lvl="1"/>
-            <a:endParaRPr lang="fa-IR" dirty="0" smtClean="0"/>
+            <a:endParaRPr lang="fa-IR" dirty="0"/>
           </a:p>
           <a:p>
             <a:pPr lvl="2"/>
-            <a:endParaRPr lang="fa-IR" dirty="0" smtClean="0"/>
+            <a:endParaRPr lang="fa-IR" dirty="0"/>
           </a:p>
           <a:p>
             <a:pPr lvl="1"/>
-            <a:endParaRPr lang="fa-IR" dirty="0" smtClean="0"/>
+            <a:endParaRPr lang="fa-IR" dirty="0"/>
           </a:p>
           <a:p>
             <a:pPr lvl="1"/>
@@ -14924,12 +14692,12 @@
           <a:graphicData uri="http://schemas.openxmlformats.org/presentationml/2006/ole">
             <mc:AlternateContent xmlns:mc="http://schemas.openxmlformats.org/markup-compatibility/2006">
               <mc:Choice xmlns:v="urn:schemas-microsoft-com:vml" Requires="v">
-                <p:oleObj spid="_x0000_s4375" name="Visio" r:id="rId3" imgW="18707129" imgH="12696857" progId="Visio.Drawing.11">
+                <p:oleObj name="Visio" r:id="rId2" imgW="18707129" imgH="12696857" progId="Visio.Drawing.11">
                   <p:embed/>
                 </p:oleObj>
               </mc:Choice>
               <mc:Fallback>
-                <p:oleObj name="Visio" r:id="rId3" imgW="18707129" imgH="12696857" progId="Visio.Drawing.11">
+                <p:oleObj name="Visio" r:id="rId2" imgW="18707129" imgH="12696857" progId="Visio.Drawing.11">
                   <p:embed/>
                   <p:pic>
                     <p:nvPicPr>
@@ -14938,7 +14706,7 @@
                       <p:nvPr/>
                     </p:nvPicPr>
                     <p:blipFill>
-                      <a:blip r:embed="rId4"/>
+                      <a:blip r:embed="rId3"/>
                       <a:stretch>
                         <a:fillRect/>
                       </a:stretch>
@@ -15342,13 +15110,6 @@
   <p:clrMapOvr>
     <a:masterClrMapping/>
   </p:clrMapOvr>
-  <p:timing>
-    <p:tnLst>
-      <p:par>
-        <p:cTn id="1" dur="indefinite" restart="never" nodeType="tmRoot"/>
-      </p:par>
-    </p:tnLst>
-  </p:timing>
 </p:sld>
 </file>
 
@@ -15378,7 +15139,7 @@
           <p:nvPr/>
         </p:nvPicPr>
         <p:blipFill>
-          <a:blip r:embed="rId3"/>
+          <a:blip r:embed="rId2"/>
           <a:stretch>
             <a:fillRect/>
           </a:stretch>
@@ -15409,16 +15170,8 @@
           <a:lstStyle/>
           <a:p>
             <a:r>
-              <a:rPr lang="fa-IR" dirty="0" smtClean="0"/>
-              <a:t>مراحل سنتز </a:t>
-            </a:r>
-            <a:r>
               <a:rPr lang="fa-IR" dirty="0"/>
-              <a:t>سطح </a:t>
-            </a:r>
-            <a:r>
-              <a:rPr lang="fa-IR" dirty="0" smtClean="0"/>
-              <a:t>بالا</a:t>
+              <a:t>مراحل سنتز سطح بالا</a:t>
             </a:r>
             <a:endParaRPr lang="en-US" dirty="0"/>
           </a:p>
@@ -15444,31 +15197,31 @@
           <a:bodyPr/>
           <a:lstStyle/>
           <a:p>
-            <a:endParaRPr lang="fa-IR" dirty="0" smtClean="0"/>
+            <a:endParaRPr lang="fa-IR" dirty="0"/>
           </a:p>
           <a:p>
             <a:pPr lvl="1"/>
             <a:r>
-              <a:rPr lang="fa-IR" dirty="0" smtClean="0"/>
+              <a:rPr lang="fa-IR" dirty="0"/>
               <a:t>سنتز کنترل کننده بر اساس گراف </a:t>
             </a:r>
             <a:r>
-              <a:rPr lang="en-US" dirty="0" err="1" smtClean="0"/>
+              <a:rPr lang="en-US" dirty="0" err="1"/>
               <a:t>FSMD</a:t>
             </a:r>
-            <a:endParaRPr lang="fa-IR" dirty="0" smtClean="0"/>
+            <a:endParaRPr lang="fa-IR" dirty="0"/>
           </a:p>
           <a:p>
             <a:pPr lvl="1"/>
-            <a:endParaRPr lang="fa-IR" dirty="0" smtClean="0"/>
+            <a:endParaRPr lang="fa-IR" dirty="0"/>
           </a:p>
           <a:p>
             <a:pPr lvl="2"/>
-            <a:endParaRPr lang="fa-IR" dirty="0" smtClean="0"/>
+            <a:endParaRPr lang="fa-IR" dirty="0"/>
           </a:p>
           <a:p>
             <a:pPr lvl="1"/>
-            <a:endParaRPr lang="fa-IR" dirty="0" smtClean="0"/>
+            <a:endParaRPr lang="fa-IR" dirty="0"/>
           </a:p>
           <a:p>
             <a:pPr lvl="1"/>
@@ -15533,12 +15286,12 @@
           <a:graphicData uri="http://schemas.openxmlformats.org/presentationml/2006/ole">
             <mc:AlternateContent xmlns:mc="http://schemas.openxmlformats.org/markup-compatibility/2006">
               <mc:Choice xmlns:v="urn:schemas-microsoft-com:vml" Requires="v">
-                <p:oleObj spid="_x0000_s5589" name="Visio" r:id="rId4" imgW="18068874" imgH="16602075" progId="Visio.Drawing.11">
+                <p:oleObj name="Visio" r:id="rId3" imgW="18068874" imgH="16602075" progId="Visio.Drawing.11">
                   <p:embed/>
                 </p:oleObj>
               </mc:Choice>
               <mc:Fallback>
-                <p:oleObj name="Visio" r:id="rId4" imgW="18068874" imgH="16602075" progId="Visio.Drawing.11">
+                <p:oleObj name="Visio" r:id="rId3" imgW="18068874" imgH="16602075" progId="Visio.Drawing.11">
                   <p:embed/>
                   <p:pic>
                     <p:nvPicPr>
@@ -15547,7 +15300,7 @@
                       <p:nvPr/>
                     </p:nvPicPr>
                     <p:blipFill>
-                      <a:blip r:embed="rId5"/>
+                      <a:blip r:embed="rId4"/>
                       <a:stretch>
                         <a:fillRect/>
                       </a:stretch>
@@ -15578,13 +15331,6 @@
   <p:clrMapOvr>
     <a:masterClrMapping/>
   </p:clrMapOvr>
-  <p:timing>
-    <p:tnLst>
-      <p:par>
-        <p:cTn id="1" dur="indefinite" restart="never" nodeType="tmRoot"/>
-      </p:par>
-    </p:tnLst>
-  </p:timing>
 </p:sld>
 </file>
 
@@ -15621,7 +15367,7 @@
           <a:lstStyle/>
           <a:p>
             <a:r>
-              <a:rPr lang="fa-IR" dirty="0" smtClean="0"/>
+              <a:rPr lang="fa-IR" dirty="0"/>
               <a:t>اشتراک منابع</a:t>
             </a:r>
             <a:endParaRPr lang="en-US" dirty="0"/>
@@ -15648,23 +15394,23 @@
           <a:bodyPr/>
           <a:lstStyle/>
           <a:p>
-            <a:endParaRPr lang="fa-IR" dirty="0" smtClean="0"/>
+            <a:endParaRPr lang="fa-IR" dirty="0"/>
           </a:p>
           <a:p>
             <a:pPr lvl="1"/>
-            <a:endParaRPr lang="fa-IR" dirty="0" smtClean="0"/>
+            <a:endParaRPr lang="fa-IR" dirty="0"/>
           </a:p>
           <a:p>
             <a:pPr lvl="1"/>
-            <a:endParaRPr lang="fa-IR" dirty="0" smtClean="0"/>
+            <a:endParaRPr lang="fa-IR" dirty="0"/>
           </a:p>
           <a:p>
             <a:pPr lvl="2"/>
-            <a:endParaRPr lang="fa-IR" dirty="0" smtClean="0"/>
+            <a:endParaRPr lang="fa-IR" dirty="0"/>
           </a:p>
           <a:p>
             <a:pPr lvl="1"/>
-            <a:endParaRPr lang="fa-IR" dirty="0" smtClean="0"/>
+            <a:endParaRPr lang="fa-IR" dirty="0"/>
           </a:p>
           <a:p>
             <a:pPr lvl="1"/>
@@ -15729,12 +15475,12 @@
           <a:graphicData uri="http://schemas.openxmlformats.org/presentationml/2006/ole">
             <mc:AlternateContent xmlns:mc="http://schemas.openxmlformats.org/markup-compatibility/2006">
               <mc:Choice xmlns:v="urn:schemas-microsoft-com:vml" Requires="v">
-                <p:oleObj spid="_x0000_s6694" name="Visio" r:id="rId3" imgW="4800600" imgH="3771755" progId="Visio.Drawing.15">
+                <p:oleObj name="Visio" r:id="rId2" imgW="4800600" imgH="3771755" progId="Visio.Drawing.15">
                   <p:embed/>
                 </p:oleObj>
               </mc:Choice>
               <mc:Fallback>
-                <p:oleObj name="Visio" r:id="rId3" imgW="4800600" imgH="3771755" progId="Visio.Drawing.15">
+                <p:oleObj name="Visio" r:id="rId2" imgW="4800600" imgH="3771755" progId="Visio.Drawing.15">
                   <p:embed/>
                   <p:pic>
                     <p:nvPicPr>
@@ -15745,7 +15491,7 @@
                       <p:nvPr/>
                     </p:nvPicPr>
                     <p:blipFill>
-                      <a:blip r:embed="rId4">
+                      <a:blip r:embed="rId3">
                         <a:extLst>
                           <a:ext uri="{28A0092B-C50C-407E-A947-70E740481C1C}">
                             <a14:useLocalDpi xmlns:a14="http://schemas.microsoft.com/office/drawing/2010/main" val="0"/>
@@ -15796,12 +15542,12 @@
           <a:graphicData uri="http://schemas.openxmlformats.org/presentationml/2006/ole">
             <mc:AlternateContent xmlns:mc="http://schemas.openxmlformats.org/markup-compatibility/2006">
               <mc:Choice xmlns:v="urn:schemas-microsoft-com:vml" Requires="v">
-                <p:oleObj spid="_x0000_s6695" name="Visio" r:id="rId5" imgW="5448286" imgH="5114828" progId="Visio.Drawing.11">
+                <p:oleObj name="Visio" r:id="rId4" imgW="5448286" imgH="5114828" progId="Visio.Drawing.11">
                   <p:embed/>
                 </p:oleObj>
               </mc:Choice>
               <mc:Fallback>
-                <p:oleObj name="Visio" r:id="rId5" imgW="5448286" imgH="5114828" progId="Visio.Drawing.11">
+                <p:oleObj name="Visio" r:id="rId4" imgW="5448286" imgH="5114828" progId="Visio.Drawing.11">
                   <p:embed/>
                   <p:pic>
                     <p:nvPicPr>
@@ -15812,7 +15558,7 @@
                       <p:nvPr/>
                     </p:nvPicPr>
                     <p:blipFill>
-                      <a:blip r:embed="rId6">
+                      <a:blip r:embed="rId5">
                         <a:extLst>
                           <a:ext uri="{28A0092B-C50C-407E-A947-70E740481C1C}">
                             <a14:useLocalDpi xmlns:a14="http://schemas.microsoft.com/office/drawing/2010/main" val="0"/>
@@ -16034,22 +15780,13 @@
           <a:p>
             <a:pPr rtl="1"/>
             <a:r>
-              <a:rPr lang="fa-IR" dirty="0" smtClean="0"/>
-              <a:t>زمان</a:t>
-            </a:r>
-            <a:r>
               <a:rPr lang="fa-IR" dirty="0"/>
-              <a:t>ب</a:t>
-            </a:r>
-            <a:r>
-              <a:rPr lang="fa-IR" dirty="0" smtClean="0"/>
-              <a:t>ندی و </a:t>
-            </a:r>
-            <a:r>
-              <a:rPr lang="en-US" dirty="0" smtClean="0"/>
+              <a:t>زمانبندی و </a:t>
+            </a:r>
+            <a:r>
+              <a:rPr lang="en-US" dirty="0"/>
               <a:t>DFG</a:t>
             </a:r>
-            <a:endParaRPr lang="en-US" dirty="0"/>
           </a:p>
         </p:txBody>
       </p:sp>
@@ -16074,51 +15811,51 @@
           <a:lstStyle/>
           <a:p>
             <a:r>
-              <a:rPr lang="fa-IR" dirty="0" smtClean="0"/>
+              <a:rPr lang="fa-IR" dirty="0"/>
               <a:t>زمانبندی </a:t>
             </a:r>
             <a:r>
-              <a:rPr lang="fa-IR" smtClean="0"/>
+              <a:rPr lang="fa-IR"/>
               <a:t>و موازی‌سازی </a:t>
             </a:r>
             <a:r>
-              <a:rPr lang="fa-IR" dirty="0" smtClean="0"/>
+              <a:rPr lang="fa-IR" dirty="0"/>
               <a:t>عملیات:</a:t>
             </a:r>
           </a:p>
           <a:p>
             <a:pPr lvl="1"/>
             <a:r>
-              <a:rPr lang="fa-IR" dirty="0" smtClean="0"/>
+              <a:rPr lang="fa-IR" dirty="0"/>
               <a:t>گراف جریان داده (</a:t>
             </a:r>
             <a:r>
-              <a:rPr lang="en-US" sz="2400" dirty="0" smtClean="0"/>
+              <a:rPr lang="en-US" sz="2400" dirty="0"/>
               <a:t>Data Flow Graph</a:t>
             </a:r>
             <a:r>
-              <a:rPr lang="fa-IR" dirty="0" smtClean="0"/>
+              <a:rPr lang="fa-IR" dirty="0"/>
               <a:t>):</a:t>
             </a:r>
           </a:p>
           <a:p>
             <a:pPr lvl="2"/>
             <a:r>
-              <a:rPr lang="fa-IR" dirty="0" smtClean="0"/>
+              <a:rPr lang="fa-IR" dirty="0"/>
               <a:t>عملیات در چند سیکل</a:t>
             </a:r>
           </a:p>
           <a:p>
             <a:pPr lvl="1"/>
-            <a:endParaRPr lang="fa-IR" dirty="0" smtClean="0"/>
+            <a:endParaRPr lang="fa-IR" dirty="0"/>
           </a:p>
           <a:p>
             <a:pPr lvl="2"/>
-            <a:endParaRPr lang="fa-IR" dirty="0" smtClean="0"/>
+            <a:endParaRPr lang="fa-IR" dirty="0"/>
           </a:p>
           <a:p>
             <a:pPr lvl="1"/>
-            <a:endParaRPr lang="fa-IR" dirty="0" smtClean="0"/>
+            <a:endParaRPr lang="fa-IR" dirty="0"/>
           </a:p>
           <a:p>
             <a:pPr lvl="1"/>
@@ -16320,12 +16057,12 @@
           <a:graphicData uri="http://schemas.openxmlformats.org/presentationml/2006/ole">
             <mc:AlternateContent xmlns:mc="http://schemas.openxmlformats.org/markup-compatibility/2006">
               <mc:Choice xmlns:v="urn:schemas-microsoft-com:vml" Requires="v">
-                <p:oleObj spid="_x0000_s7443" name="Visio" r:id="rId3" imgW="13773280" imgH="16402050" progId="Visio.Drawing.11">
+                <p:oleObj name="Visio" r:id="rId2" imgW="13773280" imgH="16402050" progId="Visio.Drawing.11">
                   <p:embed/>
                 </p:oleObj>
               </mc:Choice>
               <mc:Fallback>
-                <p:oleObj name="Visio" r:id="rId3" imgW="13773280" imgH="16402050" progId="Visio.Drawing.11">
+                <p:oleObj name="Visio" r:id="rId2" imgW="13773280" imgH="16402050" progId="Visio.Drawing.11">
                   <p:embed/>
                   <p:pic>
                     <p:nvPicPr>
@@ -16336,7 +16073,7 @@
                       <p:nvPr/>
                     </p:nvPicPr>
                     <p:blipFill>
-                      <a:blip r:embed="rId4">
+                      <a:blip r:embed="rId3">
                         <a:extLst>
                           <a:ext uri="{28A0092B-C50C-407E-A947-70E740481C1C}">
                             <a14:useLocalDpi xmlns:a14="http://schemas.microsoft.com/office/drawing/2010/main" val="0"/>
@@ -16375,13 +16112,6 @@
   <p:clrMapOvr>
     <a:masterClrMapping/>
   </p:clrMapOvr>
-  <p:timing>
-    <p:tnLst>
-      <p:par>
-        <p:cTn id="1" dur="indefinite" restart="never" nodeType="tmRoot"/>
-      </p:par>
-    </p:tnLst>
-  </p:timing>
 </p:sld>
 </file>
 
@@ -16419,22 +16149,13 @@
           <a:p>
             <a:pPr rtl="1"/>
             <a:r>
-              <a:rPr lang="fa-IR" dirty="0" smtClean="0"/>
-              <a:t>زمان</a:t>
-            </a:r>
-            <a:r>
               <a:rPr lang="fa-IR" dirty="0"/>
-              <a:t>ب</a:t>
-            </a:r>
-            <a:r>
-              <a:rPr lang="fa-IR" dirty="0" smtClean="0"/>
-              <a:t>ندی و </a:t>
-            </a:r>
-            <a:r>
-              <a:rPr lang="en-US" dirty="0" smtClean="0"/>
+              <a:t>زمانبندی و </a:t>
+            </a:r>
+            <a:r>
+              <a:rPr lang="en-US" dirty="0"/>
               <a:t>DFG</a:t>
             </a:r>
-            <a:endParaRPr lang="en-US" dirty="0"/>
           </a:p>
         </p:txBody>
       </p:sp>
@@ -16459,28 +16180,28 @@
           <a:lstStyle/>
           <a:p>
             <a:r>
-              <a:rPr lang="fa-IR" dirty="0" smtClean="0"/>
+              <a:rPr lang="fa-IR" dirty="0"/>
               <a:t>زمانبندی:</a:t>
             </a:r>
           </a:p>
           <a:p>
             <a:pPr lvl="1"/>
             <a:r>
-              <a:rPr lang="fa-IR" dirty="0" smtClean="0"/>
+              <a:rPr lang="fa-IR" dirty="0"/>
               <a:t>دو زمانبندی مختلف:</a:t>
             </a:r>
           </a:p>
           <a:p>
             <a:pPr lvl="1"/>
-            <a:endParaRPr lang="fa-IR" dirty="0" smtClean="0"/>
+            <a:endParaRPr lang="fa-IR" dirty="0"/>
           </a:p>
           <a:p>
             <a:pPr lvl="2"/>
-            <a:endParaRPr lang="fa-IR" dirty="0" smtClean="0"/>
+            <a:endParaRPr lang="fa-IR" dirty="0"/>
           </a:p>
           <a:p>
             <a:pPr lvl="1"/>
-            <a:endParaRPr lang="fa-IR" dirty="0" smtClean="0"/>
+            <a:endParaRPr lang="fa-IR" dirty="0"/>
           </a:p>
           <a:p>
             <a:pPr lvl="1"/>
@@ -16682,12 +16403,12 @@
           <a:graphicData uri="http://schemas.openxmlformats.org/presentationml/2006/ole">
             <mc:AlternateContent xmlns:mc="http://schemas.openxmlformats.org/markup-compatibility/2006">
               <mc:Choice xmlns:v="urn:schemas-microsoft-com:vml" Requires="v">
-                <p:oleObj spid="_x0000_s8745" name="Visio" r:id="rId3" imgW="16973680" imgH="17049766" progId="Visio.Drawing.11">
+                <p:oleObj name="Visio" r:id="rId2" imgW="16973680" imgH="17049766" progId="Visio.Drawing.11">
                   <p:embed/>
                 </p:oleObj>
               </mc:Choice>
               <mc:Fallback>
-                <p:oleObj name="Visio" r:id="rId3" imgW="16973680" imgH="17049766" progId="Visio.Drawing.11">
+                <p:oleObj name="Visio" r:id="rId2" imgW="16973680" imgH="17049766" progId="Visio.Drawing.11">
                   <p:embed/>
                   <p:pic>
                     <p:nvPicPr>
@@ -16698,7 +16419,7 @@
                       <p:nvPr/>
                     </p:nvPicPr>
                     <p:blipFill>
-                      <a:blip r:embed="rId4">
+                      <a:blip r:embed="rId3">
                         <a:extLst>
                           <a:ext uri="{28A0092B-C50C-407E-A947-70E740481C1C}">
                             <a14:useLocalDpi xmlns:a14="http://schemas.microsoft.com/office/drawing/2010/main" val="0"/>
@@ -16812,12 +16533,12 @@
           <a:graphicData uri="http://schemas.openxmlformats.org/presentationml/2006/ole">
             <mc:AlternateContent xmlns:mc="http://schemas.openxmlformats.org/markup-compatibility/2006">
               <mc:Choice xmlns:v="urn:schemas-microsoft-com:vml" Requires="v">
-                <p:oleObj spid="_x0000_s8746" name="Visio" r:id="rId5" imgW="17887863" imgH="22707568" progId="Visio.Drawing.11">
+                <p:oleObj name="Visio" r:id="rId4" imgW="17887863" imgH="22707568" progId="Visio.Drawing.11">
                   <p:embed/>
                 </p:oleObj>
               </mc:Choice>
               <mc:Fallback>
-                <p:oleObj name="Visio" r:id="rId5" imgW="17887863" imgH="22707568" progId="Visio.Drawing.11">
+                <p:oleObj name="Visio" r:id="rId4" imgW="17887863" imgH="22707568" progId="Visio.Drawing.11">
                   <p:embed/>
                   <p:pic>
                     <p:nvPicPr>
@@ -16828,7 +16549,7 @@
                       <p:nvPr/>
                     </p:nvPicPr>
                     <p:blipFill>
-                      <a:blip r:embed="rId6">
+                      <a:blip r:embed="rId5">
                         <a:extLst>
                           <a:ext uri="{28A0092B-C50C-407E-A947-70E740481C1C}">
                             <a14:useLocalDpi xmlns:a14="http://schemas.microsoft.com/office/drawing/2010/main" val="0"/>
@@ -16884,7 +16605,7 @@
               </a:spcBef>
             </a:pPr>
             <a:r>
-              <a:rPr lang="fa-IR" sz="2400" kern="0" dirty="0" smtClean="0">
+              <a:rPr lang="fa-IR" sz="2400" kern="0" dirty="0">
                 <a:solidFill>
                   <a:srgbClr val="0000FF"/>
                 </a:solidFill>
@@ -16901,7 +16622,7 @@
               </a:spcBef>
             </a:pPr>
             <a:r>
-              <a:rPr lang="fa-IR" sz="2400" kern="0" dirty="0" smtClean="0">
+              <a:rPr lang="fa-IR" sz="2400" kern="0" dirty="0">
                 <a:solidFill>
                   <a:srgbClr val="0000FF"/>
                 </a:solidFill>
@@ -16910,13 +16631,6 @@
               </a:rPr>
               <a:t>(+ 1 شیفت دهنده)</a:t>
             </a:r>
-            <a:endParaRPr lang="fa-IR" sz="2400" kern="0" dirty="0">
-              <a:solidFill>
-                <a:srgbClr val="0000FF"/>
-              </a:solidFill>
-              <a:latin typeface="Arial"/>
-              <a:cs typeface="B Mitra" pitchFamily="2" charset="-78"/>
-            </a:endParaRPr>
           </a:p>
         </p:txBody>
       </p:sp>
@@ -16947,7 +16661,7 @@
               </a:spcBef>
             </a:pPr>
             <a:r>
-              <a:rPr lang="fa-IR" sz="2400" kern="0" dirty="0" smtClean="0">
+              <a:rPr lang="fa-IR" sz="2400" kern="0" dirty="0">
                 <a:solidFill>
                   <a:srgbClr val="0000FF"/>
                 </a:solidFill>
@@ -16956,13 +16670,6 @@
               </a:rPr>
               <a:t>1 ضرب کننده + 1 جمع کننده </a:t>
             </a:r>
-            <a:endParaRPr lang="fa-IR" sz="2400" kern="0" dirty="0">
-              <a:solidFill>
-                <a:srgbClr val="0000FF"/>
-              </a:solidFill>
-              <a:latin typeface="Arial"/>
-              <a:cs typeface="B Mitra" pitchFamily="2" charset="-78"/>
-            </a:endParaRPr>
           </a:p>
           <a:p>
             <a:pPr lvl="1" algn="r" rtl="1">
@@ -16978,25 +16685,8 @@
                 <a:latin typeface="Arial"/>
                 <a:cs typeface="B Mitra" pitchFamily="2" charset="-78"/>
               </a:rPr>
-              <a:t>(+ 1 شیفت دهنده</a:t>
-            </a:r>
-            <a:r>
-              <a:rPr lang="fa-IR" sz="2400" kern="0" dirty="0" smtClean="0">
-                <a:solidFill>
-                  <a:srgbClr val="0000FF"/>
-                </a:solidFill>
-                <a:latin typeface="Arial"/>
-                <a:cs typeface="B Mitra" pitchFamily="2" charset="-78"/>
-              </a:rPr>
-              <a:t>)</a:t>
-            </a:r>
-            <a:endParaRPr lang="fa-IR" sz="2400" kern="0" dirty="0">
-              <a:solidFill>
-                <a:srgbClr val="0000FF"/>
-              </a:solidFill>
-              <a:latin typeface="Arial"/>
-              <a:cs typeface="B Mitra" pitchFamily="2" charset="-78"/>
-            </a:endParaRPr>
+              <a:t>(+ 1 شیفت دهنده)</a:t>
+            </a:r>
           </a:p>
         </p:txBody>
       </p:sp>
@@ -17010,13 +16700,6 @@
   <p:clrMapOvr>
     <a:masterClrMapping/>
   </p:clrMapOvr>
-  <p:timing>
-    <p:tnLst>
-      <p:par>
-        <p:cTn id="1" dur="indefinite" restart="never" nodeType="tmRoot"/>
-      </p:par>
-    </p:tnLst>
-  </p:timing>
 </p:sld>
 </file>
 
@@ -17054,22 +16737,13 @@
           <a:p>
             <a:pPr rtl="1"/>
             <a:r>
-              <a:rPr lang="fa-IR" dirty="0" smtClean="0"/>
-              <a:t>زمان</a:t>
-            </a:r>
-            <a:r>
               <a:rPr lang="fa-IR" dirty="0"/>
-              <a:t>ب</a:t>
-            </a:r>
-            <a:r>
-              <a:rPr lang="fa-IR" dirty="0" smtClean="0"/>
-              <a:t>ندی و </a:t>
-            </a:r>
-            <a:r>
-              <a:rPr lang="en-US" dirty="0" smtClean="0"/>
+              <a:t>زمانبندی و </a:t>
+            </a:r>
+            <a:r>
+              <a:rPr lang="en-US" dirty="0"/>
               <a:t>DFG</a:t>
             </a:r>
-            <a:endParaRPr lang="en-US" dirty="0"/>
           </a:p>
         </p:txBody>
       </p:sp>
@@ -17094,44 +16768,44 @@
           <a:lstStyle/>
           <a:p>
             <a:r>
-              <a:rPr lang="fa-IR" dirty="0" smtClean="0"/>
+              <a:rPr lang="fa-IR" dirty="0"/>
               <a:t>زمانبندی:</a:t>
             </a:r>
           </a:p>
           <a:p>
             <a:pPr lvl="1"/>
             <a:r>
-              <a:rPr lang="fa-IR" smtClean="0"/>
+              <a:rPr lang="fa-IR"/>
               <a:t>در طراحی </a:t>
             </a:r>
             <a:r>
-              <a:rPr lang="en-US" smtClean="0"/>
+              <a:rPr lang="en-US"/>
               <a:t>RTL</a:t>
             </a:r>
             <a:r>
-              <a:rPr lang="fa-IR" smtClean="0"/>
+              <a:rPr lang="fa-IR"/>
               <a:t>، طراح دستی زمانبندی می‌کند.</a:t>
             </a:r>
           </a:p>
           <a:p>
             <a:pPr lvl="1"/>
             <a:r>
-              <a:rPr lang="fa-IR" smtClean="0"/>
+              <a:rPr lang="fa-IR"/>
               <a:t>ابزار </a:t>
             </a:r>
             <a:r>
-              <a:rPr lang="en-US" smtClean="0"/>
+              <a:rPr lang="en-US"/>
               <a:t>HLS</a:t>
             </a:r>
             <a:r>
-              <a:rPr lang="fa-IR" smtClean="0"/>
+              <a:rPr lang="fa-IR"/>
               <a:t> وابستگی های بین عملیات مجاور را تحلیل می‌کند.</a:t>
             </a:r>
           </a:p>
           <a:p>
             <a:pPr lvl="2"/>
             <a:r>
-              <a:rPr lang="fa-IR" smtClean="0">
+              <a:rPr lang="fa-IR">
                 <a:sym typeface="Wingdings" panose="05000000000000000000" pitchFamily="2" charset="2"/>
               </a:rPr>
               <a:t> امکان موازی‌سازی عملیات در یک کلاک را بررسی می‌کند.</a:t>
@@ -17146,25 +16820,25 @@
           <a:p>
             <a:pPr lvl="1"/>
             <a:r>
-              <a:rPr lang="fa-IR" smtClean="0">
+              <a:rPr lang="fa-IR">
                 <a:sym typeface="Wingdings" panose="05000000000000000000" pitchFamily="2" charset="2"/>
               </a:rPr>
               <a:t>اگر طراح </a:t>
             </a:r>
             <a:r>
-              <a:rPr lang="en-US" smtClean="0">
+              <a:rPr lang="en-US">
                 <a:sym typeface="Wingdings" panose="05000000000000000000" pitchFamily="2" charset="2"/>
               </a:rPr>
               <a:t>T</a:t>
             </a:r>
             <a:r>
-              <a:rPr lang="en-US" baseline="-25000" smtClean="0">
+              <a:rPr lang="en-US" baseline="-25000">
                 <a:sym typeface="Wingdings" panose="05000000000000000000" pitchFamily="2" charset="2"/>
               </a:rPr>
               <a:t>clk</a:t>
             </a:r>
             <a:r>
-              <a:rPr lang="fa-IR" smtClean="0">
+              <a:rPr lang="fa-IR">
                 <a:sym typeface="Wingdings" panose="05000000000000000000" pitchFamily="2" charset="2"/>
               </a:rPr>
               <a:t> را بزرگ بدهد  عملیات بیشتری می‌تواند در یک سیکل انجام شود.</a:t>
@@ -17173,19 +16847,19 @@
           <a:p>
             <a:pPr lvl="1"/>
             <a:r>
-              <a:rPr lang="fa-IR" smtClean="0">
+              <a:rPr lang="fa-IR">
                 <a:sym typeface="Wingdings" panose="05000000000000000000" pitchFamily="2" charset="2"/>
               </a:rPr>
               <a:t>اگرکوچک بدهد  ابزار </a:t>
             </a:r>
             <a:r>
-              <a:rPr lang="en-US" smtClean="0">
+              <a:rPr lang="en-US">
                 <a:sym typeface="Wingdings" panose="05000000000000000000" pitchFamily="2" charset="2"/>
               </a:rPr>
               <a:t>HLS</a:t>
             </a:r>
             <a:r>
-              <a:rPr lang="fa-IR" smtClean="0">
+              <a:rPr lang="fa-IR">
                 <a:sym typeface="Wingdings" panose="05000000000000000000" pitchFamily="2" charset="2"/>
               </a:rPr>
               <a:t> به طور خودکار عملیات را برای چند سیکل زمانبندی می‌کند.</a:t>
@@ -17194,16 +16868,16 @@
           <a:p>
             <a:pPr lvl="2"/>
             <a:r>
-              <a:rPr lang="fa-IR" smtClean="0">
+              <a:rPr lang="fa-IR">
                 <a:sym typeface="Wingdings" panose="05000000000000000000" pitchFamily="2" charset="2"/>
               </a:rPr>
               <a:t>بعضی عملیات ممکن است با منابع چندسیکلی پیاده‌سازی شوند.</a:t>
             </a:r>
-            <a:endParaRPr lang="fa-IR" dirty="0" smtClean="0"/>
+            <a:endParaRPr lang="fa-IR" dirty="0"/>
           </a:p>
           <a:p>
             <a:pPr lvl="1"/>
-            <a:endParaRPr lang="fa-IR" dirty="0" smtClean="0"/>
+            <a:endParaRPr lang="fa-IR" dirty="0"/>
           </a:p>
         </p:txBody>
       </p:sp>
@@ -17372,13 +17046,6 @@
   <p:clrMapOvr>
     <a:masterClrMapping/>
   </p:clrMapOvr>
-  <p:timing>
-    <p:tnLst>
-      <p:par>
-        <p:cTn id="1" dur="indefinite" restart="never" nodeType="tmRoot"/>
-      </p:par>
-    </p:tnLst>
-  </p:timing>
 </p:sld>
 </file>
 
@@ -17416,18 +17083,18 @@
           <a:p>
             <a:pPr rtl="1"/>
             <a:r>
-              <a:rPr lang="fa-IR" altLang="en-US" smtClean="0"/>
+              <a:rPr lang="fa-IR" altLang="en-US"/>
               <a:t>سطوح تجرید (</a:t>
             </a:r>
             <a:r>
-              <a:rPr lang="en-US" altLang="en-US" smtClean="0"/>
+              <a:rPr lang="en-US" altLang="en-US"/>
               <a:t>Levels of Abstraction</a:t>
             </a:r>
             <a:r>
-              <a:rPr lang="fa-IR" altLang="en-US" smtClean="0"/>
+              <a:rPr lang="fa-IR" altLang="en-US"/>
               <a:t>)</a:t>
             </a:r>
-            <a:endParaRPr lang="en-US" altLang="en-US" smtClean="0"/>
+            <a:endParaRPr lang="en-US" altLang="en-US"/>
           </a:p>
         </p:txBody>
       </p:sp>
@@ -17452,51 +17119,51 @@
           <a:lstStyle/>
           <a:p>
             <a:r>
-              <a:rPr lang="fa-IR" altLang="en-US" dirty="0" smtClean="0"/>
+              <a:rPr lang="fa-IR" altLang="en-US" dirty="0"/>
               <a:t>رفتاری:</a:t>
             </a:r>
-            <a:endParaRPr lang="en-US" altLang="en-US" dirty="0" smtClean="0"/>
+            <a:endParaRPr lang="en-US" altLang="en-US" dirty="0"/>
           </a:p>
           <a:p>
             <a:pPr lvl="2"/>
             <a:r>
-              <a:rPr lang="fa-IR" altLang="en-US" dirty="0" smtClean="0"/>
+              <a:rPr lang="fa-IR" altLang="en-US" dirty="0"/>
               <a:t> توصیف عملکرد مطلوب (الگوریتمی)</a:t>
             </a:r>
           </a:p>
           <a:p>
             <a:pPr lvl="2"/>
             <a:r>
-              <a:rPr lang="fa-IR" altLang="en-US" dirty="0" smtClean="0"/>
+              <a:rPr lang="fa-IR" altLang="en-US" dirty="0"/>
               <a:t> بدون پرداختن به مدار</a:t>
             </a:r>
           </a:p>
           <a:p>
             <a:pPr lvl="2"/>
             <a:r>
-              <a:rPr lang="fa-IR" altLang="en-US" dirty="0" smtClean="0"/>
+              <a:rPr lang="fa-IR" altLang="en-US" dirty="0"/>
               <a:t> همة امکانات </a:t>
             </a:r>
             <a:r>
-              <a:rPr lang="en-US" altLang="en-US" sz="2800" dirty="0" smtClean="0"/>
+              <a:rPr lang="en-US" altLang="en-US" sz="2800" dirty="0"/>
               <a:t>VHDL</a:t>
             </a:r>
-            <a:endParaRPr lang="fa-IR" altLang="en-US" dirty="0" smtClean="0"/>
+            <a:endParaRPr lang="fa-IR" altLang="en-US" dirty="0"/>
           </a:p>
           <a:p>
             <a:pPr lvl="2"/>
             <a:r>
-              <a:rPr lang="fa-IR" altLang="en-US" dirty="0" smtClean="0"/>
+              <a:rPr lang="fa-IR" altLang="en-US" dirty="0"/>
               <a:t> ترجیح طراحان: </a:t>
             </a:r>
             <a:r>
-              <a:rPr lang="en-US" altLang="en-US" dirty="0" smtClean="0"/>
+              <a:rPr lang="en-US" altLang="en-US" dirty="0"/>
               <a:t>C/C++</a:t>
             </a:r>
           </a:p>
           <a:p>
             <a:pPr lvl="2"/>
-            <a:endParaRPr lang="en-US" altLang="en-US" dirty="0" smtClean="0"/>
+            <a:endParaRPr lang="en-US" altLang="en-US" dirty="0"/>
           </a:p>
         </p:txBody>
       </p:sp>
@@ -17698,7 +17365,7 @@
               </a:pPr>
               <a:t>3</a:t>
             </a:fld>
-            <a:endParaRPr lang="en-US" altLang="en-US" sz="1300" b="0" smtClean="0">
+            <a:endParaRPr lang="en-US" altLang="en-US" sz="1300" b="0">
               <a:solidFill>
                 <a:schemeClr val="tx1"/>
               </a:solidFill>
@@ -17771,13 +17438,6 @@
   <p:clrMapOvr>
     <a:masterClrMapping/>
   </p:clrMapOvr>
-  <p:timing>
-    <p:tnLst>
-      <p:par>
-        <p:cTn id="1" dur="indefinite" restart="never" nodeType="tmRoot"/>
-      </p:par>
-    </p:tnLst>
-  </p:timing>
 </p:sld>
 </file>
 
@@ -17815,7 +17475,7 @@
           <a:p>
             <a:pPr rtl="1"/>
             <a:r>
-              <a:rPr lang="fa-IR" dirty="0" smtClean="0"/>
+              <a:rPr lang="fa-IR" dirty="0"/>
               <a:t>سنتز مدار واسط</a:t>
             </a:r>
             <a:endParaRPr lang="en-US" dirty="0"/>
@@ -17843,77 +17503,77 @@
           <a:lstStyle/>
           <a:p>
             <a:r>
-              <a:rPr lang="fa-IR" dirty="0" smtClean="0"/>
+              <a:rPr lang="fa-IR" dirty="0"/>
               <a:t>درگاه های لازم:</a:t>
             </a:r>
           </a:p>
           <a:p>
             <a:pPr lvl="1"/>
             <a:r>
-              <a:rPr lang="fa-IR" dirty="0" smtClean="0"/>
+              <a:rPr lang="fa-IR" dirty="0"/>
               <a:t>پارامترهای تابع = ورودی ها و خروجی های بلوک</a:t>
             </a:r>
           </a:p>
           <a:p>
             <a:pPr lvl="1"/>
             <a:r>
-              <a:rPr lang="fa-IR" dirty="0" smtClean="0"/>
+              <a:rPr lang="fa-IR" dirty="0"/>
               <a:t>مقدار بازگردانده شده = درگاه خروجی</a:t>
             </a:r>
           </a:p>
           <a:p>
             <a:r>
-              <a:rPr lang="fa-IR" dirty="0" smtClean="0"/>
+              <a:rPr lang="fa-IR" dirty="0"/>
               <a:t>انواع پارامترها:</a:t>
             </a:r>
           </a:p>
           <a:p>
             <a:pPr lvl="1"/>
             <a:r>
-              <a:rPr lang="fa-IR" dirty="0" smtClean="0"/>
+              <a:rPr lang="fa-IR" dirty="0"/>
               <a:t>فراخوانی با مقدار</a:t>
             </a:r>
           </a:p>
           <a:p>
             <a:pPr lvl="2"/>
             <a:r>
-              <a:rPr lang="fa-IR" dirty="0" smtClean="0"/>
+              <a:rPr lang="fa-IR" dirty="0"/>
               <a:t>تابع نمی تواند مقدار پارامتر را تغییر دهد.</a:t>
             </a:r>
           </a:p>
           <a:p>
             <a:pPr lvl="1"/>
             <a:r>
-              <a:rPr lang="fa-IR" dirty="0" smtClean="0"/>
+              <a:rPr lang="fa-IR" dirty="0"/>
               <a:t>فراخوانی با ارجاع</a:t>
             </a:r>
           </a:p>
           <a:p>
             <a:pPr lvl="2"/>
             <a:r>
-              <a:rPr lang="fa-IR" dirty="0" smtClean="0"/>
+              <a:rPr lang="fa-IR" dirty="0"/>
               <a:t>آدرس پارامتر به بلوک سخت افزاری رد می شود.</a:t>
             </a:r>
           </a:p>
           <a:p>
             <a:pPr lvl="2"/>
-            <a:endParaRPr lang="fa-IR" dirty="0" smtClean="0"/>
+            <a:endParaRPr lang="fa-IR" dirty="0"/>
           </a:p>
           <a:p>
             <a:pPr lvl="2"/>
-            <a:endParaRPr lang="fa-IR" dirty="0" smtClean="0"/>
+            <a:endParaRPr lang="fa-IR" dirty="0"/>
           </a:p>
           <a:p>
             <a:pPr lvl="1"/>
-            <a:endParaRPr lang="fa-IR" dirty="0" smtClean="0"/>
+            <a:endParaRPr lang="fa-IR" dirty="0"/>
           </a:p>
           <a:p>
             <a:pPr lvl="2"/>
-            <a:endParaRPr lang="fa-IR" dirty="0" smtClean="0"/>
+            <a:endParaRPr lang="fa-IR" dirty="0"/>
           </a:p>
           <a:p>
             <a:pPr lvl="1"/>
-            <a:endParaRPr lang="fa-IR" dirty="0" smtClean="0"/>
+            <a:endParaRPr lang="fa-IR" dirty="0"/>
           </a:p>
           <a:p>
             <a:pPr lvl="1"/>
@@ -17966,13 +17626,6 @@
   <p:clrMapOvr>
     <a:masterClrMapping/>
   </p:clrMapOvr>
-  <p:timing>
-    <p:tnLst>
-      <p:par>
-        <p:cTn id="1" dur="indefinite" restart="never" nodeType="tmRoot"/>
-      </p:par>
-    </p:tnLst>
-  </p:timing>
 </p:sld>
 </file>
 
@@ -18010,7 +17663,7 @@
           <a:p>
             <a:pPr rtl="1"/>
             <a:r>
-              <a:rPr lang="fa-IR" dirty="0" smtClean="0"/>
+              <a:rPr lang="fa-IR" dirty="0"/>
               <a:t>سنتز مدار واسط</a:t>
             </a:r>
             <a:endParaRPr lang="en-US" dirty="0"/>
@@ -18038,23 +17691,23 @@
           <a:lstStyle/>
           <a:p>
             <a:r>
-              <a:rPr lang="fa-IR" smtClean="0"/>
+              <a:rPr lang="fa-IR"/>
               <a:t>انواع درگاه ها در ویوادو:</a:t>
             </a:r>
-            <a:endParaRPr lang="fa-IR" dirty="0" smtClean="0"/>
+            <a:endParaRPr lang="fa-IR" dirty="0"/>
           </a:p>
           <a:p>
             <a:pPr lvl="1"/>
             <a:r>
-              <a:rPr lang="en-US" smtClean="0"/>
+              <a:rPr lang="en-US"/>
               <a:t>ap_none</a:t>
             </a:r>
-            <a:endParaRPr lang="fa-IR" smtClean="0"/>
+            <a:endParaRPr lang="fa-IR"/>
           </a:p>
           <a:p>
             <a:pPr lvl="2"/>
             <a:r>
-              <a:rPr lang="fa-IR" smtClean="0"/>
+              <a:rPr lang="fa-IR"/>
               <a:t>درگاه ساده (بدون خط اضافه)</a:t>
             </a:r>
           </a:p>
@@ -18062,107 +17715,103 @@
             <a:pPr lvl="2"/>
             <a:r>
               <a:rPr lang="fa-IR"/>
+              <a:t> ماژولی که داده را به او می دهد باید در زمان مناسب بدهد.</a:t>
+            </a:r>
+          </a:p>
+          <a:p>
+            <a:pPr lvl="2"/>
+            <a:r>
+              <a:rPr lang="fa-IR"/>
+              <a:t>پیش فرض برای پارامترهای ورودی فراخوانی با مقدار و نیمه ورودی پارامترهای فراخوانی با ارجاع</a:t>
+            </a:r>
+          </a:p>
+          <a:p>
+            <a:pPr lvl="1"/>
+            <a:r>
+              <a:rPr lang="en-US"/>
+              <a:t>ap_ctrl_hs</a:t>
+            </a:r>
+            <a:endParaRPr lang="fa-IR"/>
+          </a:p>
+          <a:p>
+            <a:pPr lvl="2"/>
+            <a:r>
+              <a:rPr lang="fa-IR"/>
+              <a:t>دستدهی (</a:t>
+            </a:r>
+            <a:r>
+              <a:rPr lang="en-US"/>
+              <a:t>handshaking</a:t>
+            </a:r>
+            <a:r>
+              <a:rPr lang="fa-IR"/>
+              <a:t>): خطوط اضافه اسلاید بعد</a:t>
+            </a:r>
+          </a:p>
+          <a:p>
+            <a:pPr lvl="2"/>
+            <a:r>
+              <a:rPr lang="en-US"/>
               <a:t> </a:t>
             </a:r>
             <a:r>
-              <a:rPr lang="fa-IR" smtClean="0"/>
-              <a:t>ماژولی که داده را به او می دهد باید در زمان مناسب بدهد.</a:t>
-            </a:r>
+              <a:rPr lang="fa-IR"/>
+              <a:t>پیش فرض برای مقدار بازگردانده شده</a:t>
+            </a:r>
+          </a:p>
+          <a:p>
+            <a:pPr lvl="1"/>
+            <a:r>
+              <a:rPr lang="en-US"/>
+              <a:t>ap_vld</a:t>
+            </a:r>
+            <a:endParaRPr lang="fa-IR"/>
           </a:p>
           <a:p>
             <a:pPr lvl="2"/>
             <a:r>
-              <a:rPr lang="fa-IR" smtClean="0"/>
-              <a:t>پیش فرض برای پارامترهای ورودی فراخوانی با مقدار و نیمه ورودی پارامترهای فراخوانی با ارجاع</a:t>
-            </a:r>
+              <a:rPr lang="fa-IR"/>
+              <a:t>پیش فرض برای نیمه خروجی پارامترهای فراخوانی با ارجاع</a:t>
+            </a:r>
+          </a:p>
+          <a:p>
+            <a:pPr lvl="2"/>
+            <a:r>
+              <a:rPr lang="fa-IR"/>
+              <a:t>خط اضافه: </a:t>
+            </a:r>
+            <a:r>
+              <a:rPr lang="en-US"/>
+              <a:t>valid</a:t>
+            </a:r>
+            <a:r>
+              <a:rPr lang="fa-IR"/>
+              <a:t> برای اعلان آماده بودن داده پس از محاسبات</a:t>
+            </a:r>
+          </a:p>
+          <a:p>
+            <a:pPr lvl="2"/>
+            <a:endParaRPr lang="fa-IR"/>
           </a:p>
           <a:p>
             <a:pPr lvl="1"/>
-            <a:r>
-              <a:rPr lang="en-US" smtClean="0"/>
-              <a:t>ap_ctrl_hs</a:t>
-            </a:r>
-            <a:endParaRPr lang="fa-IR" smtClean="0"/>
+            <a:endParaRPr lang="fa-IR" dirty="0"/>
           </a:p>
           <a:p>
             <a:pPr lvl="2"/>
-            <a:r>
-              <a:rPr lang="fa-IR" smtClean="0"/>
-              <a:t>دستدهی (</a:t>
-            </a:r>
-            <a:r>
-              <a:rPr lang="en-US" smtClean="0"/>
-              <a:t>handshaking</a:t>
-            </a:r>
-            <a:r>
-              <a:rPr lang="fa-IR" smtClean="0"/>
-              <a:t>): خطوط اضافه اسلاید بعد</a:t>
-            </a:r>
+            <a:endParaRPr lang="fa-IR" dirty="0"/>
+          </a:p>
+          <a:p>
+            <a:pPr lvl="1"/>
+            <a:endParaRPr lang="fa-IR" dirty="0"/>
           </a:p>
           <a:p>
             <a:pPr lvl="2"/>
-            <a:r>
-              <a:rPr lang="en-US" smtClean="0"/>
-              <a:t> </a:t>
-            </a:r>
-            <a:r>
-              <a:rPr lang="fa-IR" smtClean="0"/>
-              <a:t>پیش فرض برای مقدار بازگردانده شده</a:t>
-            </a:r>
+            <a:endParaRPr lang="fa-IR" dirty="0"/>
           </a:p>
           <a:p>
             <a:pPr lvl="1"/>
-            <a:r>
-              <a:rPr lang="en-US" smtClean="0"/>
-              <a:t>ap_vld</a:t>
-            </a:r>
-            <a:endParaRPr lang="fa-IR" smtClean="0"/>
-          </a:p>
-          <a:p>
-            <a:pPr lvl="2"/>
-            <a:r>
-              <a:rPr lang="fa-IR" smtClean="0"/>
-              <a:t>پیش فرض برای نیمه خروجی پارامترهای فراخوانی با ارجاع</a:t>
-            </a:r>
-          </a:p>
-          <a:p>
-            <a:pPr lvl="2"/>
-            <a:r>
-              <a:rPr lang="fa-IR" smtClean="0"/>
-              <a:t>خط اضافه: </a:t>
-            </a:r>
-            <a:r>
-              <a:rPr lang="en-US" smtClean="0"/>
-              <a:t>valid</a:t>
-            </a:r>
-            <a:r>
-              <a:rPr lang="fa-IR" smtClean="0"/>
-              <a:t> برای اعلان آماده بودن داده پس از محاسبات</a:t>
-            </a:r>
-          </a:p>
-          <a:p>
-            <a:pPr lvl="2"/>
-            <a:endParaRPr lang="fa-IR" smtClean="0"/>
-          </a:p>
-          <a:p>
-            <a:pPr lvl="1"/>
-            <a:endParaRPr lang="fa-IR" dirty="0" smtClean="0"/>
-          </a:p>
-          <a:p>
-            <a:pPr lvl="2"/>
-            <a:endParaRPr lang="fa-IR" dirty="0" smtClean="0"/>
-          </a:p>
-          <a:p>
-            <a:pPr lvl="1"/>
-            <a:endParaRPr lang="fa-IR" dirty="0" smtClean="0"/>
-          </a:p>
-          <a:p>
-            <a:pPr lvl="2"/>
-            <a:endParaRPr lang="fa-IR" dirty="0" smtClean="0"/>
-          </a:p>
-          <a:p>
-            <a:pPr lvl="1"/>
-            <a:endParaRPr lang="fa-IR" dirty="0" smtClean="0"/>
+            <a:endParaRPr lang="fa-IR" dirty="0"/>
           </a:p>
           <a:p>
             <a:pPr lvl="1"/>
@@ -18215,13 +17864,6 @@
   <p:clrMapOvr>
     <a:masterClrMapping/>
   </p:clrMapOvr>
-  <p:timing>
-    <p:tnLst>
-      <p:par>
-        <p:cTn id="1" dur="indefinite" restart="never" nodeType="tmRoot"/>
-      </p:par>
-    </p:tnLst>
-  </p:timing>
 </p:sld>
 </file>
 
@@ -18259,7 +17901,7 @@
           <a:p>
             <a:pPr rtl="1"/>
             <a:r>
-              <a:rPr lang="fa-IR" dirty="0" smtClean="0"/>
+              <a:rPr lang="fa-IR" dirty="0"/>
               <a:t>سنتز مدار واسط</a:t>
             </a:r>
             <a:endParaRPr lang="en-US" dirty="0"/>
@@ -18287,116 +17929,116 @@
           <a:lstStyle/>
           <a:p>
             <a:r>
-              <a:rPr lang="fa-IR" smtClean="0"/>
+              <a:rPr lang="fa-IR"/>
               <a:t>انواع درگاه ها در ویوادو:</a:t>
             </a:r>
-            <a:endParaRPr lang="fa-IR" dirty="0" smtClean="0"/>
+            <a:endParaRPr lang="fa-IR" dirty="0"/>
           </a:p>
           <a:p>
             <a:pPr lvl="1"/>
             <a:r>
-              <a:rPr lang="en-US" smtClean="0"/>
+              <a:rPr lang="en-US"/>
               <a:t>ap_memory</a:t>
             </a:r>
-            <a:endParaRPr lang="fa-IR" smtClean="0"/>
+            <a:endParaRPr lang="fa-IR"/>
           </a:p>
           <a:p>
             <a:pPr lvl="2"/>
             <a:r>
-              <a:rPr lang="fa-IR" smtClean="0"/>
+              <a:rPr lang="fa-IR"/>
               <a:t>پیش فرض برای پارامتر آرایه</a:t>
             </a:r>
           </a:p>
           <a:p>
             <a:pPr lvl="2"/>
             <a:r>
-              <a:rPr lang="fa-IR" smtClean="0"/>
+              <a:rPr lang="fa-IR"/>
               <a:t>خطوط:</a:t>
             </a:r>
           </a:p>
           <a:p>
             <a:pPr lvl="3"/>
             <a:r>
-              <a:rPr lang="fa-IR" sz="2400" smtClean="0"/>
+              <a:rPr lang="fa-IR" sz="2400"/>
               <a:t>داده برای خود پارامتر</a:t>
             </a:r>
           </a:p>
           <a:p>
             <a:pPr lvl="3"/>
             <a:r>
-              <a:rPr lang="fa-IR" sz="2400" smtClean="0"/>
+              <a:rPr lang="fa-IR" sz="2400"/>
               <a:t>آدرس</a:t>
             </a:r>
           </a:p>
           <a:p>
             <a:pPr lvl="3"/>
             <a:r>
-              <a:rPr lang="en-US" sz="2400" smtClean="0"/>
+              <a:rPr lang="en-US" sz="2400"/>
               <a:t>ce</a:t>
             </a:r>
             <a:r>
-              <a:rPr lang="fa-IR" sz="2400" smtClean="0"/>
+              <a:rPr lang="fa-IR" sz="2400"/>
               <a:t> برای پارامتر ورودی</a:t>
             </a:r>
           </a:p>
           <a:p>
             <a:pPr lvl="3"/>
             <a:r>
-              <a:rPr lang="en-US" sz="2400" smtClean="0"/>
+              <a:rPr lang="en-US" sz="2400"/>
               <a:t>we</a:t>
             </a:r>
             <a:r>
-              <a:rPr lang="fa-IR" sz="2400" smtClean="0"/>
+              <a:rPr lang="fa-IR" sz="2400"/>
               <a:t> برای پارامتر خروجی</a:t>
             </a:r>
           </a:p>
           <a:p>
             <a:pPr lvl="1"/>
             <a:r>
-              <a:rPr lang="en-US" sz="3200" smtClean="0"/>
+              <a:rPr lang="en-US" sz="3200"/>
               <a:t>ap_fifo</a:t>
             </a:r>
-            <a:endParaRPr lang="fa-IR" sz="3200" smtClean="0"/>
+            <a:endParaRPr lang="fa-IR" sz="3200"/>
           </a:p>
           <a:p>
             <a:pPr lvl="1"/>
             <a:r>
-              <a:rPr lang="en-US" sz="3200" smtClean="0"/>
+              <a:rPr lang="en-US" sz="3200"/>
               <a:t>ap_bus</a:t>
             </a:r>
-            <a:endParaRPr lang="fa-IR" sz="3200" smtClean="0"/>
+            <a:endParaRPr lang="fa-IR" sz="3200"/>
           </a:p>
           <a:p>
             <a:pPr lvl="1"/>
             <a:r>
-              <a:rPr lang="en-US" sz="3200" smtClean="0"/>
+              <a:rPr lang="en-US" sz="3200"/>
               <a:t>s_axilite</a:t>
             </a:r>
-            <a:endParaRPr lang="fa-IR" sz="3200" smtClean="0"/>
+            <a:endParaRPr lang="fa-IR" sz="3200"/>
           </a:p>
           <a:p>
             <a:pPr lvl="2"/>
-            <a:endParaRPr lang="fa-IR" smtClean="0"/>
+            <a:endParaRPr lang="fa-IR"/>
           </a:p>
           <a:p>
             <a:pPr lvl="1"/>
-            <a:endParaRPr lang="fa-IR" dirty="0" smtClean="0"/>
+            <a:endParaRPr lang="fa-IR" dirty="0"/>
           </a:p>
           <a:p>
             <a:pPr lvl="2"/>
-            <a:endParaRPr lang="fa-IR" dirty="0" smtClean="0"/>
+            <a:endParaRPr lang="fa-IR" dirty="0"/>
           </a:p>
           <a:p>
             <a:pPr lvl="1"/>
-            <a:endParaRPr lang="fa-IR" dirty="0" smtClean="0"/>
+            <a:endParaRPr lang="fa-IR" dirty="0"/>
           </a:p>
           <a:p>
             <a:pPr lvl="2"/>
-            <a:endParaRPr lang="fa-IR" dirty="0" smtClean="0"/>
+            <a:endParaRPr lang="fa-IR" dirty="0"/>
           </a:p>
           <a:p>
             <a:pPr lvl="1"/>
-            <a:endParaRPr lang="fa-IR" dirty="0" smtClean="0"/>
+            <a:endParaRPr lang="fa-IR" dirty="0"/>
           </a:p>
           <a:p>
             <a:pPr lvl="1"/>
@@ -18491,27 +18133,7 @@
                 <a:latin typeface="Arial"/>
                 <a:cs typeface="B Mitra" pitchFamily="2" charset="-78"/>
               </a:rPr>
-              <a:t>قابل </a:t>
-            </a:r>
-            <a:r>
-              <a:rPr lang="fa-IR" sz="3200" b="1" kern="0" smtClean="0">
-                <a:solidFill>
-                  <a:srgbClr val="FF5050"/>
-                </a:solidFill>
-                <a:latin typeface="Arial"/>
-                <a:cs typeface="B Mitra" pitchFamily="2" charset="-78"/>
-              </a:rPr>
-              <a:t>تعیین </a:t>
-            </a:r>
-            <a:r>
-              <a:rPr lang="fa-IR" sz="3200" b="1" kern="0">
-                <a:solidFill>
-                  <a:srgbClr val="FF5050"/>
-                </a:solidFill>
-                <a:latin typeface="Arial"/>
-                <a:cs typeface="B Mitra" pitchFamily="2" charset="-78"/>
-              </a:rPr>
-              <a:t>با پراگما در کد یا در ابزار</a:t>
+              <a:t>قابل تعیین با پراگما در کد یا در ابزار</a:t>
             </a:r>
           </a:p>
         </p:txBody>
@@ -18526,13 +18148,6 @@
   <p:clrMapOvr>
     <a:masterClrMapping/>
   </p:clrMapOvr>
-  <p:timing>
-    <p:tnLst>
-      <p:par>
-        <p:cTn id="1" dur="indefinite" restart="never" nodeType="tmRoot"/>
-      </p:par>
-    </p:tnLst>
-  </p:timing>
 </p:sld>
 </file>
 
@@ -18570,7 +18185,7 @@
           <a:p>
             <a:pPr rtl="1"/>
             <a:r>
-              <a:rPr lang="fa-IR" dirty="0" smtClean="0"/>
+              <a:rPr lang="fa-IR" dirty="0"/>
               <a:t>سنتز مدار واسط</a:t>
             </a:r>
             <a:endParaRPr lang="en-US" dirty="0"/>
@@ -18598,124 +18213,108 @@
           <a:lstStyle/>
           <a:p>
             <a:r>
-              <a:rPr lang="fa-IR" sz="2800" dirty="0" smtClean="0"/>
+              <a:rPr lang="fa-IR" sz="2800" dirty="0"/>
               <a:t>درگاه </a:t>
             </a:r>
             <a:r>
-              <a:rPr lang="fa-IR" sz="2800" smtClean="0"/>
+              <a:rPr lang="fa-IR" sz="2800"/>
               <a:t>های </a:t>
             </a:r>
             <a:r>
-              <a:rPr lang="en-US" sz="2800" smtClean="0"/>
+              <a:rPr lang="en-US" sz="2800"/>
               <a:t>ap_ctrl_hs</a:t>
             </a:r>
             <a:r>
-              <a:rPr lang="fa-IR" sz="2800" smtClean="0"/>
+              <a:rPr lang="fa-IR" sz="2800"/>
               <a:t>:</a:t>
             </a:r>
-            <a:endParaRPr lang="fa-IR" sz="2800" dirty="0" smtClean="0"/>
+            <a:endParaRPr lang="fa-IR" sz="2800" dirty="0"/>
           </a:p>
           <a:p>
             <a:pPr lvl="1"/>
             <a:r>
-              <a:rPr lang="en-US" sz="2400" dirty="0" smtClean="0"/>
+              <a:rPr lang="en-US" sz="2400" dirty="0"/>
               <a:t>start</a:t>
             </a:r>
             <a:r>
-              <a:rPr lang="fa-IR" sz="2400" dirty="0" smtClean="0"/>
+              <a:rPr lang="fa-IR" sz="2400" dirty="0"/>
               <a:t> (ورودی):</a:t>
             </a:r>
           </a:p>
           <a:p>
             <a:pPr lvl="2"/>
             <a:r>
-              <a:rPr lang="fa-IR" sz="2000" dirty="0" smtClean="0"/>
+              <a:rPr lang="fa-IR" sz="2000" dirty="0"/>
               <a:t>فعال شدن </a:t>
             </a:r>
             <a:r>
-              <a:rPr lang="en-US" sz="2000" dirty="0" smtClean="0"/>
+              <a:rPr lang="en-US" sz="2000" dirty="0"/>
               <a:t>start</a:t>
             </a:r>
             <a:r>
-              <a:rPr lang="fa-IR" sz="2000" dirty="0" smtClean="0"/>
+              <a:rPr lang="fa-IR" sz="2000" dirty="0"/>
               <a:t> </a:t>
             </a:r>
             <a:r>
-              <a:rPr lang="fa-IR" sz="2000" dirty="0" smtClean="0">
+              <a:rPr lang="fa-IR" sz="2000" dirty="0">
                 <a:sym typeface="Wingdings" panose="05000000000000000000" pitchFamily="2" charset="2"/>
               </a:rPr>
               <a:t> </a:t>
             </a:r>
             <a:r>
-              <a:rPr lang="fa-IR" sz="2000" dirty="0" smtClean="0"/>
-              <a:t>بلوک </a:t>
-            </a:r>
-            <a:r>
               <a:rPr lang="fa-IR" sz="2000" dirty="0"/>
-              <a:t>اجازه می­یابد که عملیات تابع را آغاز </a:t>
-            </a:r>
-            <a:r>
-              <a:rPr lang="fa-IR" sz="2000" dirty="0" smtClean="0"/>
-              <a:t>کند.</a:t>
+              <a:t>بلوک اجازه می­یابد که عملیات تابع را آغاز کند.</a:t>
             </a:r>
           </a:p>
           <a:p>
             <a:pPr lvl="1"/>
             <a:r>
-              <a:rPr lang="en-US" sz="2400" dirty="0" smtClean="0"/>
+              <a:rPr lang="en-US" sz="2400" dirty="0"/>
               <a:t>done</a:t>
             </a:r>
             <a:r>
-              <a:rPr lang="fa-IR" sz="2400" dirty="0" smtClean="0"/>
+              <a:rPr lang="fa-IR" sz="2400" dirty="0"/>
               <a:t> (خروجی):</a:t>
             </a:r>
           </a:p>
           <a:p>
             <a:pPr lvl="2"/>
             <a:r>
-              <a:rPr lang="fa-IR" sz="2000" dirty="0" smtClean="0"/>
-              <a:t>وقتی بلوک </a:t>
-            </a:r>
-            <a:r>
               <a:rPr lang="fa-IR" sz="2000" dirty="0"/>
-              <a:t>کار خود را به پایان می­رساند، این سیگنال را فعال </a:t>
-            </a:r>
-            <a:r>
-              <a:rPr lang="fa-IR" sz="2000" dirty="0" smtClean="0"/>
-              <a:t>می­کند.</a:t>
+              <a:t>وقتی بلوک کار خود را به پایان می­رساند، این سیگنال را فعال می­کند.</a:t>
             </a:r>
           </a:p>
           <a:p>
             <a:pPr lvl="2"/>
             <a:r>
-              <a:rPr lang="fa-IR" sz="2000" smtClean="0"/>
+              <a:rPr lang="fa-IR" sz="2000"/>
               <a:t>و نیز </a:t>
             </a:r>
             <a:r>
-              <a:rPr lang="fa-IR" sz="2000" dirty="0" smtClean="0"/>
+              <a:rPr lang="fa-IR" sz="2000" dirty="0"/>
               <a:t>بیانگر معتبر بودن داده روی </a:t>
             </a:r>
             <a:r>
-              <a:rPr lang="en-US" sz="1800" dirty="0" err="1" smtClean="0"/>
+              <a:rPr lang="en-US" sz="1800" dirty="0" err="1"/>
               <a:t>Return_val</a:t>
             </a:r>
             <a:r>
-              <a:rPr lang="fa-IR" sz="1800" dirty="0" smtClean="0"/>
+              <a:rPr lang="fa-IR" sz="1800" dirty="0"/>
               <a:t> </a:t>
             </a:r>
             <a:r>
-              <a:rPr lang="fa-IR" sz="2000" dirty="0" smtClean="0"/>
+              <a:rPr lang="fa-IR" sz="2000" dirty="0"/>
               <a:t>است.</a:t>
             </a:r>
           </a:p>
           <a:p>
             <a:pPr lvl="1"/>
             <a:r>
-              <a:rPr lang="en-US" sz="2400" dirty="0" smtClean="0"/>
+              <a:rPr lang="en-US" sz="2400" dirty="0"/>
               <a:t>ready</a:t>
             </a:r>
             <a:r>
-              <a:rPr lang="fa-IR" sz="2400" dirty="0" smtClean="0"/>
+              <a:rPr lang="fa-IR" sz="2400" dirty="0"/>
               <a:t> (خروجی):</a:t>
             </a:r>
           </a:p>
@@ -18723,21 +18322,17 @@
             <a:pPr lvl="2"/>
             <a:r>
               <a:rPr lang="fa-IR" sz="2000" dirty="0"/>
-              <a:t>بلوک با فعال کردن این سیگنال، به سایر اجزای سیستم اطلاع می­دهد که آمادة دریافت دادة </a:t>
-            </a:r>
-            <a:r>
-              <a:rPr lang="fa-IR" sz="2000" dirty="0" smtClean="0"/>
-              <a:t>جدید درکلاک بعدی است.</a:t>
+              <a:t>بلوک با فعال کردن این سیگنال، به سایر اجزای سیستم اطلاع می­دهد که آمادة دریافت دادة جدید درکلاک بعدی است.</a:t>
             </a:r>
           </a:p>
           <a:p>
             <a:pPr lvl="1"/>
             <a:r>
-              <a:rPr lang="en-US" sz="2400" dirty="0" smtClean="0"/>
+              <a:rPr lang="en-US" sz="2400" dirty="0"/>
               <a:t>idle</a:t>
             </a:r>
             <a:r>
-              <a:rPr lang="fa-IR" sz="2400" dirty="0" smtClean="0"/>
+              <a:rPr lang="fa-IR" sz="2400" dirty="0"/>
               <a:t> (خروجی):</a:t>
             </a:r>
           </a:p>
@@ -18745,24 +18340,20 @@
             <a:pPr lvl="2"/>
             <a:r>
               <a:rPr lang="fa-IR" sz="2000" dirty="0"/>
-              <a:t>بلوک در بازه­های زمانی که بیکار است، این سیگنال را فعال </a:t>
-            </a:r>
-            <a:r>
-              <a:rPr lang="fa-IR" sz="2000" dirty="0" smtClean="0"/>
-              <a:t>می­کند.</a:t>
+              <a:t>بلوک در بازه­های زمانی که بیکار است، این سیگنال را فعال می­کند.</a:t>
             </a:r>
           </a:p>
           <a:p>
             <a:pPr lvl="2"/>
             <a:r>
-              <a:rPr lang="fa-IR" sz="2000" dirty="0" smtClean="0"/>
+              <a:rPr lang="fa-IR" sz="2000" dirty="0"/>
               <a:t>وقتی که شروع به کار می کند، صفر می‌شود و وقتی که کار تمام می‌شود، یک </a:t>
             </a:r>
             <a:r>
-              <a:rPr lang="fa-IR" sz="2000" smtClean="0"/>
+              <a:rPr lang="fa-IR" sz="2000"/>
               <a:t>می‌شود.</a:t>
             </a:r>
-            <a:endParaRPr lang="fa-IR" sz="2000" dirty="0" smtClean="0"/>
+            <a:endParaRPr lang="fa-IR" sz="2000" dirty="0"/>
           </a:p>
         </p:txBody>
       </p:sp>
@@ -18850,7 +18441,7 @@
               <a:buNone/>
               <a:tabLst/>
             </a:pPr>
-            <a:endParaRPr lang="en-US" dirty="0" smtClean="0">
+            <a:endParaRPr lang="en-US" dirty="0">
               <a:ln w="19050">
                 <a:solidFill>
                   <a:schemeClr val="tx1"/>
@@ -18914,7 +18505,7 @@
               <a:tabLst/>
             </a:pPr>
             <a:r>
-              <a:rPr lang="fa-IR" dirty="0" smtClean="0">
+              <a:rPr lang="fa-IR" dirty="0">
                 <a:ln w="19050">
                   <a:solidFill>
                     <a:schemeClr val="tx1"/>
@@ -18924,7 +18515,7 @@
               </a:rPr>
               <a:t>مدار محاسباتی</a:t>
             </a:r>
-            <a:endParaRPr lang="en-US" dirty="0" smtClean="0">
+            <a:endParaRPr lang="en-US" dirty="0">
               <a:ln w="19050">
                 <a:solidFill>
                   <a:schemeClr val="tx1"/>
@@ -18988,7 +18579,7 @@
               <a:tabLst/>
             </a:pPr>
             <a:r>
-              <a:rPr lang="fa-IR" dirty="0" smtClean="0">
+              <a:rPr lang="fa-IR" dirty="0">
                 <a:ln w="19050">
                   <a:solidFill>
                     <a:schemeClr val="tx1"/>
@@ -18998,7 +18589,7 @@
               </a:rPr>
               <a:t>مدار کنترل واسط</a:t>
             </a:r>
-            <a:endParaRPr lang="en-US" dirty="0" smtClean="0">
+            <a:endParaRPr lang="en-US" dirty="0">
               <a:ln w="19050">
                 <a:solidFill>
                   <a:schemeClr val="tx1"/>
@@ -19125,14 +18716,11 @@
           <a:lstStyle/>
           <a:p>
             <a:r>
-              <a:rPr lang="en-US" sz="1400" dirty="0" smtClean="0">
+              <a:rPr lang="en-US" sz="1400" dirty="0">
                 <a:latin typeface="+mj-lt"/>
               </a:rPr>
               <a:t>clock</a:t>
             </a:r>
-            <a:endParaRPr lang="en-US" sz="1400" dirty="0">
-              <a:latin typeface="+mj-lt"/>
-            </a:endParaRPr>
           </a:p>
         </p:txBody>
       </p:sp>
@@ -19159,14 +18747,11 @@
           <a:lstStyle/>
           <a:p>
             <a:r>
-              <a:rPr lang="en-US" sz="1400" dirty="0" smtClean="0">
+              <a:rPr lang="en-US" sz="1400" dirty="0">
                 <a:latin typeface="+mj-lt"/>
               </a:rPr>
               <a:t>reset</a:t>
             </a:r>
-            <a:endParaRPr lang="en-US" sz="1400" dirty="0">
-              <a:latin typeface="+mj-lt"/>
-            </a:endParaRPr>
           </a:p>
         </p:txBody>
       </p:sp>
@@ -19193,14 +18778,11 @@
           <a:lstStyle/>
           <a:p>
             <a:r>
-              <a:rPr lang="en-US" sz="1400" dirty="0" smtClean="0">
+              <a:rPr lang="en-US" sz="1400" dirty="0">
                 <a:latin typeface="+mj-lt"/>
               </a:rPr>
               <a:t>start</a:t>
             </a:r>
-            <a:endParaRPr lang="en-US" sz="1400" dirty="0">
-              <a:latin typeface="+mj-lt"/>
-            </a:endParaRPr>
           </a:p>
         </p:txBody>
       </p:sp>
@@ -19259,7 +18841,7 @@
               <a:buNone/>
               <a:tabLst/>
             </a:pPr>
-            <a:endParaRPr lang="en-US" dirty="0" smtClean="0">
+            <a:endParaRPr lang="en-US" dirty="0">
               <a:ln w="19050">
                 <a:solidFill>
                   <a:schemeClr val="tx1"/>
@@ -19293,7 +18875,7 @@
           <a:lstStyle/>
           <a:p>
             <a:r>
-              <a:rPr lang="en-US" sz="1400" dirty="0" err="1" smtClean="0">
+              <a:rPr lang="en-US" sz="1400" dirty="0" err="1">
                 <a:latin typeface="+mj-lt"/>
               </a:rPr>
               <a:t>Data_in</a:t>
@@ -19359,7 +18941,7 @@
               <a:buNone/>
               <a:tabLst/>
             </a:pPr>
-            <a:endParaRPr lang="en-US" dirty="0" smtClean="0">
+            <a:endParaRPr lang="en-US" dirty="0">
               <a:ln w="19050">
                 <a:solidFill>
                   <a:schemeClr val="tx1"/>
@@ -19393,7 +18975,7 @@
           <a:lstStyle/>
           <a:p>
             <a:r>
-              <a:rPr lang="en-US" sz="1400" dirty="0" err="1" smtClean="0">
+              <a:rPr lang="en-US" sz="1400" dirty="0" err="1">
                 <a:latin typeface="+mj-lt"/>
               </a:rPr>
               <a:t>Return_val</a:t>
@@ -19456,14 +19038,11 @@
           <a:lstStyle/>
           <a:p>
             <a:r>
-              <a:rPr lang="en-US" sz="1400" dirty="0" smtClean="0">
+              <a:rPr lang="en-US" sz="1400" dirty="0">
                 <a:latin typeface="+mj-lt"/>
               </a:rPr>
               <a:t>done</a:t>
             </a:r>
-            <a:endParaRPr lang="en-US" sz="1400" dirty="0">
-              <a:latin typeface="+mj-lt"/>
-            </a:endParaRPr>
           </a:p>
         </p:txBody>
       </p:sp>
@@ -19519,14 +19098,11 @@
           <a:lstStyle/>
           <a:p>
             <a:r>
-              <a:rPr lang="en-US" sz="1400" dirty="0" smtClean="0">
+              <a:rPr lang="en-US" sz="1400" dirty="0">
                 <a:latin typeface="+mj-lt"/>
               </a:rPr>
               <a:t>ready</a:t>
             </a:r>
-            <a:endParaRPr lang="en-US" sz="1400" dirty="0">
-              <a:latin typeface="+mj-lt"/>
-            </a:endParaRPr>
           </a:p>
         </p:txBody>
       </p:sp>
@@ -19582,14 +19158,11 @@
           <a:lstStyle/>
           <a:p>
             <a:r>
-              <a:rPr lang="en-US" sz="1400" dirty="0" smtClean="0">
+              <a:rPr lang="en-US" sz="1400" dirty="0">
                 <a:latin typeface="+mj-lt"/>
               </a:rPr>
               <a:t>idle</a:t>
             </a:r>
-            <a:endParaRPr lang="en-US" sz="1400" dirty="0">
-              <a:latin typeface="+mj-lt"/>
-            </a:endParaRPr>
           </a:p>
         </p:txBody>
       </p:sp>
@@ -19603,13 +19176,6 @@
   <p:clrMapOvr>
     <a:masterClrMapping/>
   </p:clrMapOvr>
-  <p:timing>
-    <p:tnLst>
-      <p:par>
-        <p:cTn id="1" dur="indefinite" restart="never" nodeType="tmRoot"/>
-      </p:par>
-    </p:tnLst>
-  </p:timing>
 </p:sld>
 </file>
 
@@ -19647,7 +19213,7 @@
           <a:p>
             <a:pPr rtl="1"/>
             <a:r>
-              <a:rPr lang="fa-IR" dirty="0" smtClean="0"/>
+              <a:rPr lang="fa-IR" dirty="0"/>
               <a:t>سنتز مدار واسط</a:t>
             </a:r>
             <a:endParaRPr lang="en-US" dirty="0"/>
@@ -19675,48 +19241,43 @@
           <a:lstStyle/>
           <a:p>
             <a:r>
-              <a:rPr lang="fa-IR" sz="2800" dirty="0" smtClean="0"/>
+              <a:rPr lang="fa-IR" sz="2800" dirty="0"/>
               <a:t>در </a:t>
             </a:r>
             <a:r>
-              <a:rPr lang="fa-IR" sz="2800" smtClean="0"/>
-              <a:t>ویوادو</a:t>
-            </a:r>
-            <a:r>
-              <a:rPr lang="fa-IR" sz="2800" smtClean="0"/>
-              <a:t>:</a:t>
-            </a:r>
-            <a:endParaRPr lang="fa-IR" sz="2000" dirty="0" smtClean="0"/>
+              <a:rPr lang="fa-IR" sz="2800"/>
+              <a:t>ویوادو:</a:t>
+            </a:r>
+            <a:endParaRPr lang="fa-IR" sz="2000" dirty="0"/>
           </a:p>
           <a:p>
             <a:pPr lvl="1"/>
             <a:r>
-              <a:rPr lang="fa-IR" sz="2400" dirty="0" smtClean="0"/>
+              <a:rPr lang="fa-IR" sz="2400" dirty="0"/>
               <a:t>نام پورت ها:</a:t>
             </a:r>
           </a:p>
           <a:p>
             <a:pPr lvl="2"/>
             <a:r>
-              <a:rPr lang="en-US" sz="2000" dirty="0" err="1" smtClean="0"/>
+              <a:rPr lang="en-US" sz="2000" dirty="0" err="1"/>
               <a:t>ap_clk</a:t>
             </a:r>
             <a:r>
-              <a:rPr lang="fa-IR" sz="2000" dirty="0" smtClean="0"/>
+              <a:rPr lang="fa-IR" sz="2000" dirty="0"/>
               <a:t> </a:t>
             </a:r>
           </a:p>
           <a:p>
             <a:pPr lvl="2"/>
             <a:r>
-              <a:rPr lang="en-US" sz="2000" dirty="0" err="1" smtClean="0"/>
+              <a:rPr lang="en-US" sz="2000" dirty="0" err="1"/>
               <a:t>ap_rst</a:t>
             </a:r>
             <a:r>
-              <a:rPr lang="fa-IR" sz="2000" dirty="0" smtClean="0"/>
+              <a:rPr lang="fa-IR" sz="2000" dirty="0"/>
               <a:t> </a:t>
             </a:r>
-            <a:endParaRPr lang="fa-IR" sz="2000" dirty="0"/>
           </a:p>
           <a:p>
             <a:pPr lvl="2"/>
@@ -19728,12 +19289,11 @@
               <a:rPr lang="fa-IR" sz="2000" dirty="0"/>
               <a:t> </a:t>
             </a:r>
-            <a:endParaRPr lang="fa-IR" sz="2000" dirty="0" smtClean="0"/>
           </a:p>
           <a:p>
             <a:pPr lvl="2"/>
             <a:r>
-              <a:rPr lang="en-US" sz="2000" dirty="0" err="1" smtClean="0"/>
+              <a:rPr lang="en-US" sz="2000" dirty="0" err="1"/>
               <a:t>ap_done</a:t>
             </a:r>
             <a:endParaRPr lang="en-US" sz="2000" dirty="0"/>
@@ -19741,15 +19301,15 @@
           <a:p>
             <a:pPr lvl="2"/>
             <a:r>
-              <a:rPr lang="en-US" sz="2000" dirty="0" err="1" smtClean="0"/>
+              <a:rPr lang="en-US" sz="2000" dirty="0" err="1"/>
               <a:t>ap_ready</a:t>
             </a:r>
-            <a:endParaRPr lang="en-US" sz="2000" dirty="0" smtClean="0"/>
+            <a:endParaRPr lang="en-US" sz="2000" dirty="0"/>
           </a:p>
           <a:p>
             <a:pPr lvl="2"/>
             <a:r>
-              <a:rPr lang="en-US" sz="2000" dirty="0" err="1" smtClean="0"/>
+              <a:rPr lang="en-US" sz="2000" dirty="0" err="1"/>
               <a:t>ap_idle</a:t>
             </a:r>
             <a:endParaRPr lang="en-US" sz="2000" dirty="0"/>
@@ -19757,10 +19317,10 @@
           <a:p>
             <a:pPr lvl="2"/>
             <a:r>
-              <a:rPr lang="en-US" sz="2000" dirty="0" err="1" smtClean="0"/>
+              <a:rPr lang="en-US" sz="2000" dirty="0" err="1"/>
               <a:t>ap_return</a:t>
             </a:r>
-            <a:endParaRPr lang="fa-IR" sz="2000" dirty="0" smtClean="0"/>
+            <a:endParaRPr lang="fa-IR" sz="2000" dirty="0"/>
           </a:p>
         </p:txBody>
       </p:sp>
@@ -19848,7 +19408,7 @@
               <a:buNone/>
               <a:tabLst/>
             </a:pPr>
-            <a:endParaRPr lang="en-US" dirty="0" smtClean="0">
+            <a:endParaRPr lang="en-US" dirty="0">
               <a:ln w="19050">
                 <a:solidFill>
                   <a:schemeClr val="tx1"/>
@@ -19912,7 +19472,7 @@
               <a:tabLst/>
             </a:pPr>
             <a:r>
-              <a:rPr lang="fa-IR" dirty="0" smtClean="0">
+              <a:rPr lang="fa-IR" dirty="0">
                 <a:ln w="19050">
                   <a:solidFill>
                     <a:schemeClr val="tx1"/>
@@ -19922,7 +19482,7 @@
               </a:rPr>
               <a:t>مدار محاسباتی</a:t>
             </a:r>
-            <a:endParaRPr lang="en-US" dirty="0" smtClean="0">
+            <a:endParaRPr lang="en-US" dirty="0">
               <a:ln w="19050">
                 <a:solidFill>
                   <a:schemeClr val="tx1"/>
@@ -19986,7 +19546,7 @@
               <a:tabLst/>
             </a:pPr>
             <a:r>
-              <a:rPr lang="fa-IR" dirty="0" smtClean="0">
+              <a:rPr lang="fa-IR" dirty="0">
                 <a:ln w="19050">
                   <a:solidFill>
                     <a:schemeClr val="tx1"/>
@@ -19996,7 +19556,7 @@
               </a:rPr>
               <a:t>مدار کنترل واسط</a:t>
             </a:r>
-            <a:endParaRPr lang="en-US" dirty="0" smtClean="0">
+            <a:endParaRPr lang="en-US" dirty="0">
               <a:ln w="19050">
                 <a:solidFill>
                   <a:schemeClr val="tx1"/>
@@ -20123,14 +19683,11 @@
           <a:lstStyle/>
           <a:p>
             <a:r>
-              <a:rPr lang="en-US" sz="1400" dirty="0" smtClean="0">
+              <a:rPr lang="en-US" sz="1400" dirty="0">
                 <a:latin typeface="+mj-lt"/>
               </a:rPr>
               <a:t>clock</a:t>
             </a:r>
-            <a:endParaRPr lang="en-US" sz="1400" dirty="0">
-              <a:latin typeface="+mj-lt"/>
-            </a:endParaRPr>
           </a:p>
         </p:txBody>
       </p:sp>
@@ -20157,14 +19714,11 @@
           <a:lstStyle/>
           <a:p>
             <a:r>
-              <a:rPr lang="en-US" sz="1400" dirty="0" smtClean="0">
+              <a:rPr lang="en-US" sz="1400" dirty="0">
                 <a:latin typeface="+mj-lt"/>
               </a:rPr>
               <a:t>reset</a:t>
             </a:r>
-            <a:endParaRPr lang="en-US" sz="1400" dirty="0">
-              <a:latin typeface="+mj-lt"/>
-            </a:endParaRPr>
           </a:p>
         </p:txBody>
       </p:sp>
@@ -20191,14 +19745,11 @@
           <a:lstStyle/>
           <a:p>
             <a:r>
-              <a:rPr lang="en-US" sz="1400" dirty="0" smtClean="0">
+              <a:rPr lang="en-US" sz="1400" dirty="0">
                 <a:latin typeface="+mj-lt"/>
               </a:rPr>
               <a:t>start</a:t>
             </a:r>
-            <a:endParaRPr lang="en-US" sz="1400" dirty="0">
-              <a:latin typeface="+mj-lt"/>
-            </a:endParaRPr>
           </a:p>
         </p:txBody>
       </p:sp>
@@ -20257,7 +19808,7 @@
               <a:buNone/>
               <a:tabLst/>
             </a:pPr>
-            <a:endParaRPr lang="en-US" dirty="0" smtClean="0">
+            <a:endParaRPr lang="en-US" dirty="0">
               <a:ln w="19050">
                 <a:solidFill>
                   <a:schemeClr val="tx1"/>
@@ -20291,7 +19842,7 @@
           <a:lstStyle/>
           <a:p>
             <a:r>
-              <a:rPr lang="en-US" sz="1400" dirty="0" err="1" smtClean="0">
+              <a:rPr lang="en-US" sz="1400" dirty="0" err="1">
                 <a:latin typeface="+mj-lt"/>
               </a:rPr>
               <a:t>Data_in</a:t>
@@ -20357,7 +19908,7 @@
               <a:buNone/>
               <a:tabLst/>
             </a:pPr>
-            <a:endParaRPr lang="en-US" dirty="0" smtClean="0">
+            <a:endParaRPr lang="en-US" dirty="0">
               <a:ln w="19050">
                 <a:solidFill>
                   <a:schemeClr val="tx1"/>
@@ -20391,7 +19942,7 @@
           <a:lstStyle/>
           <a:p>
             <a:r>
-              <a:rPr lang="en-US" sz="1400" dirty="0" err="1" smtClean="0">
+              <a:rPr lang="en-US" sz="1400" dirty="0" err="1">
                 <a:latin typeface="+mj-lt"/>
               </a:rPr>
               <a:t>Return_val</a:t>
@@ -20454,14 +20005,11 @@
           <a:lstStyle/>
           <a:p>
             <a:r>
-              <a:rPr lang="en-US" sz="1400" dirty="0" smtClean="0">
+              <a:rPr lang="en-US" sz="1400" dirty="0">
                 <a:latin typeface="+mj-lt"/>
               </a:rPr>
               <a:t>done</a:t>
             </a:r>
-            <a:endParaRPr lang="en-US" sz="1400" dirty="0">
-              <a:latin typeface="+mj-lt"/>
-            </a:endParaRPr>
           </a:p>
         </p:txBody>
       </p:sp>
@@ -20517,14 +20065,11 @@
           <a:lstStyle/>
           <a:p>
             <a:r>
-              <a:rPr lang="en-US" sz="1400" dirty="0" smtClean="0">
+              <a:rPr lang="en-US" sz="1400" dirty="0">
                 <a:latin typeface="+mj-lt"/>
               </a:rPr>
               <a:t>ready</a:t>
             </a:r>
-            <a:endParaRPr lang="en-US" sz="1400" dirty="0">
-              <a:latin typeface="+mj-lt"/>
-            </a:endParaRPr>
           </a:p>
         </p:txBody>
       </p:sp>
@@ -20580,14 +20125,11 @@
           <a:lstStyle/>
           <a:p>
             <a:r>
-              <a:rPr lang="en-US" sz="1400" dirty="0" smtClean="0">
+              <a:rPr lang="en-US" sz="1400" dirty="0">
                 <a:latin typeface="+mj-lt"/>
               </a:rPr>
               <a:t>idle</a:t>
             </a:r>
-            <a:endParaRPr lang="en-US" sz="1400" dirty="0">
-              <a:latin typeface="+mj-lt"/>
-            </a:endParaRPr>
           </a:p>
         </p:txBody>
       </p:sp>
@@ -20601,13 +20143,6 @@
   <p:clrMapOvr>
     <a:masterClrMapping/>
   </p:clrMapOvr>
-  <p:timing>
-    <p:tnLst>
-      <p:par>
-        <p:cTn id="1" dur="indefinite" restart="never" nodeType="tmRoot"/>
-      </p:par>
-    </p:tnLst>
-  </p:timing>
 </p:sld>
 </file>
 
@@ -20645,7 +20180,7 @@
           <a:p>
             <a:pPr rtl="1"/>
             <a:r>
-              <a:rPr lang="fa-IR" dirty="0" smtClean="0"/>
+              <a:rPr lang="fa-IR" dirty="0"/>
               <a:t>سنتز مدار واسط (مثال)</a:t>
             </a:r>
             <a:endParaRPr lang="en-US" dirty="0"/>
@@ -20736,7 +20271,7 @@
               <a:buNone/>
               <a:tabLst/>
             </a:pPr>
-            <a:endParaRPr lang="en-US" dirty="0" smtClean="0">
+            <a:endParaRPr lang="en-US" dirty="0">
               <a:ln w="19050">
                 <a:solidFill>
                   <a:schemeClr val="tx1"/>
@@ -20800,7 +20335,7 @@
               <a:tabLst/>
             </a:pPr>
             <a:r>
-              <a:rPr lang="fa-IR" dirty="0" smtClean="0">
+              <a:rPr lang="fa-IR" dirty="0">
                 <a:ln w="19050">
                   <a:solidFill>
                     <a:schemeClr val="tx1"/>
@@ -20810,7 +20345,7 @@
               </a:rPr>
               <a:t>مدار محاسباتی</a:t>
             </a:r>
-            <a:endParaRPr lang="en-US" dirty="0" smtClean="0">
+            <a:endParaRPr lang="en-US" dirty="0">
               <a:ln w="19050">
                 <a:solidFill>
                   <a:schemeClr val="tx1"/>
@@ -20874,7 +20409,7 @@
               <a:tabLst/>
             </a:pPr>
             <a:r>
-              <a:rPr lang="fa-IR" dirty="0" smtClean="0">
+              <a:rPr lang="fa-IR" dirty="0">
                 <a:ln w="19050">
                   <a:solidFill>
                     <a:schemeClr val="tx1"/>
@@ -20884,7 +20419,7 @@
               </a:rPr>
               <a:t>مدار کنترل واسط</a:t>
             </a:r>
-            <a:endParaRPr lang="en-US" dirty="0" smtClean="0">
+            <a:endParaRPr lang="en-US" dirty="0">
               <a:ln w="19050">
                 <a:solidFill>
                   <a:schemeClr val="tx1"/>
@@ -21011,14 +20546,11 @@
           <a:lstStyle/>
           <a:p>
             <a:r>
-              <a:rPr lang="en-US" sz="1400" dirty="0" smtClean="0">
+              <a:rPr lang="en-US" sz="1400" dirty="0">
                 <a:latin typeface="+mj-lt"/>
               </a:rPr>
               <a:t>clock</a:t>
             </a:r>
-            <a:endParaRPr lang="en-US" sz="1400" dirty="0">
-              <a:latin typeface="+mj-lt"/>
-            </a:endParaRPr>
           </a:p>
         </p:txBody>
       </p:sp>
@@ -21045,14 +20577,11 @@
           <a:lstStyle/>
           <a:p>
             <a:r>
-              <a:rPr lang="en-US" sz="1400" dirty="0" smtClean="0">
+              <a:rPr lang="en-US" sz="1400" dirty="0">
                 <a:latin typeface="+mj-lt"/>
               </a:rPr>
               <a:t>reset</a:t>
             </a:r>
-            <a:endParaRPr lang="en-US" sz="1400" dirty="0">
-              <a:latin typeface="+mj-lt"/>
-            </a:endParaRPr>
           </a:p>
         </p:txBody>
       </p:sp>
@@ -21079,14 +20608,11 @@
           <a:lstStyle/>
           <a:p>
             <a:r>
-              <a:rPr lang="en-US" sz="1400" dirty="0" smtClean="0">
+              <a:rPr lang="en-US" sz="1400" dirty="0">
                 <a:latin typeface="+mj-lt"/>
               </a:rPr>
               <a:t>start</a:t>
             </a:r>
-            <a:endParaRPr lang="en-US" sz="1400" dirty="0">
-              <a:latin typeface="+mj-lt"/>
-            </a:endParaRPr>
           </a:p>
         </p:txBody>
       </p:sp>
@@ -21145,7 +20671,7 @@
               <a:buNone/>
               <a:tabLst/>
             </a:pPr>
-            <a:endParaRPr lang="en-US" dirty="0" smtClean="0">
+            <a:endParaRPr lang="en-US" dirty="0">
               <a:ln w="19050">
                 <a:solidFill>
                   <a:schemeClr val="tx1"/>
@@ -21179,7 +20705,7 @@
           <a:lstStyle/>
           <a:p>
             <a:r>
-              <a:rPr lang="en-US" sz="1400" dirty="0" err="1" smtClean="0">
+              <a:rPr lang="en-US" sz="1400" dirty="0" err="1">
                 <a:latin typeface="+mj-lt"/>
               </a:rPr>
               <a:t>Data_in</a:t>
@@ -21245,7 +20771,7 @@
               <a:buNone/>
               <a:tabLst/>
             </a:pPr>
-            <a:endParaRPr lang="en-US" dirty="0" smtClean="0">
+            <a:endParaRPr lang="en-US" dirty="0">
               <a:ln w="19050">
                 <a:solidFill>
                   <a:schemeClr val="tx1"/>
@@ -21279,7 +20805,7 @@
           <a:lstStyle/>
           <a:p>
             <a:r>
-              <a:rPr lang="en-US" sz="1400" dirty="0" err="1" smtClean="0">
+              <a:rPr lang="en-US" sz="1400" dirty="0" err="1">
                 <a:latin typeface="+mj-lt"/>
               </a:rPr>
               <a:t>Return_val</a:t>
@@ -21342,14 +20868,11 @@
           <a:lstStyle/>
           <a:p>
             <a:r>
-              <a:rPr lang="en-US" sz="1400" dirty="0" smtClean="0">
+              <a:rPr lang="en-US" sz="1400" dirty="0">
                 <a:latin typeface="+mj-lt"/>
               </a:rPr>
               <a:t>done</a:t>
             </a:r>
-            <a:endParaRPr lang="en-US" sz="1400" dirty="0">
-              <a:latin typeface="+mj-lt"/>
-            </a:endParaRPr>
           </a:p>
         </p:txBody>
       </p:sp>
@@ -21405,14 +20928,11 @@
           <a:lstStyle/>
           <a:p>
             <a:r>
-              <a:rPr lang="en-US" sz="1400" dirty="0" smtClean="0">
+              <a:rPr lang="en-US" sz="1400" dirty="0">
                 <a:latin typeface="+mj-lt"/>
               </a:rPr>
               <a:t>ready</a:t>
             </a:r>
-            <a:endParaRPr lang="en-US" sz="1400" dirty="0">
-              <a:latin typeface="+mj-lt"/>
-            </a:endParaRPr>
           </a:p>
         </p:txBody>
       </p:sp>
@@ -21468,14 +20988,11 @@
           <a:lstStyle/>
           <a:p>
             <a:r>
-              <a:rPr lang="en-US" sz="1400" dirty="0" smtClean="0">
+              <a:rPr lang="en-US" sz="1400" dirty="0">
                 <a:latin typeface="+mj-lt"/>
               </a:rPr>
               <a:t>idle</a:t>
             </a:r>
-            <a:endParaRPr lang="en-US" sz="1400" dirty="0">
-              <a:latin typeface="+mj-lt"/>
-            </a:endParaRPr>
           </a:p>
         </p:txBody>
       </p:sp>
@@ -21513,13 +21030,6 @@
   <p:clrMapOvr>
     <a:masterClrMapping/>
   </p:clrMapOvr>
-  <p:timing>
-    <p:tnLst>
-      <p:par>
-        <p:cTn id="1" dur="indefinite" restart="never" nodeType="tmRoot"/>
-      </p:par>
-    </p:tnLst>
-  </p:timing>
 </p:sld>
 </file>
 
@@ -21557,7 +21067,7 @@
           <a:p>
             <a:pPr rtl="1"/>
             <a:r>
-              <a:rPr lang="fa-IR" dirty="0" smtClean="0"/>
+              <a:rPr lang="fa-IR" dirty="0"/>
               <a:t>سنتز مدار واسط (مثال)</a:t>
             </a:r>
             <a:endParaRPr lang="en-US" dirty="0"/>
@@ -21627,13 +21137,6 @@
   <p:clrMapOvr>
     <a:masterClrMapping/>
   </p:clrMapOvr>
-  <p:timing>
-    <p:tnLst>
-      <p:par>
-        <p:cTn id="1" dur="indefinite" restart="never" nodeType="tmRoot"/>
-      </p:par>
-    </p:tnLst>
-  </p:timing>
 </p:sld>
 </file>
 
@@ -21671,16 +21174,8 @@
           <a:p>
             <a:pPr rtl="1"/>
             <a:r>
-              <a:rPr lang="fa-IR" dirty="0" smtClean="0"/>
-              <a:t>سنتز مدار واسط</a:t>
-            </a:r>
-            <a:r>
               <a:rPr lang="fa-IR" dirty="0"/>
-              <a:t> (</a:t>
-            </a:r>
-            <a:r>
-              <a:rPr lang="fa-IR" dirty="0" smtClean="0"/>
-              <a:t>مثال)</a:t>
+              <a:t>سنتز مدار واسط (مثال)</a:t>
             </a:r>
             <a:endParaRPr lang="en-US" dirty="0"/>
           </a:p>
@@ -21707,98 +21202,94 @@
           <a:lstStyle/>
           <a:p>
             <a:r>
-              <a:rPr lang="fa-IR" sz="2800" dirty="0" smtClean="0"/>
+              <a:rPr lang="fa-IR" sz="2800" dirty="0"/>
               <a:t>ب.م.م.: فراخوانی با ارجاع:</a:t>
             </a:r>
           </a:p>
           <a:p>
             <a:r>
-              <a:rPr lang="fa-IR" sz="2800" dirty="0" smtClean="0"/>
+              <a:rPr lang="fa-IR" sz="2800" dirty="0"/>
               <a:t>ک.م.م.: مقدار بازگشت داده شده</a:t>
             </a:r>
           </a:p>
           <a:p>
             <a:pPr lvl="1"/>
             <a:r>
-              <a:rPr lang="en-US" sz="2400" dirty="0" err="1" smtClean="0"/>
+              <a:rPr lang="en-US" sz="2400" dirty="0" err="1"/>
               <a:t>gcd_in</a:t>
             </a:r>
             <a:r>
-              <a:rPr lang="fa-IR" sz="2400" dirty="0" smtClean="0"/>
+              <a:rPr lang="fa-IR" sz="2400" dirty="0"/>
               <a:t> و </a:t>
             </a:r>
             <a:r>
-              <a:rPr lang="en-US" sz="2400" dirty="0" err="1" smtClean="0"/>
+              <a:rPr lang="en-US" sz="2400" dirty="0" err="1"/>
               <a:t>gcd_out</a:t>
             </a:r>
-            <a:endParaRPr lang="en-US" sz="2400" dirty="0" smtClean="0"/>
+            <a:endParaRPr lang="en-US" sz="2400" dirty="0"/>
           </a:p>
           <a:p>
             <a:pPr lvl="2"/>
             <a:r>
-              <a:rPr lang="fa-IR" sz="2000" dirty="0" smtClean="0"/>
+              <a:rPr lang="fa-IR" sz="2000" dirty="0"/>
               <a:t>یا یک درگاه </a:t>
             </a:r>
             <a:r>
-              <a:rPr lang="en-US" sz="2000" dirty="0" err="1" smtClean="0"/>
+              <a:rPr lang="en-US" sz="2000" dirty="0" err="1"/>
               <a:t>inout</a:t>
             </a:r>
-            <a:endParaRPr lang="en-US" sz="2000" dirty="0" smtClean="0"/>
+            <a:endParaRPr lang="en-US" sz="2000" dirty="0"/>
           </a:p>
           <a:p>
             <a:pPr lvl="1"/>
             <a:r>
-              <a:rPr lang="en-US" sz="2400" dirty="0" err="1" smtClean="0"/>
+              <a:rPr lang="en-US" sz="2400" dirty="0" err="1"/>
               <a:t>gcd_valid</a:t>
             </a:r>
             <a:r>
               <a:rPr lang="fa-IR" sz="2400" dirty="0"/>
-              <a:t> </a:t>
-            </a:r>
-            <a:r>
-              <a:rPr lang="fa-IR" sz="2400" dirty="0" smtClean="0"/>
-              <a:t>برای </a:t>
-            </a:r>
-            <a:r>
-              <a:rPr lang="en-US" sz="2400" dirty="0" err="1" smtClean="0"/>
+              <a:t> برای </a:t>
+            </a:r>
+            <a:r>
+              <a:rPr lang="en-US" sz="2400" dirty="0" err="1"/>
               <a:t>gcd_out</a:t>
             </a:r>
             <a:r>
-              <a:rPr lang="fa-IR" sz="2400" dirty="0" smtClean="0"/>
+              <a:rPr lang="fa-IR" sz="2400" dirty="0"/>
               <a:t>:</a:t>
             </a:r>
           </a:p>
           <a:p>
             <a:pPr lvl="2"/>
             <a:r>
-              <a:rPr lang="fa-IR" sz="2000" dirty="0" smtClean="0"/>
+              <a:rPr lang="fa-IR" sz="2000" dirty="0"/>
               <a:t>مانند </a:t>
             </a:r>
             <a:r>
-              <a:rPr lang="en-US" sz="2000" dirty="0" smtClean="0"/>
+              <a:rPr lang="en-US" sz="2000" dirty="0"/>
               <a:t>done</a:t>
             </a:r>
             <a:r>
-              <a:rPr lang="fa-IR" sz="2000" dirty="0" smtClean="0"/>
+              <a:rPr lang="fa-IR" sz="2000" dirty="0"/>
               <a:t> برای </a:t>
             </a:r>
             <a:r>
-              <a:rPr lang="en-US" sz="2000" dirty="0" err="1" smtClean="0"/>
+              <a:rPr lang="en-US" sz="2000" dirty="0" err="1"/>
               <a:t>return_val</a:t>
             </a:r>
-            <a:endParaRPr lang="en-US" sz="2000" dirty="0" smtClean="0"/>
+            <a:endParaRPr lang="en-US" sz="2000" dirty="0"/>
           </a:p>
           <a:p>
             <a:pPr lvl="1"/>
-            <a:endParaRPr lang="fa-IR" sz="2400" dirty="0" smtClean="0"/>
+            <a:endParaRPr lang="fa-IR" sz="2400" dirty="0"/>
           </a:p>
           <a:p>
             <a:pPr lvl="2"/>
-            <a:endParaRPr lang="fa-IR" sz="2000" dirty="0" smtClean="0"/>
+            <a:endParaRPr lang="fa-IR" sz="2000" dirty="0"/>
           </a:p>
           <a:p>
             <a:pPr lvl="1"/>
-            <a:endParaRPr lang="fa-IR" sz="2400" dirty="0" smtClean="0"/>
+            <a:endParaRPr lang="fa-IR" sz="2400" dirty="0"/>
           </a:p>
           <a:p>
             <a:pPr lvl="1"/>
@@ -21863,12 +21354,12 @@
           <a:graphicData uri="http://schemas.openxmlformats.org/presentationml/2006/ole">
             <mc:AlternateContent xmlns:mc="http://schemas.openxmlformats.org/markup-compatibility/2006">
               <mc:Choice xmlns:v="urn:schemas-microsoft-com:vml" Requires="v">
-                <p:oleObj spid="_x0000_s9488" name="Visio" r:id="rId3" imgW="14411231" imgH="11801475" progId="Visio.Drawing.11">
+                <p:oleObj name="Visio" r:id="rId2" imgW="14411231" imgH="11801475" progId="Visio.Drawing.11">
                   <p:embed/>
                 </p:oleObj>
               </mc:Choice>
               <mc:Fallback>
-                <p:oleObj name="Visio" r:id="rId3" imgW="14411231" imgH="11801475" progId="Visio.Drawing.11">
+                <p:oleObj name="Visio" r:id="rId2" imgW="14411231" imgH="11801475" progId="Visio.Drawing.11">
                   <p:embed/>
                   <p:pic>
                     <p:nvPicPr>
@@ -21877,7 +21368,7 @@
                       <p:nvPr/>
                     </p:nvPicPr>
                     <p:blipFill>
-                      <a:blip r:embed="rId4"/>
+                      <a:blip r:embed="rId3"/>
                       <a:stretch>
                         <a:fillRect/>
                       </a:stretch>
@@ -21935,14 +21426,7 @@
                 <a:latin typeface="Courier New" panose="02070309020205020404" pitchFamily="49" charset="0"/>
                 <a:ea typeface="Calibri" panose="020F0502020204030204" pitchFamily="34" charset="0"/>
               </a:rPr>
-              <a:t>long </a:t>
-            </a:r>
-            <a:r>
-              <a:rPr lang="en-US" sz="2400" b="1" smtClean="0">
-                <a:latin typeface="Courier New" panose="02070309020205020404" pitchFamily="49" charset="0"/>
-                <a:ea typeface="Calibri" panose="020F0502020204030204" pitchFamily="34" charset="0"/>
-              </a:rPr>
-              <a:t>gcd_lcm(long </a:t>
+              <a:t>long gcd_lcm(long </a:t>
             </a:r>
             <a:r>
               <a:rPr lang="en-US" sz="2400" b="1" dirty="0">
@@ -21982,13 +21466,6 @@
   <p:clrMapOvr>
     <a:masterClrMapping/>
   </p:clrMapOvr>
-  <p:timing>
-    <p:tnLst>
-      <p:par>
-        <p:cTn id="1" dur="indefinite" restart="never" nodeType="tmRoot"/>
-      </p:par>
-    </p:tnLst>
-  </p:timing>
 </p:sld>
 </file>
 
@@ -22026,7 +21503,7 @@
           <a:p>
             <a:pPr rtl="1"/>
             <a:r>
-              <a:rPr lang="fa-IR" dirty="0" smtClean="0"/>
+              <a:rPr lang="fa-IR" dirty="0"/>
               <a:t>سنتز مدار واسط</a:t>
             </a:r>
             <a:endParaRPr lang="en-US" dirty="0"/>
@@ -22054,39 +21531,39 @@
           <a:lstStyle/>
           <a:p>
             <a:r>
-              <a:rPr lang="fa-IR" sz="2800" dirty="0" smtClean="0"/>
+              <a:rPr lang="fa-IR" sz="2800" dirty="0"/>
               <a:t>ارتباط پیچیده تر:</a:t>
             </a:r>
           </a:p>
           <a:p>
             <a:pPr lvl="1"/>
             <a:r>
-              <a:rPr lang="fa-IR" sz="2400" dirty="0" smtClean="0"/>
+              <a:rPr lang="fa-IR" sz="2400" dirty="0"/>
               <a:t>طراح توصیف می کند</a:t>
             </a:r>
           </a:p>
           <a:p>
             <a:pPr lvl="1"/>
             <a:r>
-              <a:rPr lang="fa-IR" sz="2400" dirty="0" smtClean="0"/>
+              <a:rPr lang="fa-IR" sz="2400" dirty="0"/>
               <a:t>بلوک های آماده برای پروتکل های استاندارد</a:t>
             </a:r>
           </a:p>
           <a:p>
             <a:pPr lvl="2"/>
-            <a:endParaRPr lang="fa-IR" sz="2000" dirty="0" smtClean="0"/>
+            <a:endParaRPr lang="fa-IR" sz="2000" dirty="0"/>
           </a:p>
           <a:p>
             <a:pPr lvl="1"/>
-            <a:endParaRPr lang="fa-IR" sz="2400" dirty="0" smtClean="0"/>
+            <a:endParaRPr lang="fa-IR" sz="2400" dirty="0"/>
           </a:p>
           <a:p>
             <a:pPr lvl="2"/>
-            <a:endParaRPr lang="fa-IR" sz="2000" dirty="0" smtClean="0"/>
+            <a:endParaRPr lang="fa-IR" sz="2000" dirty="0"/>
           </a:p>
           <a:p>
             <a:pPr lvl="1"/>
-            <a:endParaRPr lang="fa-IR" sz="2400" dirty="0" smtClean="0"/>
+            <a:endParaRPr lang="fa-IR" sz="2400" dirty="0"/>
           </a:p>
           <a:p>
             <a:pPr lvl="1"/>
@@ -22139,13 +21616,6 @@
   <p:clrMapOvr>
     <a:masterClrMapping/>
   </p:clrMapOvr>
-  <p:timing>
-    <p:tnLst>
-      <p:par>
-        <p:cTn id="1" dur="indefinite" restart="never" nodeType="tmRoot"/>
-      </p:par>
-    </p:tnLst>
-  </p:timing>
 </p:sld>
 </file>
 
@@ -22182,10 +21652,9 @@
           <a:lstStyle/>
           <a:p>
             <a:r>
-              <a:rPr lang="fa-IR" smtClean="0"/>
+              <a:rPr lang="fa-IR"/>
               <a:t>منابع</a:t>
             </a:r>
-            <a:endParaRPr lang="fa-IR"/>
           </a:p>
         </p:txBody>
       </p:sp>
@@ -22211,38 +21680,21 @@
           <a:p>
             <a:pPr lvl="1" algn="l" rtl="0"/>
             <a:r>
-              <a:rPr lang="en-US" smtClean="0"/>
-              <a:t>ug998, Introduction </a:t>
-            </a:r>
-            <a:r>
               <a:rPr lang="en-US"/>
-              <a:t>to FPGA Design with </a:t>
-            </a:r>
-            <a:r>
-              <a:rPr lang="en-US" smtClean="0"/>
-              <a:t>Vivado </a:t>
-            </a:r>
+              <a:t>ug998, Introduction to FPGA Design with Vivado High-Level Synthesis</a:t>
+            </a:r>
+          </a:p>
+          <a:p>
+            <a:pPr lvl="1" algn="l" rtl="0"/>
             <a:r>
               <a:rPr lang="en-US"/>
-              <a:t>High-Level </a:t>
-            </a:r>
-            <a:r>
-              <a:rPr lang="en-US" smtClean="0"/>
-              <a:t>Synthesis</a:t>
-            </a:r>
-            <a:endParaRPr lang="en-US" smtClean="0"/>
+              <a:t>ug871, Vivado High-Level Synthesis Tutorial</a:t>
+            </a:r>
           </a:p>
           <a:p>
             <a:pPr lvl="1" algn="l" rtl="0"/>
             <a:r>
-              <a:rPr lang="en-US" smtClean="0"/>
-              <a:t>ug871, Vivado High-Level Synthesis Tutorial</a:t>
-            </a:r>
-          </a:p>
-          <a:p>
-            <a:pPr lvl="1" algn="l" rtl="0"/>
-            <a:r>
-              <a:rPr lang="en-US" smtClean="0"/>
+              <a:rPr lang="en-US"/>
               <a:t>ug902, Vivado High-Level Synthesis User Guide</a:t>
             </a:r>
           </a:p>
@@ -22328,10 +21780,10 @@
           <a:p>
             <a:pPr rtl="1"/>
             <a:r>
-              <a:rPr lang="fa-IR" altLang="en-US" dirty="0" smtClean="0"/>
+              <a:rPr lang="fa-IR" altLang="en-US" dirty="0"/>
               <a:t>سنتز سطح بالا</a:t>
             </a:r>
-            <a:endParaRPr lang="en-US" altLang="en-US" dirty="0" smtClean="0"/>
+            <a:endParaRPr lang="en-US" altLang="en-US" dirty="0"/>
           </a:p>
         </p:txBody>
       </p:sp>
@@ -22356,40 +21808,40 @@
           <a:lstStyle/>
           <a:p>
             <a:r>
-              <a:rPr lang="fa-IR" altLang="en-US" dirty="0" smtClean="0"/>
+              <a:rPr lang="fa-IR" altLang="en-US" dirty="0"/>
               <a:t>سنتز:</a:t>
             </a:r>
           </a:p>
           <a:p>
             <a:pPr lvl="1"/>
             <a:r>
-              <a:rPr lang="fa-IR" altLang="en-US" dirty="0" smtClean="0"/>
+              <a:rPr lang="fa-IR" altLang="en-US" dirty="0"/>
               <a:t>سنتز رفتاری (</a:t>
             </a:r>
             <a:r>
-              <a:rPr lang="en-US" altLang="en-US" sz="2400" dirty="0" smtClean="0"/>
+              <a:rPr lang="en-US" altLang="en-US" sz="2400" dirty="0"/>
               <a:t>Behavioral Synthesis</a:t>
             </a:r>
             <a:r>
-              <a:rPr lang="fa-IR" altLang="en-US" dirty="0" smtClean="0"/>
+              <a:rPr lang="fa-IR" altLang="en-US" dirty="0"/>
               <a:t>) یا سنتز سطح بالا (</a:t>
             </a:r>
             <a:r>
-              <a:rPr lang="en-US" altLang="en-US" sz="2400" dirty="0" smtClean="0"/>
+              <a:rPr lang="en-US" altLang="en-US" sz="2400" dirty="0"/>
               <a:t>HLS</a:t>
             </a:r>
             <a:r>
-              <a:rPr lang="fa-IR" altLang="en-US" dirty="0" smtClean="0"/>
+              <a:rPr lang="fa-IR" altLang="en-US" dirty="0"/>
               <a:t>)</a:t>
             </a:r>
             <a:r>
-              <a:rPr lang="en-US" altLang="en-US" dirty="0" smtClean="0"/>
+              <a:rPr lang="en-US" altLang="en-US" dirty="0"/>
               <a:t>:</a:t>
             </a:r>
           </a:p>
           <a:p>
             <a:pPr lvl="2"/>
-            <a:endParaRPr lang="en-US" altLang="en-US" dirty="0" smtClean="0"/>
+            <a:endParaRPr lang="en-US" altLang="en-US" dirty="0"/>
           </a:p>
         </p:txBody>
       </p:sp>
@@ -22591,7 +22043,7 @@
               </a:pPr>
               <a:t>4</a:t>
             </a:fld>
-            <a:endParaRPr lang="en-US" altLang="en-US" sz="1300" b="0" smtClean="0">
+            <a:endParaRPr lang="en-US" altLang="en-US" sz="1300" b="0">
               <a:solidFill>
                 <a:schemeClr val="tx1"/>
               </a:solidFill>
@@ -23316,7 +22768,7 @@
               <a:buNone/>
               <a:tabLst/>
             </a:pPr>
-            <a:endParaRPr lang="en-US" dirty="0" smtClean="0">
+            <a:endParaRPr lang="en-US" dirty="0">
               <a:ln w="19050">
                 <a:solidFill>
                   <a:schemeClr val="tx1"/>
@@ -23337,13 +22789,6 @@
   <p:clrMapOvr>
     <a:masterClrMapping/>
   </p:clrMapOvr>
-  <p:timing>
-    <p:tnLst>
-      <p:par>
-        <p:cTn id="1" dur="indefinite" restart="never" nodeType="tmRoot"/>
-      </p:par>
-    </p:tnLst>
-  </p:timing>
 </p:sld>
 </file>
 
@@ -23381,11 +22826,11 @@
           <a:p>
             <a:pPr rtl="1"/>
             <a:r>
-              <a:rPr lang="fa-IR" altLang="en-US" dirty="0" smtClean="0"/>
+              <a:rPr lang="fa-IR" altLang="en-US" dirty="0"/>
               <a:t>توصیف رفتاری و </a:t>
             </a:r>
             <a:r>
-              <a:rPr lang="en-US" altLang="en-US" dirty="0" smtClean="0"/>
+              <a:rPr lang="en-US" altLang="en-US" dirty="0"/>
               <a:t>RTL</a:t>
             </a:r>
           </a:p>
@@ -23412,69 +22857,45 @@
           <a:lstStyle/>
           <a:p>
             <a:r>
-              <a:rPr lang="fa-IR" altLang="en-US" dirty="0" smtClean="0"/>
+              <a:rPr lang="fa-IR" altLang="en-US" dirty="0"/>
               <a:t>توصیف سطح بالا:</a:t>
             </a:r>
-            <a:endParaRPr lang="en-US" altLang="en-US" dirty="0" smtClean="0"/>
+            <a:endParaRPr lang="en-US" altLang="en-US" dirty="0"/>
           </a:p>
           <a:p>
             <a:pPr lvl="1"/>
             <a:r>
-              <a:rPr lang="fa-IR" altLang="en-US" dirty="0" smtClean="0"/>
-              <a:t>تنها </a:t>
-            </a:r>
-            <a:r>
               <a:rPr lang="fa-IR" altLang="en-US" dirty="0"/>
-              <a:t>عملکرد </a:t>
-            </a:r>
-            <a:r>
-              <a:rPr lang="fa-IR" altLang="en-US" dirty="0" smtClean="0"/>
-              <a:t>سیستم، </a:t>
-            </a:r>
+              <a:t>تنها عملکرد سیستم، در قالب ترتیب انجام عملیات</a:t>
+            </a:r>
+          </a:p>
+          <a:p>
             <a:r>
               <a:rPr lang="fa-IR" altLang="en-US" dirty="0"/>
-              <a:t>در قالب ترتیب انجام </a:t>
-            </a:r>
-            <a:r>
-              <a:rPr lang="fa-IR" altLang="en-US" dirty="0" smtClean="0"/>
-              <a:t>عملیات</a:t>
-            </a:r>
-          </a:p>
-          <a:p>
-            <a:r>
-              <a:rPr lang="fa-IR" altLang="en-US" dirty="0" smtClean="0"/>
-              <a:t>توصیف </a:t>
-            </a:r>
+              <a:t>توصیف انتقال ثبات:</a:t>
+            </a:r>
+          </a:p>
+          <a:p>
+            <a:pPr lvl="1"/>
             <a:r>
               <a:rPr lang="fa-IR" altLang="en-US" dirty="0"/>
-              <a:t>انتقال </a:t>
-            </a:r>
-            <a:r>
-              <a:rPr lang="fa-IR" altLang="en-US" dirty="0" smtClean="0"/>
-              <a:t>ثبات:</a:t>
+              <a:t>زمانبندی دقیق عملیات در هر کلاک</a:t>
             </a:r>
           </a:p>
           <a:p>
             <a:pPr lvl="1"/>
             <a:r>
-              <a:rPr lang="fa-IR" altLang="en-US" dirty="0" smtClean="0"/>
-              <a:t>زمانبندی دقیق عملیات در هر کلاک</a:t>
+              <a:rPr lang="fa-IR" altLang="en-US" dirty="0"/>
+              <a:t>نحوة کنترل عملیات محاسباتی و منطقی</a:t>
             </a:r>
           </a:p>
           <a:p>
             <a:pPr lvl="1"/>
             <a:r>
-              <a:rPr lang="fa-IR" altLang="en-US" dirty="0" smtClean="0"/>
-              <a:t>نحوة کنترل عملیات محاسباتی و منطقی</a:t>
-            </a:r>
-          </a:p>
-          <a:p>
-            <a:pPr lvl="1"/>
-            <a:r>
-              <a:rPr lang="fa-IR" altLang="en-US" dirty="0" smtClean="0"/>
+              <a:rPr lang="fa-IR" altLang="en-US" dirty="0"/>
               <a:t>نحوة کنترل قرارگرفتن نتایج آنها در ثبات‌ها در هر گام کنترلی </a:t>
             </a:r>
-            <a:endParaRPr lang="en-US" altLang="en-US" dirty="0" smtClean="0"/>
+            <a:endParaRPr lang="en-US" altLang="en-US" dirty="0"/>
           </a:p>
         </p:txBody>
       </p:sp>
@@ -23676,7 +23097,7 @@
               </a:pPr>
               <a:t>5</a:t>
             </a:fld>
-            <a:endParaRPr lang="en-US" altLang="en-US" sz="1300" b="0" smtClean="0">
+            <a:endParaRPr lang="en-US" altLang="en-US" sz="1300" b="0">
               <a:solidFill>
                 <a:schemeClr val="tx1"/>
               </a:solidFill>
@@ -23695,13 +23116,6 @@
   <p:clrMapOvr>
     <a:masterClrMapping/>
   </p:clrMapOvr>
-  <p:timing>
-    <p:tnLst>
-      <p:par>
-        <p:cTn id="1" dur="indefinite" restart="never" nodeType="tmRoot"/>
-      </p:par>
-    </p:tnLst>
-  </p:timing>
 </p:sld>
 </file>
 
@@ -23739,10 +23153,10 @@
           <a:p>
             <a:pPr rtl="1"/>
             <a:r>
-              <a:rPr lang="fa-IR" altLang="en-US" dirty="0" smtClean="0"/>
+              <a:rPr lang="fa-IR" altLang="en-US" dirty="0"/>
               <a:t>تاریخچه</a:t>
             </a:r>
-            <a:endParaRPr lang="en-US" altLang="en-US" dirty="0" smtClean="0"/>
+            <a:endParaRPr lang="en-US" altLang="en-US" dirty="0"/>
           </a:p>
         </p:txBody>
       </p:sp>
@@ -23767,66 +23181,66 @@
           <a:lstStyle/>
           <a:p>
             <a:r>
-              <a:rPr lang="fa-IR" altLang="en-US" dirty="0" smtClean="0"/>
+              <a:rPr lang="fa-IR" altLang="en-US" dirty="0"/>
               <a:t>کندی پردازنده‌ها</a:t>
             </a:r>
           </a:p>
           <a:p>
             <a:pPr lvl="1"/>
             <a:r>
-              <a:rPr lang="fa-IR" altLang="en-US" dirty="0" smtClean="0"/>
+              <a:rPr lang="fa-IR" altLang="en-US" dirty="0"/>
               <a:t>عدم جوابگویی به نیازهای بسیاری از کاربردها</a:t>
             </a:r>
           </a:p>
           <a:p>
             <a:pPr lvl="1"/>
             <a:r>
-              <a:rPr lang="fa-IR" altLang="en-US" dirty="0" smtClean="0">
+              <a:rPr lang="fa-IR" altLang="en-US" dirty="0">
                 <a:sym typeface="Wingdings" panose="05000000000000000000" pitchFamily="2" charset="2"/>
               </a:rPr>
               <a:t> </a:t>
             </a:r>
             <a:r>
-              <a:rPr lang="fa-IR" altLang="en-US" dirty="0" smtClean="0"/>
+              <a:rPr lang="fa-IR" altLang="en-US" dirty="0"/>
               <a:t>نیاز به شتاب‌دهی الگوریتم</a:t>
             </a:r>
-            <a:endParaRPr lang="en-US" altLang="en-US" dirty="0" smtClean="0"/>
+            <a:endParaRPr lang="en-US" altLang="en-US" dirty="0"/>
           </a:p>
           <a:p>
             <a:pPr lvl="1"/>
             <a:r>
-              <a:rPr lang="fa-IR" altLang="en-US" dirty="0" smtClean="0"/>
+              <a:rPr lang="fa-IR" altLang="en-US" dirty="0"/>
               <a:t>گزینه‌‌ها:</a:t>
             </a:r>
           </a:p>
           <a:p>
             <a:pPr lvl="2"/>
             <a:r>
-              <a:rPr lang="en-US" altLang="en-US" dirty="0" smtClean="0"/>
+              <a:rPr lang="en-US" altLang="en-US" dirty="0"/>
               <a:t>Multicores</a:t>
             </a:r>
           </a:p>
           <a:p>
             <a:pPr lvl="2"/>
             <a:r>
-              <a:rPr lang="en-US" altLang="en-US" dirty="0" err="1" smtClean="0"/>
+              <a:rPr lang="en-US" altLang="en-US" dirty="0" err="1"/>
               <a:t>Manycores</a:t>
             </a:r>
             <a:r>
-              <a:rPr lang="en-US" altLang="en-US" dirty="0" smtClean="0"/>
+              <a:rPr lang="en-US" altLang="en-US" dirty="0"/>
               <a:t> (GPU)</a:t>
             </a:r>
           </a:p>
           <a:p>
             <a:pPr lvl="2"/>
             <a:r>
-              <a:rPr lang="en-US" altLang="en-US" dirty="0" smtClean="0"/>
+              <a:rPr lang="en-US" altLang="en-US" dirty="0"/>
               <a:t>FPGA</a:t>
             </a:r>
           </a:p>
           <a:p>
             <a:pPr lvl="2"/>
-            <a:endParaRPr lang="fa-IR" altLang="en-US" dirty="0" smtClean="0"/>
+            <a:endParaRPr lang="fa-IR" altLang="en-US" dirty="0"/>
           </a:p>
         </p:txBody>
       </p:sp>
@@ -24028,7 +23442,7 @@
               </a:pPr>
               <a:t>6</a:t>
             </a:fld>
-            <a:endParaRPr lang="en-US" altLang="en-US" sz="1300" b="0" smtClean="0">
+            <a:endParaRPr lang="en-US" altLang="en-US" sz="1300" b="0">
               <a:solidFill>
                 <a:schemeClr val="tx1"/>
               </a:solidFill>
@@ -24047,13 +23461,6 @@
   <p:clrMapOvr>
     <a:masterClrMapping/>
   </p:clrMapOvr>
-  <p:timing>
-    <p:tnLst>
-      <p:par>
-        <p:cTn id="1" dur="indefinite" restart="never" nodeType="tmRoot"/>
-      </p:par>
-    </p:tnLst>
-  </p:timing>
 </p:sld>
 </file>
 
@@ -24091,10 +23498,10 @@
           <a:p>
             <a:pPr rtl="1"/>
             <a:r>
-              <a:rPr lang="fa-IR" altLang="en-US" dirty="0" smtClean="0"/>
+              <a:rPr lang="fa-IR" altLang="en-US" dirty="0"/>
               <a:t>تاریخچه</a:t>
             </a:r>
-            <a:endParaRPr lang="en-US" altLang="en-US" dirty="0" smtClean="0"/>
+            <a:endParaRPr lang="en-US" altLang="en-US" dirty="0"/>
           </a:p>
         </p:txBody>
       </p:sp>
@@ -24119,90 +23526,78 @@
           <a:lstStyle/>
           <a:p>
             <a:r>
-              <a:rPr lang="en-US" altLang="en-US" dirty="0" smtClean="0"/>
+              <a:rPr lang="en-US" altLang="en-US" dirty="0"/>
               <a:t>Multicore</a:t>
             </a:r>
             <a:r>
-              <a:rPr lang="fa-IR" altLang="en-US" dirty="0" smtClean="0"/>
+              <a:rPr lang="fa-IR" altLang="en-US" dirty="0"/>
               <a:t> و </a:t>
             </a:r>
             <a:r>
-              <a:rPr lang="en-US" altLang="en-US" dirty="0" smtClean="0"/>
+              <a:rPr lang="en-US" altLang="en-US" dirty="0"/>
               <a:t>GPU</a:t>
             </a:r>
             <a:r>
-              <a:rPr lang="fa-IR" altLang="en-US" dirty="0" smtClean="0"/>
+              <a:rPr lang="fa-IR" altLang="en-US" dirty="0"/>
               <a:t>:</a:t>
             </a:r>
           </a:p>
           <a:p>
-            <a:endParaRPr lang="fa-IR" altLang="en-US" sz="3600" dirty="0" smtClean="0"/>
+            <a:endParaRPr lang="fa-IR" altLang="en-US" sz="3600" dirty="0"/>
           </a:p>
           <a:p>
             <a:pPr lvl="1"/>
             <a:r>
               <a:rPr lang="fa-IR" altLang="en-US" sz="3200" dirty="0"/>
-              <a:t>جوابگو </a:t>
-            </a:r>
-            <a:r>
-              <a:rPr lang="fa-IR" altLang="en-US" sz="3200" dirty="0" smtClean="0"/>
-              <a:t>نبودن افزایش </a:t>
-            </a:r>
+              <a:t>جوابگو نبودن افزایش فرکانس پردازنده‌ها</a:t>
+            </a:r>
+          </a:p>
+          <a:p>
+            <a:pPr lvl="1"/>
             <a:r>
               <a:rPr lang="fa-IR" altLang="en-US" sz="3200" dirty="0"/>
-              <a:t>فرکانس </a:t>
-            </a:r>
-            <a:r>
-              <a:rPr lang="fa-IR" altLang="en-US" sz="3200" dirty="0" smtClean="0"/>
-              <a:t>پردازنده‌ها</a:t>
+              <a:t>نیاز طراحان نرم‌افزار به طراحی ساختار موازی الگوریتم‌ها برای چندپردازنده‌ها </a:t>
+            </a:r>
+            <a:r>
+              <a:rPr lang="fa-IR" altLang="en-US" sz="3200" b="1" dirty="0"/>
+              <a:t>به صورت کارامد</a:t>
             </a:r>
           </a:p>
           <a:p>
             <a:pPr lvl="1"/>
             <a:r>
-              <a:rPr lang="fa-IR" altLang="en-US" sz="3200" dirty="0" smtClean="0"/>
-              <a:t>نیاز طراحان نرم‌افزار به طراحی ساختار موازی الگوریتم‌ها برای چندپردازنده‌ها </a:t>
-            </a:r>
-            <a:r>
-              <a:rPr lang="fa-IR" altLang="en-US" sz="3200" b="1" dirty="0" smtClean="0"/>
-              <a:t>به صورت کارامد</a:t>
-            </a:r>
+              <a:rPr lang="fa-IR" altLang="en-US" sz="3200" dirty="0"/>
+              <a:t>تکنیک‌های طراحی الگوریتم‌های موازی مشابه مبانی طراحی با </a:t>
+            </a:r>
+            <a:r>
+              <a:rPr lang="en-US" altLang="en-US" dirty="0"/>
+              <a:t>FPGA</a:t>
+            </a:r>
+            <a:endParaRPr lang="fa-IR" altLang="en-US" sz="3200" dirty="0"/>
+          </a:p>
+          <a:p>
+            <a:pPr lvl="2"/>
+            <a:r>
+              <a:rPr lang="fa-IR" altLang="en-US" sz="2800" dirty="0"/>
+              <a:t> تفاوت: مدل برنامه‌نویسی/توصیف: </a:t>
+            </a:r>
+            <a:r>
+              <a:rPr lang="en-US" altLang="en-US" sz="2800" dirty="0"/>
+              <a:t>RTL</a:t>
+            </a:r>
+            <a:r>
+              <a:rPr lang="fa-IR" altLang="en-US" sz="2800" dirty="0"/>
+              <a:t> در برابر </a:t>
+            </a:r>
+            <a:r>
+              <a:rPr lang="en-US" altLang="en-US" sz="2800" dirty="0"/>
+              <a:t>C/C++</a:t>
+            </a:r>
+            <a:endParaRPr lang="fa-IR" altLang="en-US" dirty="0"/>
           </a:p>
           <a:p>
             <a:pPr lvl="1"/>
-            <a:r>
-              <a:rPr lang="fa-IR" altLang="en-US" sz="3200" dirty="0" smtClean="0"/>
-              <a:t>تکنیک‌های طراحی الگوریتم‌های موازی مشابه مبانی طراحی با </a:t>
-            </a:r>
-            <a:r>
-              <a:rPr lang="en-US" altLang="en-US" dirty="0" smtClean="0"/>
-              <a:t>FPGA</a:t>
-            </a:r>
-            <a:endParaRPr lang="fa-IR" altLang="en-US" sz="3200" dirty="0" smtClean="0"/>
-          </a:p>
-          <a:p>
-            <a:pPr lvl="2"/>
-            <a:r>
-              <a:rPr lang="fa-IR" altLang="en-US" sz="2800" dirty="0" smtClean="0"/>
-              <a:t> تفاوت: مدل برنامه‌نویسی/توصیف: </a:t>
-            </a:r>
-            <a:r>
-              <a:rPr lang="en-US" altLang="en-US" sz="2800" dirty="0" smtClean="0"/>
-              <a:t>RTL</a:t>
-            </a:r>
-            <a:r>
-              <a:rPr lang="fa-IR" altLang="en-US" sz="2800" dirty="0" smtClean="0"/>
-              <a:t> در برابر </a:t>
-            </a:r>
-            <a:r>
-              <a:rPr lang="en-US" altLang="en-US" sz="2800" dirty="0" smtClean="0"/>
-              <a:t>C/C++</a:t>
-            </a:r>
-            <a:endParaRPr lang="fa-IR" altLang="en-US" dirty="0" smtClean="0"/>
-          </a:p>
-          <a:p>
-            <a:pPr lvl="1"/>
-            <a:endParaRPr lang="fa-IR" altLang="en-US" dirty="0" smtClean="0"/>
+            <a:endParaRPr lang="fa-IR" altLang="en-US" dirty="0"/>
           </a:p>
         </p:txBody>
       </p:sp>
@@ -24404,7 +23799,7 @@
               </a:pPr>
               <a:t>7</a:t>
             </a:fld>
-            <a:endParaRPr lang="en-US" altLang="en-US" sz="1300" b="0" smtClean="0">
+            <a:endParaRPr lang="en-US" altLang="en-US" sz="1300" b="0">
               <a:solidFill>
                 <a:schemeClr val="tx1"/>
               </a:solidFill>
@@ -24423,13 +23818,6 @@
   <p:clrMapOvr>
     <a:masterClrMapping/>
   </p:clrMapOvr>
-  <p:timing>
-    <p:tnLst>
-      <p:par>
-        <p:cTn id="1" dur="indefinite" restart="never" nodeType="tmRoot"/>
-      </p:par>
-    </p:tnLst>
-  </p:timing>
 </p:sld>
 </file>
 
@@ -24470,7 +23858,7 @@
               <a:rPr lang="fa-IR" altLang="en-US" dirty="0"/>
               <a:t>مدل برنامه‌نویسی/توصیف</a:t>
             </a:r>
-            <a:endParaRPr lang="en-US" altLang="en-US" dirty="0" smtClean="0"/>
+            <a:endParaRPr lang="en-US" altLang="en-US" dirty="0"/>
           </a:p>
         </p:txBody>
       </p:sp>
@@ -24672,7 +24060,7 @@
               </a:pPr>
               <a:t>8</a:t>
             </a:fld>
-            <a:endParaRPr lang="en-US" altLang="en-US" sz="1300" b="0" smtClean="0">
+            <a:endParaRPr lang="en-US" altLang="en-US" sz="1300" b="0">
               <a:solidFill>
                 <a:schemeClr val="tx1"/>
               </a:solidFill>
@@ -24703,26 +24091,26 @@
           <a:p>
             <a:pPr lvl="1"/>
             <a:r>
-              <a:rPr lang="fa-IR" dirty="0" smtClean="0"/>
+              <a:rPr lang="fa-IR" dirty="0"/>
               <a:t>تأثیر مدل برنامه‌نویسی در مدت طراحی و کارایی</a:t>
             </a:r>
           </a:p>
           <a:p>
             <a:pPr lvl="2"/>
             <a:r>
-              <a:rPr lang="fa-IR" dirty="0" smtClean="0">
+              <a:rPr lang="fa-IR" dirty="0">
                 <a:sym typeface="Wingdings" panose="05000000000000000000" pitchFamily="2" charset="2"/>
               </a:rPr>
               <a:t> طراحی برای </a:t>
             </a:r>
             <a:r>
-              <a:rPr lang="en-US" dirty="0" smtClean="0">
+              <a:rPr lang="en-US" dirty="0">
                 <a:sym typeface="Wingdings" panose="05000000000000000000" pitchFamily="2" charset="2"/>
               </a:rPr>
               <a:t>FPGA</a:t>
             </a:r>
             <a:r>
-              <a:rPr lang="fa-IR" dirty="0" smtClean="0">
+              <a:rPr lang="fa-IR" dirty="0">
                 <a:sym typeface="Wingdings" panose="05000000000000000000" pitchFamily="2" charset="2"/>
               </a:rPr>
               <a:t> برای کاربردهایی که سایر سیستم‌ها جوابگوی سرعت نیستند</a:t>
@@ -24765,13 +24153,6 @@
   <p:clrMapOvr>
     <a:masterClrMapping/>
   </p:clrMapOvr>
-  <p:timing>
-    <p:tnLst>
-      <p:par>
-        <p:cTn id="1" dur="indefinite" restart="never" nodeType="tmRoot"/>
-      </p:par>
-    </p:tnLst>
-  </p:timing>
 </p:sld>
 </file>
 
@@ -24809,10 +24190,10 @@
           <a:p>
             <a:pPr rtl="1"/>
             <a:r>
-              <a:rPr lang="fa-IR" altLang="en-US" dirty="0" smtClean="0"/>
+              <a:rPr lang="fa-IR" altLang="en-US" dirty="0"/>
               <a:t>مدل برنامه‌نویسی/توصیف</a:t>
             </a:r>
-            <a:endParaRPr lang="en-US" altLang="en-US" dirty="0" smtClean="0"/>
+            <a:endParaRPr lang="en-US" altLang="en-US" dirty="0"/>
           </a:p>
         </p:txBody>
       </p:sp>
@@ -25014,7 +24395,7 @@
               </a:pPr>
               <a:t>9</a:t>
             </a:fld>
-            <a:endParaRPr lang="en-US" altLang="en-US" sz="1300" b="0" smtClean="0">
+            <a:endParaRPr lang="en-US" altLang="en-US" sz="1300" b="0">
               <a:solidFill>
                 <a:schemeClr val="tx1"/>
               </a:solidFill>
@@ -25039,40 +24420,39 @@
           <a:lstStyle/>
           <a:p>
             <a:r>
-              <a:rPr lang="fa-IR" dirty="0" smtClean="0"/>
+              <a:rPr lang="fa-IR" dirty="0"/>
               <a:t>سنتز سطح بالا:</a:t>
             </a:r>
           </a:p>
           <a:p>
             <a:pPr lvl="1"/>
             <a:r>
-              <a:rPr lang="fa-IR" dirty="0" smtClean="0"/>
+              <a:rPr lang="fa-IR" dirty="0"/>
               <a:t>پیشرفت‌های اخیر: استفاده از مدل برنامه‌نویسی مشابه طراحی نرم‌افزار (</a:t>
             </a:r>
             <a:r>
-              <a:rPr lang="en-US" dirty="0" smtClean="0"/>
+              <a:rPr lang="en-US" dirty="0"/>
               <a:t>C/C++</a:t>
             </a:r>
             <a:r>
-              <a:rPr lang="fa-IR" dirty="0" smtClean="0"/>
+              <a:rPr lang="fa-IR" dirty="0"/>
               <a:t>)</a:t>
             </a:r>
           </a:p>
           <a:p>
             <a:pPr lvl="1"/>
             <a:r>
-              <a:rPr lang="fa-IR" dirty="0" smtClean="0"/>
+              <a:rPr lang="fa-IR" dirty="0"/>
               <a:t>نیاز به آشنایی با پلتفرم سخت‌افزاری </a:t>
             </a:r>
             <a:r>
-              <a:rPr lang="en-US" dirty="0" smtClean="0"/>
+              <a:rPr lang="en-US" dirty="0"/>
               <a:t>FPGA</a:t>
             </a:r>
             <a:r>
-              <a:rPr lang="fa-IR" dirty="0" smtClean="0"/>
+              <a:rPr lang="fa-IR" dirty="0"/>
               <a:t> برای رسیدن به هدف کارایی (سرعت)</a:t>
             </a:r>
-            <a:endParaRPr lang="fa-IR" dirty="0"/>
           </a:p>
         </p:txBody>
       </p:sp>
@@ -25086,13 +24466,6 @@
   <p:clrMapOvr>
     <a:masterClrMapping/>
   </p:clrMapOvr>
-  <p:timing>
-    <p:tnLst>
-      <p:par>
-        <p:cTn id="1" dur="indefinite" restart="never" nodeType="tmRoot"/>
-      </p:par>
-    </p:tnLst>
-  </p:timing>
 </p:sld>
 </file>
 
